--- a/4_Day4/Presentation/IntroAnimalMovements_HMMs.pptx
+++ b/4_Day4/Presentation/IntroAnimalMovements_HMMs.pptx
@@ -6,7 +6,7 @@
     <p:sldMasterId id="2147483660" r:id="rId2"/>
   </p:sldMasterIdLst>
   <p:notesMasterIdLst>
-    <p:notesMasterId r:id="rId22"/>
+    <p:notesMasterId r:id="rId23"/>
   </p:notesMasterIdLst>
   <p:sldIdLst>
     <p:sldId id="256" r:id="rId3"/>
@@ -26,8 +26,9 @@
     <p:sldId id="273" r:id="rId17"/>
     <p:sldId id="271" r:id="rId18"/>
     <p:sldId id="288" r:id="rId19"/>
-    <p:sldId id="277" r:id="rId20"/>
-    <p:sldId id="282" r:id="rId21"/>
+    <p:sldId id="289" r:id="rId20"/>
+    <p:sldId id="277" r:id="rId21"/>
+    <p:sldId id="282" r:id="rId22"/>
   </p:sldIdLst>
   <p:sldSz cx="12192000" cy="6858000"/>
   <p:notesSz cx="6858000" cy="9144000"/>
@@ -130,6 +131,9 @@
     <p:ext uri="{EFAFB233-063F-42B5-8137-9DF3F51BA10A}">
       <p15:sldGuideLst xmlns:p15="http://schemas.microsoft.com/office/powerpoint/2012/main"/>
     </p:ext>
+    <p:ext uri="{2D200454-40CA-4A62-9FC3-DE9A4176ACB9}">
+      <p15:notesGuideLst xmlns:p15="http://schemas.microsoft.com/office/powerpoint/2012/main"/>
+    </p:ext>
   </p:extLst>
 </p:presentation>
 </file>
@@ -216,7 +220,7 @@
           <a:p>
             <a:fld id="{0DC3ADD9-A38B-4BE5-AC76-350827CA9FF8}" type="datetimeFigureOut">
               <a:rPr lang="en-US" smtClean="0"/>
-              <a:t>8/4/2025</a:t>
+              <a:t>8/6/2025</a:t>
             </a:fld>
             <a:endParaRPr lang="en-US"/>
           </a:p>
@@ -529,19 +533,7 @@
           <a:p>
             <a:r>
               <a:rPr lang="en-US" dirty="0"/>
-              <a:t>Hello everyone.</a:t>
-            </a:r>
-          </a:p>
-          <a:p>
-            <a:r>
-              <a:rPr lang="en-US" dirty="0"/>
-              <a:t> </a:t>
-            </a:r>
-          </a:p>
-          <a:p>
-            <a:r>
-              <a:rPr lang="en-US" dirty="0"/>
-              <a:t>Today we’re going to start investigating what else we can infer about the animal’s we’ve fitted with tracking devices.  </a:t>
+              <a:t>Today we’ll investigate what else we can infer about the animal’s we’ve fitted with tracking devices.  </a:t>
             </a:r>
           </a:p>
           <a:p>
@@ -559,16 +551,7 @@
           <a:p>
             <a:r>
               <a:rPr lang="en-US" dirty="0"/>
-              <a:t>So, we’re going to start addressing these questions over the next few lectures, but it’s important to realize that we are inferring these behaviors solely based on the animal movement data.</a:t>
-            </a:r>
-          </a:p>
-          <a:p>
-            <a:endParaRPr lang="en-US" dirty="0"/>
-          </a:p>
-          <a:p>
-            <a:r>
-              <a:rPr lang="en-US" dirty="0"/>
-              <a:t>My lecture notes are heavily influenced by a course taught at the Smithsonian-Mason School of Conservation and I’ve left a link to these classes here.  But, I also what to thank Dr. Joe Kolowski, the instructor for this class, for sharing his notes to help guide you.  I’d encourage to you to check out this site for other courses that might be of interest to you.</a:t>
+              <a:t>One way to address these questions is by Behavioral partitioning.</a:t>
             </a:r>
           </a:p>
         </p:txBody>
@@ -659,7 +642,7 @@
             </a:r>
             <a:r>
               <a:rPr lang="en-US" dirty="0" err="1"/>
-              <a:t>moveHMM</a:t>
+              <a:t>momentuHMM</a:t>
             </a:r>
             <a:r>
               <a:rPr lang="en-US" dirty="0"/>
@@ -676,7 +659,7 @@
             </a:r>
             <a:r>
               <a:rPr lang="en-US" dirty="0" err="1"/>
-              <a:t>moveHMM</a:t>
+              <a:t>momentuHMM</a:t>
             </a:r>
             <a:r>
               <a:rPr lang="en-US" dirty="0"/>
@@ -976,7 +959,7 @@
           <a:p>
             <a:r>
               <a:rPr lang="en-US" dirty="0"/>
-              <a:t>First, we need to identify starting parameter values and the correct form of the distributions.  We, can test for the correct forms using sensitivity analyses, but this can be difficult, especially when models become more complex.</a:t>
+              <a:t>First, we need to identify starting parameter values and the correct form of the distributions.  We can test for the correct forms using sensitivity analyses, but this can be difficult, especially when models become more complex.</a:t>
             </a:r>
           </a:p>
           <a:p>
@@ -1122,7 +1105,15 @@
           <a:p>
             <a:r>
               <a:rPr lang="en-US" dirty="0"/>
-              <a:t>To give you an appreciation for some of the applications of using a HMM to characterize animal behavior, I’ve provided a few examples for you to read through.  The first is a humpback whale study where the researchers separated whale movements into two states, a foraging state which is shown in red and a traveling state in green.  It’s hard to see from the graph, but you should see the difference in the scales of both of these maps.  In the map of the left, whales are movement across a much smaller area, feeding mostly along the costly of these relatively small islands.  In the graph on the left the scale is much larger, with whales moving broadly across the area and almost exclusively traveling rather than foraging.</a:t>
+              <a:t>To give you an appreciation for some of the applications of using a HMM to characterize animal behavior, I’ve provided a few examples for you to read through.  The first is a humpback whale study where the researchers separated whale movements into two states, a foraging state which is shown in red and a traveling state in green.  It’s hard to see from the graph, but you should see the difference in the scales of both of these maps.  In the map of the left, whales are movement across a much smaller area, feeding mostly along the </a:t>
+            </a:r>
+            <a:r>
+              <a:rPr lang="en-US" dirty="0" err="1"/>
+              <a:t>costline</a:t>
+            </a:r>
+            <a:r>
+              <a:rPr lang="en-US" dirty="0"/>
+              <a:t> of these relatively small islands.  In the graph on the right, the scale is much larger, with whales moving broadly across the area and almost exclusively traveling rather than foraging.</a:t>
             </a:r>
           </a:p>
         </p:txBody>
@@ -1209,7 +1200,7 @@
           <a:p>
             <a:r>
               <a:rPr lang="en-US" dirty="0"/>
-              <a:t>This next example is of white sharks that are colored (black and grey) to highlight two different behavioral states.  The black denotes an area restrictive search behavior and the grey denotes patrolling behavior.  What they found was that area restrictive search behavior increase during morning periods and when tourist operations were chumming the water to facilitate shark viewing.  They also found that found that the proportion of time that individuals spent in each state, different between sexes, the main point of the figure to show the dramatic differences observed.   </a:t>
+              <a:t>This next example is of white sharks that are colored (black and grey) to highlight two different behavioral states.  The black denotes an area restrictive search behavior and the grey denotes patrolling behavior.  What they found was that area restrictive search behavior increase during morning periods and when tourist operations were chumming the water to facilitate shark viewing.  They also found that the proportion of time that individuals spent in each state, different between sexes, the main point of the figure to show the dramatic differences observed.   </a:t>
             </a:r>
           </a:p>
         </p:txBody>
@@ -1391,7 +1382,7 @@
           <a:p>
             <a:r>
               <a:rPr lang="en-US" dirty="0"/>
-              <a:t>And last, this paper takes this aspect a step further, fully integrating the results from a Hidden Markov Model into a step selection function analyses and trying to pull as much information from the movement track to improve a habitat selection analyses.  This seems like the direction that this field is heading.  Here we see two different behavioral states for plains zebra, displayed in a figure we can generate from the </a:t>
+              <a:t>This paper integrates the results from a Hidden Markov Model into a step selection function analyses and tries to pull as much information from the movement track to improve a habitat selection analyses.  This seems like the direction that this field is heading.  Here we see two different behavioral states for plains zebra, displayed in a figure we can generate from the </a:t>
             </a:r>
             <a:r>
               <a:rPr lang="en-US" dirty="0" err="1"/>
@@ -1399,13 +1390,8 @@
             </a:r>
             <a:r>
               <a:rPr lang="en-US" dirty="0"/>
-              <a:t> package to visualize the switches in behavior that occurred over a 3 year tracking period.  From the graph we see that this animal spent long periods in one behavior compared to another, allowing us to investigate other potentially more interesting questions about why this might be.  Is it related, for example, to changes in habitat </a:t>
-            </a:r>
-            <a:r>
-              <a:rPr lang="en-US"/>
-              <a:t>or climate, etc.</a:t>
-            </a:r>
-            <a:endParaRPr lang="en-US" dirty="0"/>
+              <a:t> package to visualize the switches in behavior that occurred over a 3 year tracking period.  From the graph we see that this animal spent long periods in one behavior compared to another, allowing us to investigate other potentially more interesting questions about why this might be.  Is it related, for example, to changes in habitat or climate, etc.</a:t>
+            </a:r>
           </a:p>
         </p:txBody>
       </p:sp>
@@ -1491,7 +1477,7 @@
           <a:p>
             <a:r>
               <a:rPr lang="en-US" dirty="0"/>
-              <a:t>We’re going to start with a process called Behavioral Partitioning.</a:t>
+              <a:t>Behavioral Partitioning involves using characteristics of the movement information, typically across all individuals, in order to assign a label to segments of the movement path to identify what the animal or animals were doing.  More technically correct, what we are doing is identifying when is the animal doing something different from what it was previously doing.  Has the movements changed over time and what does that change in movement mean?</a:t>
             </a:r>
           </a:p>
           <a:p>
@@ -1500,7 +1486,7 @@
           <a:p>
             <a:r>
               <a:rPr lang="en-US" dirty="0"/>
-              <a:t>This involves using characteristics of the movement information, typically across all individuals, in order to assign a label to segments of the movement path to identify what the animal or animals were doing.  More technically correct, what we are doing is identifying when is the animal doing something different from what it was previously doing.  Has the movements changed over time and what does that change in movement mean?</a:t>
+              <a:t>From this, we are trying to associate these changes in movement with a specific behavior.</a:t>
             </a:r>
           </a:p>
           <a:p>
@@ -1509,34 +1495,7 @@
           <a:p>
             <a:r>
               <a:rPr lang="en-US" dirty="0"/>
-              <a:t>From this, we are trying to associate these changes in movement with ideally, a specific behavior.</a:t>
-            </a:r>
-          </a:p>
-          <a:p>
-            <a:endParaRPr lang="en-US" dirty="0"/>
-          </a:p>
-          <a:p>
-            <a:r>
-              <a:rPr lang="en-US" dirty="0"/>
-              <a:t>We have a few options available to us to answer these types of questions, all of which differ in their assumptions, the complexity of their output, and in their explanatory potential.  These include:</a:t>
-            </a:r>
-          </a:p>
-          <a:p>
-            <a:endParaRPr lang="en-US" dirty="0"/>
-          </a:p>
-          <a:p>
-            <a:r>
-              <a:rPr lang="en-US" dirty="0"/>
-              <a:t>Hidden Mark Models or so-called State-Switching State Space Models, Behavioral Change Point Analysis (BCPA), First Passage Time or Residence Time, and Multi-state Random Walks.  We going to spend most of our discussion on HMMs because this is the most developed of these behavioral partitioning models.</a:t>
-            </a:r>
-          </a:p>
-          <a:p>
-            <a:endParaRPr lang="en-US" dirty="0"/>
-          </a:p>
-          <a:p>
-            <a:r>
-              <a:rPr lang="en-US" dirty="0"/>
-              <a:t>I’ve also listed the Gurarie et al 2016 paper, as it provides a very nice summary and comparison of all 4 of these methods.  The paper is also included in the lecture file notes.</a:t>
+              <a:t>We have a few options available to us to answer these types of questions, these include Hidden Mark Models or so-called State-Switching State Space Models, Behavioral Change Point Analysis (BCPA), First Passage Time or Residence Time, and Multi-state Random Walks.  We’ll walk through some example code to fit a HMM, but I’ve also listed Gurarie et al 2016 paper which provides a very nice summary of these methods. </a:t>
             </a:r>
           </a:p>
         </p:txBody>
@@ -1623,7 +1582,7 @@
           <a:p>
             <a:r>
               <a:rPr lang="en-US" dirty="0"/>
-              <a:t>So why would we want to break out these behaviors, especially as researchers or protected area managers?  The Gurarie paper does a good job of explaining this, breaking out the objectives of animal movement studies into three main categories: Exploratory, Explanatory, and Predictive.</a:t>
+              <a:t>One of the things the Gurarie paper does well is to break apart the objectives of animal movement studies into three main categories: Exploratory, Explanatory, and Predictive.</a:t>
             </a:r>
           </a:p>
           <a:p>
@@ -1746,7 +1705,7 @@
           <a:p>
             <a:r>
               <a:rPr lang="en-US" dirty="0"/>
-              <a:t>We’ll start with Hidden Markov Models, which I’ll commonly refer to as HMMs.  These are also often referred to as state switching models.  These are discrete time, discrete state, state space models.  So, this is an important distinction from the models that Chris has been describing.  The behavioral state of the animal is the unobserved, or the latent state, that we are trying to predict.</a:t>
+              <a:t>HMMs are discrete time, discrete state, state space models. The behavioral state of the animal is the unobserved, or the latent state, that we are trying to predict.</a:t>
             </a:r>
           </a:p>
           <a:p>
@@ -1764,7 +1723,7 @@
           <a:p>
             <a:r>
               <a:rPr lang="en-US" dirty="0"/>
-              <a:t>The key assumption is that we have some unknown number of unobserved behavioral states and these behavioral states can be distinguished by distinct statistical distributions of step lengths and turning angles.  This is really the core of this approach. </a:t>
+              <a:t>The key assumption is that we have some unknown number of unobserved behavioral states and these behavioral states can be distinguished by distinct statistical distributions of step lengths and turning angles.  </a:t>
             </a:r>
           </a:p>
         </p:txBody>
@@ -1869,7 +1828,7 @@
           <a:p>
             <a:r>
               <a:rPr lang="en-US" dirty="0"/>
-              <a:t>We assume that this latent state process is a Markov process, meaning that information about the current state is used to make information about the following or future state.</a:t>
+              <a:t>We assume that this latent state process is a Markov process, meaning that information about the current state is used to make inference about the following or future state.</a:t>
             </a:r>
           </a:p>
           <a:p>
@@ -1886,15 +1845,7 @@
             </a:r>
             <a:r>
               <a:rPr lang="en-US" dirty="0"/>
-              <a:t> or </a:t>
-            </a:r>
-            <a:r>
-              <a:rPr lang="en-US" dirty="0" err="1"/>
-              <a:t>or</a:t>
-            </a:r>
-            <a:r>
-              <a:rPr lang="en-US" dirty="0"/>
-              <a:t> 2</a:t>
+              <a:t> order 2</a:t>
             </a:r>
             <a:r>
               <a:rPr lang="en-US" baseline="30000" dirty="0"/>
@@ -1902,7 +1853,7 @@
             </a:r>
             <a:r>
               <a:rPr lang="en-US" dirty="0"/>
-              <a:t> or Markov process.  This just mean how many previous states are used (1 or 2 or more) to inform the current or future state.  So a 1</a:t>
+              <a:t> order Markov process.  This just mean how many previous states are used (1 or 2 or more) to inform the current or future state.  So a 1</a:t>
             </a:r>
             <a:r>
               <a:rPr lang="en-US" baseline="30000" dirty="0"/>
@@ -2027,7 +1978,7 @@
           <a:p>
             <a:r>
               <a:rPr lang="en-US" dirty="0"/>
-              <a:t>So with these models, we are going to estimate transition probabilities, which we see in the matrix table on the bottom left.   And it’s going to estimate the parameters of the statistical distributions of step length and turning angles for each of our states.  This is the kind of output that we will see with these models.  On the right, which is taken from XXX, you can see the raw data summarizes in columns, and the model fitted estimates of these parameters, shown as thick curved lines.  Step lengths are at the top and turning angles on the bottom.  Most important for you at this point is simply to notice the difference in the distributions between each of these states.</a:t>
+              <a:t>So with these models, we are going to estimate transition probabilities, which we see in the matrix table on the bottom left.   And it’s going to estimate the parameters of the statistical distributions of step length and turning angles for each of our states.  This is the kind of output that we will see with these models.  On the right, which is taken from XXX,, shown as thick curved lines.  Step lengths are at the top and turning angles on the bottom.  Most important for you at this point is simply to notice the difference in the distributions between each of these states.</a:t>
             </a:r>
           </a:p>
           <a:p>
@@ -2174,7 +2125,7 @@
           <a:p>
             <a:r>
               <a:rPr lang="en-US" dirty="0"/>
-              <a:t>Then, we need to setup the distributions for step length and turning angles and we need to do this for each of the states.  This means we first need to specify the shape of the distribution.  For the steplengths, we have four potential distributions to choose from.  A gamma distribution is the default, but we could also choose a Weibull, a log-normal, or an exponential distribution.  These dictate the shape and behavior of the curves.  For Gamma, we then need to provide the mean, variance, and zero-mass.  The zero mass needs to be used if you have steplengths of 0. </a:t>
+              <a:t>Then, we need to setup the distributions for step length and turning angles and we need to do this for each of the states.  This means we first need to specify the shape of the distribution.  For the steplengths, we have a few potential distributions to choose from.  A gamma distribution is the default, but we could also choose a Weibull, a log-normal, or an exponential distribution.  These dictate the shape and behavior of the curves.  For Gamma, we then need to provide the mean and variance. </a:t>
             </a:r>
           </a:p>
           <a:p>
@@ -2183,7 +2134,7 @@
           <a:p>
             <a:r>
               <a:rPr lang="en-US" dirty="0"/>
-              <a:t>For our turning angles, we have two potential distribution options, the von Mises (which is the default) and the wrapped Cauchy.  Both are circular distributions, which require the mean turning angle and the clustering parameter which is similar to the variance of the turning angle distribution.</a:t>
+              <a:t>For our turning angles, we have a few potential distribution options, the von Mises and the wrapped Cauchy.  Both are circular distributions, which require the mean turning angle and the clustering parameter which is similar to the variance of the turning angle distribution.</a:t>
             </a:r>
           </a:p>
           <a:p>
@@ -2192,7 +2143,7 @@
           <a:p>
             <a:r>
               <a:rPr lang="en-US" dirty="0"/>
-              <a:t>The Transition probably matrix will then be estimated based on our starting states.  This will be estimated for us once we input all the other values, so we don’t need to put starting values here….this will be estimated.</a:t>
+              <a:t>The Transition probably matrix will then be estimated based on our starting states.  This will be estimated for us once we input all the other values, so we don’t need to put starting values here….these will be estimated.</a:t>
             </a:r>
           </a:p>
         </p:txBody>
@@ -2297,7 +2248,7 @@
           <a:p>
             <a:r>
               <a:rPr lang="en-US" dirty="0"/>
-              <a:t>It’s important to note that with these models we are assuming regular sampling intervals with negligible error.  If this assumption can’t be met, pre-processing of the data would be necessary.  Chris highlighted some ways of removing erroneous points, but other methods exist to smooth travel path and remove or minimize erroneous data points.  The problem here is that the latent states that we are estimating are completing based on the steplengths and turning angles.  And, if these are incorrect or biased in some way, it can have a huge on these distributions and impact our results.</a:t>
+              <a:t>It’s important to note that with these models we are assuming regular sampling intervals with negligible error.  If this assumption can’t be met, pre-processing of the data would be necessary.  There are a few ways to simulate movement paths, once of which would be to use CTMM.  The problem here is that the latent states that we are estimating are completing based on the steplengths and turning angles.  And, if these are incorrect or biased in some way, it can have a huge on these distributions and impact our results.</a:t>
             </a:r>
           </a:p>
           <a:p>
@@ -2306,7 +2257,7 @@
           <a:p>
             <a:r>
               <a:rPr lang="en-US" dirty="0"/>
-              <a:t>There is not date/time included in these models……we have to make sure we are feeding the data in an ordered sequence (Chronologically), which we’ll do together during the coding part of lecture.  As a result, we need to be very careful about irregularly sampled data, as the model won’t differentiate.</a:t>
+              <a:t>There is not date/time included in these models……we have to make sure we are feeding the data in an ordered sequence (Chronologically).  As a result, we need to be very careful about irregularly sampled data, as the model won’t differentiate.</a:t>
             </a:r>
           </a:p>
           <a:p>
@@ -2402,15 +2353,7 @@
           <a:p>
             <a:r>
               <a:rPr lang="en-US" dirty="0"/>
-              <a:t>Here, I’m showing you the gamma distribution, which is taken directly from the </a:t>
-            </a:r>
-            <a:r>
-              <a:rPr lang="en-US" dirty="0" err="1"/>
-              <a:t>Pohle</a:t>
-            </a:r>
-            <a:r>
-              <a:rPr lang="en-US" dirty="0"/>
-              <a:t> et al paper.  The nice aspect of this distribution and why it’s used is that values cannot go below 0.  You can’t have a negative </a:t>
+              <a:t>Here, I’m showing you the gamma distribution.  The nice aspect of this distribution and why it’s used is that values cannot go below 0.  You can’t have a negative </a:t>
             </a:r>
             <a:r>
               <a:rPr lang="en-US" dirty="0" err="1"/>
@@ -2615,7 +2558,7 @@
           <a:p>
             <a:fld id="{0F40EE0F-3D5D-4E7E-9C3F-44BCD00311B7}" type="datetimeFigureOut">
               <a:rPr lang="en-US" smtClean="0"/>
-              <a:t>8/4/2025</a:t>
+              <a:t>8/6/2025</a:t>
             </a:fld>
             <a:endParaRPr lang="en-US"/>
           </a:p>
@@ -2813,7 +2756,7 @@
           <a:p>
             <a:fld id="{0F40EE0F-3D5D-4E7E-9C3F-44BCD00311B7}" type="datetimeFigureOut">
               <a:rPr lang="en-US" smtClean="0"/>
-              <a:t>8/4/2025</a:t>
+              <a:t>8/6/2025</a:t>
             </a:fld>
             <a:endParaRPr lang="en-US"/>
           </a:p>
@@ -3021,7 +2964,7 @@
           <a:p>
             <a:fld id="{0F40EE0F-3D5D-4E7E-9C3F-44BCD00311B7}" type="datetimeFigureOut">
               <a:rPr lang="en-US" smtClean="0"/>
-              <a:t>8/4/2025</a:t>
+              <a:t>8/6/2025</a:t>
             </a:fld>
             <a:endParaRPr lang="en-US"/>
           </a:p>
@@ -3249,7 +3192,7 @@
           <a:p>
             <a:fld id="{9C09B839-4597-4A24-8E17-71B237D9282C}" type="datetimeFigureOut">
               <a:rPr lang="en-US" smtClean="0"/>
-              <a:t>8/4/2025</a:t>
+              <a:t>8/6/2025</a:t>
             </a:fld>
             <a:endParaRPr lang="en-US"/>
           </a:p>
@@ -3471,7 +3414,7 @@
           <a:p>
             <a:fld id="{9C09B839-4597-4A24-8E17-71B237D9282C}" type="datetimeFigureOut">
               <a:rPr lang="en-US" smtClean="0"/>
-              <a:t>8/4/2025</a:t>
+              <a:t>8/6/2025</a:t>
             </a:fld>
             <a:endParaRPr lang="en-US"/>
           </a:p>
@@ -3770,7 +3713,7 @@
           <a:p>
             <a:fld id="{9C09B839-4597-4A24-8E17-71B237D9282C}" type="datetimeFigureOut">
               <a:rPr lang="en-US" smtClean="0"/>
-              <a:t>8/4/2025</a:t>
+              <a:t>8/6/2025</a:t>
             </a:fld>
             <a:endParaRPr lang="en-US"/>
           </a:p>
@@ -4059,7 +4002,7 @@
           <a:p>
             <a:fld id="{9C09B839-4597-4A24-8E17-71B237D9282C}" type="datetimeFigureOut">
               <a:rPr lang="en-US" smtClean="0"/>
-              <a:t>8/4/2025</a:t>
+              <a:t>8/6/2025</a:t>
             </a:fld>
             <a:endParaRPr lang="en-US"/>
           </a:p>
@@ -4495,7 +4438,7 @@
           <a:p>
             <a:fld id="{9C09B839-4597-4A24-8E17-71B237D9282C}" type="datetimeFigureOut">
               <a:rPr lang="en-US" smtClean="0"/>
-              <a:t>8/4/2025</a:t>
+              <a:t>8/6/2025</a:t>
             </a:fld>
             <a:endParaRPr lang="en-US"/>
           </a:p>
@@ -4660,7 +4603,7 @@
           <a:p>
             <a:fld id="{9C09B839-4597-4A24-8E17-71B237D9282C}" type="datetimeFigureOut">
               <a:rPr lang="en-US" smtClean="0"/>
-              <a:t>8/4/2025</a:t>
+              <a:t>8/6/2025</a:t>
             </a:fld>
             <a:endParaRPr lang="en-US"/>
           </a:p>
@@ -4797,7 +4740,7 @@
           <a:p>
             <a:fld id="{9C09B839-4597-4A24-8E17-71B237D9282C}" type="datetimeFigureOut">
               <a:rPr lang="en-US" smtClean="0"/>
-              <a:t>8/4/2025</a:t>
+              <a:t>8/6/2025</a:t>
             </a:fld>
             <a:endParaRPr lang="en-US"/>
           </a:p>
@@ -5132,7 +5075,7 @@
           <a:p>
             <a:fld id="{9C09B839-4597-4A24-8E17-71B237D9282C}" type="datetimeFigureOut">
               <a:rPr lang="en-US" smtClean="0"/>
-              <a:t>8/4/2025</a:t>
+              <a:t>8/6/2025</a:t>
             </a:fld>
             <a:endParaRPr lang="en-US"/>
           </a:p>
@@ -5346,7 +5289,7 @@
           <a:p>
             <a:fld id="{0F40EE0F-3D5D-4E7E-9C3F-44BCD00311B7}" type="datetimeFigureOut">
               <a:rPr lang="en-US" smtClean="0"/>
-              <a:t>8/4/2025</a:t>
+              <a:t>8/6/2025</a:t>
             </a:fld>
             <a:endParaRPr lang="en-US"/>
           </a:p>
@@ -5642,7 +5585,7 @@
           <a:p>
             <a:fld id="{9C09B839-4597-4A24-8E17-71B237D9282C}" type="datetimeFigureOut">
               <a:rPr lang="en-US" smtClean="0"/>
-              <a:t>8/4/2025</a:t>
+              <a:t>8/6/2025</a:t>
             </a:fld>
             <a:endParaRPr lang="en-US"/>
           </a:p>
@@ -5864,7 +5807,7 @@
           <a:p>
             <a:fld id="{9C09B839-4597-4A24-8E17-71B237D9282C}" type="datetimeFigureOut">
               <a:rPr lang="en-US" smtClean="0"/>
-              <a:t>8/4/2025</a:t>
+              <a:t>8/6/2025</a:t>
             </a:fld>
             <a:endParaRPr lang="en-US"/>
           </a:p>
@@ -6096,7 +6039,7 @@
           <a:p>
             <a:fld id="{9C09B839-4597-4A24-8E17-71B237D9282C}" type="datetimeFigureOut">
               <a:rPr lang="en-US" smtClean="0"/>
-              <a:t>8/4/2025</a:t>
+              <a:t>8/6/2025</a:t>
             </a:fld>
             <a:endParaRPr lang="en-US"/>
           </a:p>
@@ -6387,7 +6330,7 @@
           <a:p>
             <a:fld id="{0F40EE0F-3D5D-4E7E-9C3F-44BCD00311B7}" type="datetimeFigureOut">
               <a:rPr lang="en-US" smtClean="0"/>
-              <a:t>8/4/2025</a:t>
+              <a:t>8/6/2025</a:t>
             </a:fld>
             <a:endParaRPr lang="en-US"/>
           </a:p>
@@ -6652,7 +6595,7 @@
           <a:p>
             <a:fld id="{0F40EE0F-3D5D-4E7E-9C3F-44BCD00311B7}" type="datetimeFigureOut">
               <a:rPr lang="en-US" smtClean="0"/>
-              <a:t>8/4/2025</a:t>
+              <a:t>8/6/2025</a:t>
             </a:fld>
             <a:endParaRPr lang="en-US"/>
           </a:p>
@@ -7064,7 +7007,7 @@
           <a:p>
             <a:fld id="{0F40EE0F-3D5D-4E7E-9C3F-44BCD00311B7}" type="datetimeFigureOut">
               <a:rPr lang="en-US" smtClean="0"/>
-              <a:t>8/4/2025</a:t>
+              <a:t>8/6/2025</a:t>
             </a:fld>
             <a:endParaRPr lang="en-US"/>
           </a:p>
@@ -7205,7 +7148,7 @@
           <a:p>
             <a:fld id="{0F40EE0F-3D5D-4E7E-9C3F-44BCD00311B7}" type="datetimeFigureOut">
               <a:rPr lang="en-US" smtClean="0"/>
-              <a:t>8/4/2025</a:t>
+              <a:t>8/6/2025</a:t>
             </a:fld>
             <a:endParaRPr lang="en-US"/>
           </a:p>
@@ -7318,7 +7261,7 @@
           <a:p>
             <a:fld id="{0F40EE0F-3D5D-4E7E-9C3F-44BCD00311B7}" type="datetimeFigureOut">
               <a:rPr lang="en-US" smtClean="0"/>
-              <a:t>8/4/2025</a:t>
+              <a:t>8/6/2025</a:t>
             </a:fld>
             <a:endParaRPr lang="en-US"/>
           </a:p>
@@ -7629,7 +7572,7 @@
           <a:p>
             <a:fld id="{0F40EE0F-3D5D-4E7E-9C3F-44BCD00311B7}" type="datetimeFigureOut">
               <a:rPr lang="en-US" smtClean="0"/>
-              <a:t>8/4/2025</a:t>
+              <a:t>8/6/2025</a:t>
             </a:fld>
             <a:endParaRPr lang="en-US"/>
           </a:p>
@@ -7917,7 +7860,7 @@
           <a:p>
             <a:fld id="{0F40EE0F-3D5D-4E7E-9C3F-44BCD00311B7}" type="datetimeFigureOut">
               <a:rPr lang="en-US" smtClean="0"/>
-              <a:t>8/4/2025</a:t>
+              <a:t>8/6/2025</a:t>
             </a:fld>
             <a:endParaRPr lang="en-US"/>
           </a:p>
@@ -8158,7 +8101,7 @@
           <a:p>
             <a:fld id="{0F40EE0F-3D5D-4E7E-9C3F-44BCD00311B7}" type="datetimeFigureOut">
               <a:rPr lang="en-US" smtClean="0"/>
-              <a:t>8/4/2025</a:t>
+              <a:t>8/6/2025</a:t>
             </a:fld>
             <a:endParaRPr lang="en-US"/>
           </a:p>
@@ -9653,12 +9596,12 @@
               <a:t>Hidden Markov Models with </a:t>
             </a:r>
             <a:r>
-              <a:rPr lang="en-US" sz="3200" b="1" i="0" u="none" strike="noStrike" baseline="0" dirty="0" err="1">
+              <a:rPr lang="en-US" sz="3200" b="1" i="0" u="none" strike="noStrike" baseline="0">
                 <a:solidFill>
                   <a:srgbClr val="000000"/>
                 </a:solidFill>
               </a:rPr>
-              <a:t>moveHMM</a:t>
+              <a:t>momentuHMM</a:t>
             </a:r>
             <a:br>
               <a:rPr lang="en-US" sz="3200" b="1" i="0" u="none" strike="noStrike" baseline="0" dirty="0">
@@ -9689,8 +9632,8 @@
         </p:nvSpPr>
         <p:spPr>
           <a:xfrm>
-            <a:off x="736270" y="1648387"/>
-            <a:ext cx="7647709" cy="4351338"/>
+            <a:off x="779316" y="1648387"/>
+            <a:ext cx="9441873" cy="4351338"/>
           </a:xfrm>
         </p:spPr>
         <p:txBody>
@@ -9801,13 +9744,40 @@
               <a:t>		</a:t>
             </a:r>
             <a:r>
-              <a:rPr lang="en-US" sz="1800" b="0" i="0" u="none" strike="noStrike" baseline="0" dirty="0">
+              <a:rPr lang="en-US" sz="1800" dirty="0" err="1">
                 <a:solidFill>
                   <a:srgbClr val="000000"/>
                 </a:solidFill>
                 <a:latin typeface="Courier New" panose="02070309020205020404" pitchFamily="49" charset="0"/>
               </a:rPr>
-              <a:t>stepPar0 = stepPar0,</a:t>
+              <a:t>dist</a:t>
+            </a:r>
+            <a:r>
+              <a:rPr lang="en-US" sz="1800" dirty="0">
+                <a:solidFill>
+                  <a:srgbClr val="000000"/>
+                </a:solidFill>
+                <a:latin typeface="Courier New" panose="02070309020205020404" pitchFamily="49" charset="0"/>
+              </a:rPr>
+              <a:t> = list(step = “gamma”, angle = “</a:t>
+            </a:r>
+            <a:r>
+              <a:rPr lang="en-US" sz="1800" dirty="0" err="1">
+                <a:solidFill>
+                  <a:srgbClr val="000000"/>
+                </a:solidFill>
+                <a:latin typeface="Courier New" panose="02070309020205020404" pitchFamily="49" charset="0"/>
+              </a:rPr>
+              <a:t>vm</a:t>
+            </a:r>
+            <a:r>
+              <a:rPr lang="en-US" sz="1800" dirty="0">
+                <a:solidFill>
+                  <a:srgbClr val="000000"/>
+                </a:solidFill>
+                <a:latin typeface="Courier New" panose="02070309020205020404" pitchFamily="49" charset="0"/>
+              </a:rPr>
+              <a:t>”),</a:t>
             </a:r>
           </a:p>
           <a:p>
@@ -9815,22 +9785,13 @@
               <a:buNone/>
             </a:pPr>
             <a:r>
-              <a:rPr lang="en-US" sz="1800" dirty="0">
+              <a:rPr lang="en-US" sz="1800" b="0" i="0" u="none" strike="noStrike" baseline="0" dirty="0">
                 <a:solidFill>
                   <a:srgbClr val="000000"/>
                 </a:solidFill>
                 <a:latin typeface="Courier New" panose="02070309020205020404" pitchFamily="49" charset="0"/>
               </a:rPr>
-              <a:t>		</a:t>
-            </a:r>
-            <a:r>
-              <a:rPr lang="en-US" sz="1800" b="0" i="0" u="none" strike="noStrike" baseline="0" dirty="0">
-                <a:solidFill>
-                  <a:srgbClr val="000000"/>
-                </a:solidFill>
-                <a:latin typeface="Courier New" panose="02070309020205020404" pitchFamily="49" charset="0"/>
-              </a:rPr>
-              <a:t>anglePar0 = anglePar0,</a:t>
+              <a:t>		Par0 = list(step = stepPar0, angle = anglePar0),</a:t>
             </a:r>
           </a:p>
           <a:p>
@@ -9915,7 +9876,7 @@
         </p:nvSpPr>
         <p:spPr>
           <a:xfrm>
-            <a:off x="6229486" y="2380404"/>
+            <a:off x="8516534" y="2395973"/>
             <a:ext cx="4803894" cy="338554"/>
           </a:xfrm>
           <a:prstGeom prst="rect">
@@ -9939,7 +9900,7 @@
                 </a:solidFill>
                 <a:latin typeface="+mj-lt"/>
               </a:rPr>
-              <a:t># Starting values, step length distribution </a:t>
+              <a:t># Distributions </a:t>
             </a:r>
           </a:p>
         </p:txBody>
@@ -9958,7 +9919,7 @@
         </p:nvSpPr>
         <p:spPr>
           <a:xfrm>
-            <a:off x="6229486" y="2767091"/>
+            <a:off x="9262753" y="2804673"/>
             <a:ext cx="4782789" cy="338554"/>
           </a:xfrm>
           <a:prstGeom prst="rect">
@@ -9979,7 +9940,7 @@
                 </a:solidFill>
                 <a:latin typeface="+mj-lt"/>
               </a:rPr>
-              <a:t># Starting values, turn angle distribution </a:t>
+              <a:t># Starting values</a:t>
             </a:r>
           </a:p>
         </p:txBody>
@@ -10104,7 +10065,7 @@
         </p:nvSpPr>
         <p:spPr>
           <a:xfrm>
-            <a:off x="6229486" y="2029318"/>
+            <a:off x="6730229" y="2029318"/>
             <a:ext cx="4803894" cy="338554"/>
           </a:xfrm>
           <a:prstGeom prst="rect">
@@ -10143,314 +10104,6 @@
   <p:clrMapOvr>
     <a:masterClrMapping/>
   </p:clrMapOvr>
-  <p:timing>
-    <p:tnLst>
-      <p:par>
-        <p:cTn id="1" dur="indefinite" restart="never" nodeType="tmRoot">
-          <p:childTnLst>
-            <p:seq concurrent="1" nextAc="seek">
-              <p:cTn id="2" dur="indefinite" nodeType="mainSeq">
-                <p:childTnLst>
-                  <p:par>
-                    <p:cTn id="3" fill="hold">
-                      <p:stCondLst>
-                        <p:cond delay="indefinite"/>
-                      </p:stCondLst>
-                      <p:childTnLst>
-                        <p:par>
-                          <p:cTn id="4" fill="hold">
-                            <p:stCondLst>
-                              <p:cond delay="0"/>
-                            </p:stCondLst>
-                            <p:childTnLst>
-                              <p:par>
-                                <p:cTn id="5" presetID="10" presetClass="entr" presetSubtype="0" fill="hold" grpId="0" nodeType="clickEffect">
-                                  <p:stCondLst>
-                                    <p:cond delay="0"/>
-                                  </p:stCondLst>
-                                  <p:childTnLst>
-                                    <p:set>
-                                      <p:cBhvr>
-                                        <p:cTn id="6" dur="1" fill="hold">
-                                          <p:stCondLst>
-                                            <p:cond delay="0"/>
-                                          </p:stCondLst>
-                                        </p:cTn>
-                                        <p:tgtEl>
-                                          <p:spTgt spid="4"/>
-                                        </p:tgtEl>
-                                        <p:attrNameLst>
-                                          <p:attrName>style.visibility</p:attrName>
-                                        </p:attrNameLst>
-                                      </p:cBhvr>
-                                      <p:to>
-                                        <p:strVal val="visible"/>
-                                      </p:to>
-                                    </p:set>
-                                    <p:animEffect transition="in" filter="fade">
-                                      <p:cBhvr>
-                                        <p:cTn id="7" dur="500"/>
-                                        <p:tgtEl>
-                                          <p:spTgt spid="4"/>
-                                        </p:tgtEl>
-                                      </p:cBhvr>
-                                    </p:animEffect>
-                                  </p:childTnLst>
-                                </p:cTn>
-                              </p:par>
-                            </p:childTnLst>
-                          </p:cTn>
-                        </p:par>
-                      </p:childTnLst>
-                    </p:cTn>
-                  </p:par>
-                  <p:par>
-                    <p:cTn id="8" fill="hold">
-                      <p:stCondLst>
-                        <p:cond delay="indefinite"/>
-                      </p:stCondLst>
-                      <p:childTnLst>
-                        <p:par>
-                          <p:cTn id="9" fill="hold">
-                            <p:stCondLst>
-                              <p:cond delay="0"/>
-                            </p:stCondLst>
-                            <p:childTnLst>
-                              <p:par>
-                                <p:cTn id="10" presetID="10" presetClass="entr" presetSubtype="0" fill="hold" grpId="0" nodeType="clickEffect">
-                                  <p:stCondLst>
-                                    <p:cond delay="0"/>
-                                  </p:stCondLst>
-                                  <p:childTnLst>
-                                    <p:set>
-                                      <p:cBhvr>
-                                        <p:cTn id="11" dur="1" fill="hold">
-                                          <p:stCondLst>
-                                            <p:cond delay="0"/>
-                                          </p:stCondLst>
-                                        </p:cTn>
-                                        <p:tgtEl>
-                                          <p:spTgt spid="7"/>
-                                        </p:tgtEl>
-                                        <p:attrNameLst>
-                                          <p:attrName>style.visibility</p:attrName>
-                                        </p:attrNameLst>
-                                      </p:cBhvr>
-                                      <p:to>
-                                        <p:strVal val="visible"/>
-                                      </p:to>
-                                    </p:set>
-                                    <p:animEffect transition="in" filter="fade">
-                                      <p:cBhvr>
-                                        <p:cTn id="12" dur="500"/>
-                                        <p:tgtEl>
-                                          <p:spTgt spid="7"/>
-                                        </p:tgtEl>
-                                      </p:cBhvr>
-                                    </p:animEffect>
-                                  </p:childTnLst>
-                                </p:cTn>
-                              </p:par>
-                            </p:childTnLst>
-                          </p:cTn>
-                        </p:par>
-                      </p:childTnLst>
-                    </p:cTn>
-                  </p:par>
-                  <p:par>
-                    <p:cTn id="13" fill="hold">
-                      <p:stCondLst>
-                        <p:cond delay="indefinite"/>
-                      </p:stCondLst>
-                      <p:childTnLst>
-                        <p:par>
-                          <p:cTn id="14" fill="hold">
-                            <p:stCondLst>
-                              <p:cond delay="0"/>
-                            </p:stCondLst>
-                            <p:childTnLst>
-                              <p:par>
-                                <p:cTn id="15" presetID="10" presetClass="entr" presetSubtype="0" fill="hold" grpId="0" nodeType="clickEffect">
-                                  <p:stCondLst>
-                                    <p:cond delay="0"/>
-                                  </p:stCondLst>
-                                  <p:childTnLst>
-                                    <p:set>
-                                      <p:cBhvr>
-                                        <p:cTn id="16" dur="1" fill="hold">
-                                          <p:stCondLst>
-                                            <p:cond delay="0"/>
-                                          </p:stCondLst>
-                                        </p:cTn>
-                                        <p:tgtEl>
-                                          <p:spTgt spid="8"/>
-                                        </p:tgtEl>
-                                        <p:attrNameLst>
-                                          <p:attrName>style.visibility</p:attrName>
-                                        </p:attrNameLst>
-                                      </p:cBhvr>
-                                      <p:to>
-                                        <p:strVal val="visible"/>
-                                      </p:to>
-                                    </p:set>
-                                    <p:animEffect transition="in" filter="fade">
-                                      <p:cBhvr>
-                                        <p:cTn id="17" dur="500"/>
-                                        <p:tgtEl>
-                                          <p:spTgt spid="8"/>
-                                        </p:tgtEl>
-                                      </p:cBhvr>
-                                    </p:animEffect>
-                                  </p:childTnLst>
-                                </p:cTn>
-                              </p:par>
-                            </p:childTnLst>
-                          </p:cTn>
-                        </p:par>
-                      </p:childTnLst>
-                    </p:cTn>
-                  </p:par>
-                  <p:par>
-                    <p:cTn id="18" fill="hold">
-                      <p:stCondLst>
-                        <p:cond delay="indefinite"/>
-                      </p:stCondLst>
-                      <p:childTnLst>
-                        <p:par>
-                          <p:cTn id="19" fill="hold">
-                            <p:stCondLst>
-                              <p:cond delay="0"/>
-                            </p:stCondLst>
-                            <p:childTnLst>
-                              <p:par>
-                                <p:cTn id="20" presetID="10" presetClass="entr" presetSubtype="0" fill="hold" nodeType="clickEffect">
-                                  <p:stCondLst>
-                                    <p:cond delay="0"/>
-                                  </p:stCondLst>
-                                  <p:childTnLst>
-                                    <p:set>
-                                      <p:cBhvr>
-                                        <p:cTn id="21" dur="1" fill="hold">
-                                          <p:stCondLst>
-                                            <p:cond delay="0"/>
-                                          </p:stCondLst>
-                                        </p:cTn>
-                                        <p:tgtEl>
-                                          <p:spTgt spid="12"/>
-                                        </p:tgtEl>
-                                        <p:attrNameLst>
-                                          <p:attrName>style.visibility</p:attrName>
-                                        </p:attrNameLst>
-                                      </p:cBhvr>
-                                      <p:to>
-                                        <p:strVal val="visible"/>
-                                      </p:to>
-                                    </p:set>
-                                    <p:animEffect transition="in" filter="fade">
-                                      <p:cBhvr>
-                                        <p:cTn id="22" dur="500"/>
-                                        <p:tgtEl>
-                                          <p:spTgt spid="12"/>
-                                        </p:tgtEl>
-                                      </p:cBhvr>
-                                    </p:animEffect>
-                                  </p:childTnLst>
-                                </p:cTn>
-                              </p:par>
-                            </p:childTnLst>
-                          </p:cTn>
-                        </p:par>
-                      </p:childTnLst>
-                    </p:cTn>
-                  </p:par>
-                  <p:par>
-                    <p:cTn id="23" fill="hold">
-                      <p:stCondLst>
-                        <p:cond delay="indefinite"/>
-                      </p:stCondLst>
-                      <p:childTnLst>
-                        <p:par>
-                          <p:cTn id="24" fill="hold">
-                            <p:stCondLst>
-                              <p:cond delay="0"/>
-                            </p:stCondLst>
-                            <p:childTnLst>
-                              <p:par>
-                                <p:cTn id="25" presetID="10" presetClass="entr" presetSubtype="0" fill="hold" nodeType="clickEffect">
-                                  <p:stCondLst>
-                                    <p:cond delay="0"/>
-                                  </p:stCondLst>
-                                  <p:childTnLst>
-                                    <p:set>
-                                      <p:cBhvr>
-                                        <p:cTn id="26" dur="1" fill="hold">
-                                          <p:stCondLst>
-                                            <p:cond delay="0"/>
-                                          </p:stCondLst>
-                                        </p:cTn>
-                                        <p:tgtEl>
-                                          <p:spTgt spid="3">
-                                            <p:txEl>
-                                              <p:pRg st="6" end="6"/>
-                                            </p:txEl>
-                                          </p:spTgt>
-                                        </p:tgtEl>
-                                        <p:attrNameLst>
-                                          <p:attrName>style.visibility</p:attrName>
-                                        </p:attrNameLst>
-                                      </p:cBhvr>
-                                      <p:to>
-                                        <p:strVal val="visible"/>
-                                      </p:to>
-                                    </p:set>
-                                    <p:animEffect transition="in" filter="fade">
-                                      <p:cBhvr>
-                                        <p:cTn id="27" dur="500"/>
-                                        <p:tgtEl>
-                                          <p:spTgt spid="3">
-                                            <p:txEl>
-                                              <p:pRg st="6" end="6"/>
-                                            </p:txEl>
-                                          </p:spTgt>
-                                        </p:tgtEl>
-                                      </p:cBhvr>
-                                    </p:animEffect>
-                                  </p:childTnLst>
-                                </p:cTn>
-                              </p:par>
-                            </p:childTnLst>
-                          </p:cTn>
-                        </p:par>
-                      </p:childTnLst>
-                    </p:cTn>
-                  </p:par>
-                </p:childTnLst>
-              </p:cTn>
-              <p:prevCondLst>
-                <p:cond evt="onPrev" delay="0">
-                  <p:tgtEl>
-                    <p:sldTgt/>
-                  </p:tgtEl>
-                </p:cond>
-              </p:prevCondLst>
-              <p:nextCondLst>
-                <p:cond evt="onNext" delay="0">
-                  <p:tgtEl>
-                    <p:sldTgt/>
-                  </p:tgtEl>
-                </p:cond>
-              </p:nextCondLst>
-            </p:seq>
-          </p:childTnLst>
-        </p:cTn>
-      </p:par>
-    </p:tnLst>
-    <p:bldLst>
-      <p:bldP spid="7" grpId="0"/>
-      <p:bldP spid="8" grpId="0"/>
-      <p:bldP spid="4" grpId="0"/>
-    </p:bldLst>
-  </p:timing>
 </p:sld>
 </file>
 
@@ -11032,17 +10685,32 @@
                 </a:solidFill>
                 <a:latin typeface="Courier New" panose="02070309020205020404" pitchFamily="49" charset="0"/>
               </a:rPr>
-              <a:t> </a:t>
+              <a:t> or </a:t>
             </a:r>
             <a:r>
               <a:rPr lang="en-US" sz="2000" b="0" i="0" u="none" strike="noStrike" baseline="0" dirty="0">
                 <a:solidFill>
                   <a:srgbClr val="000000"/>
                 </a:solidFill>
-                <a:latin typeface="+mj-lt"/>
-              </a:rPr>
-              <a:t>to regularize</a:t>
-            </a:r>
+                <a:latin typeface="Century Gothic" panose="020B0502020202020204" pitchFamily="34" charset="0"/>
+              </a:rPr>
+              <a:t>continuous time models with </a:t>
+            </a:r>
+            <a:r>
+              <a:rPr lang="en-US" sz="2000" b="0" i="0" u="none" strike="noStrike" baseline="0" dirty="0" err="1">
+                <a:solidFill>
+                  <a:srgbClr val="000000"/>
+                </a:solidFill>
+                <a:latin typeface="Courier New" panose="02070309020205020404" pitchFamily="49" charset="0"/>
+              </a:rPr>
+              <a:t>ctmm</a:t>
+            </a:r>
+            <a:endParaRPr lang="en-US" sz="2000" b="0" i="0" u="none" strike="noStrike" baseline="0" dirty="0">
+              <a:solidFill>
+                <a:srgbClr val="000000"/>
+              </a:solidFill>
+              <a:latin typeface="+mj-lt"/>
+            </a:endParaRPr>
           </a:p>
         </p:txBody>
       </p:sp>
@@ -11056,366 +10724,6 @@
   <p:clrMapOvr>
     <a:masterClrMapping/>
   </p:clrMapOvr>
-  <p:timing>
-    <p:tnLst>
-      <p:par>
-        <p:cTn id="1" dur="indefinite" restart="never" nodeType="tmRoot">
-          <p:childTnLst>
-            <p:seq concurrent="1" nextAc="seek">
-              <p:cTn id="2" dur="indefinite" nodeType="mainSeq">
-                <p:childTnLst>
-                  <p:par>
-                    <p:cTn id="3" fill="hold">
-                      <p:stCondLst>
-                        <p:cond delay="indefinite"/>
-                      </p:stCondLst>
-                      <p:childTnLst>
-                        <p:par>
-                          <p:cTn id="4" fill="hold">
-                            <p:stCondLst>
-                              <p:cond delay="0"/>
-                            </p:stCondLst>
-                            <p:childTnLst>
-                              <p:par>
-                                <p:cTn id="5" presetID="10" presetClass="entr" presetSubtype="0" fill="hold" nodeType="clickEffect">
-                                  <p:stCondLst>
-                                    <p:cond delay="0"/>
-                                  </p:stCondLst>
-                                  <p:childTnLst>
-                                    <p:set>
-                                      <p:cBhvr>
-                                        <p:cTn id="6" dur="1" fill="hold">
-                                          <p:stCondLst>
-                                            <p:cond delay="0"/>
-                                          </p:stCondLst>
-                                        </p:cTn>
-                                        <p:tgtEl>
-                                          <p:spTgt spid="5">
-                                            <p:txEl>
-                                              <p:pRg st="0" end="0"/>
-                                            </p:txEl>
-                                          </p:spTgt>
-                                        </p:tgtEl>
-                                        <p:attrNameLst>
-                                          <p:attrName>style.visibility</p:attrName>
-                                        </p:attrNameLst>
-                                      </p:cBhvr>
-                                      <p:to>
-                                        <p:strVal val="visible"/>
-                                      </p:to>
-                                    </p:set>
-                                    <p:animEffect transition="in" filter="fade">
-                                      <p:cBhvr>
-                                        <p:cTn id="7" dur="500"/>
-                                        <p:tgtEl>
-                                          <p:spTgt spid="5">
-                                            <p:txEl>
-                                              <p:pRg st="0" end="0"/>
-                                            </p:txEl>
-                                          </p:spTgt>
-                                        </p:tgtEl>
-                                      </p:cBhvr>
-                                    </p:animEffect>
-                                  </p:childTnLst>
-                                </p:cTn>
-                              </p:par>
-                            </p:childTnLst>
-                          </p:cTn>
-                        </p:par>
-                      </p:childTnLst>
-                    </p:cTn>
-                  </p:par>
-                  <p:par>
-                    <p:cTn id="8" fill="hold">
-                      <p:stCondLst>
-                        <p:cond delay="indefinite"/>
-                      </p:stCondLst>
-                      <p:childTnLst>
-                        <p:par>
-                          <p:cTn id="9" fill="hold">
-                            <p:stCondLst>
-                              <p:cond delay="0"/>
-                            </p:stCondLst>
-                            <p:childTnLst>
-                              <p:par>
-                                <p:cTn id="10" presetID="10" presetClass="entr" presetSubtype="0" fill="hold" nodeType="clickEffect">
-                                  <p:stCondLst>
-                                    <p:cond delay="0"/>
-                                  </p:stCondLst>
-                                  <p:childTnLst>
-                                    <p:set>
-                                      <p:cBhvr>
-                                        <p:cTn id="11" dur="1" fill="hold">
-                                          <p:stCondLst>
-                                            <p:cond delay="0"/>
-                                          </p:stCondLst>
-                                        </p:cTn>
-                                        <p:tgtEl>
-                                          <p:spTgt spid="5">
-                                            <p:txEl>
-                                              <p:pRg st="1" end="1"/>
-                                            </p:txEl>
-                                          </p:spTgt>
-                                        </p:tgtEl>
-                                        <p:attrNameLst>
-                                          <p:attrName>style.visibility</p:attrName>
-                                        </p:attrNameLst>
-                                      </p:cBhvr>
-                                      <p:to>
-                                        <p:strVal val="visible"/>
-                                      </p:to>
-                                    </p:set>
-                                    <p:animEffect transition="in" filter="fade">
-                                      <p:cBhvr>
-                                        <p:cTn id="12" dur="500"/>
-                                        <p:tgtEl>
-                                          <p:spTgt spid="5">
-                                            <p:txEl>
-                                              <p:pRg st="1" end="1"/>
-                                            </p:txEl>
-                                          </p:spTgt>
-                                        </p:tgtEl>
-                                      </p:cBhvr>
-                                    </p:animEffect>
-                                  </p:childTnLst>
-                                </p:cTn>
-                              </p:par>
-                            </p:childTnLst>
-                          </p:cTn>
-                        </p:par>
-                      </p:childTnLst>
-                    </p:cTn>
-                  </p:par>
-                  <p:par>
-                    <p:cTn id="13" fill="hold">
-                      <p:stCondLst>
-                        <p:cond delay="indefinite"/>
-                      </p:stCondLst>
-                      <p:childTnLst>
-                        <p:par>
-                          <p:cTn id="14" fill="hold">
-                            <p:stCondLst>
-                              <p:cond delay="0"/>
-                            </p:stCondLst>
-                            <p:childTnLst>
-                              <p:par>
-                                <p:cTn id="15" presetID="10" presetClass="entr" presetSubtype="0" fill="hold" nodeType="clickEffect">
-                                  <p:stCondLst>
-                                    <p:cond delay="0"/>
-                                  </p:stCondLst>
-                                  <p:childTnLst>
-                                    <p:set>
-                                      <p:cBhvr>
-                                        <p:cTn id="16" dur="1" fill="hold">
-                                          <p:stCondLst>
-                                            <p:cond delay="0"/>
-                                          </p:stCondLst>
-                                        </p:cTn>
-                                        <p:tgtEl>
-                                          <p:spTgt spid="5">
-                                            <p:txEl>
-                                              <p:pRg st="2" end="2"/>
-                                            </p:txEl>
-                                          </p:spTgt>
-                                        </p:tgtEl>
-                                        <p:attrNameLst>
-                                          <p:attrName>style.visibility</p:attrName>
-                                        </p:attrNameLst>
-                                      </p:cBhvr>
-                                      <p:to>
-                                        <p:strVal val="visible"/>
-                                      </p:to>
-                                    </p:set>
-                                    <p:animEffect transition="in" filter="fade">
-                                      <p:cBhvr>
-                                        <p:cTn id="17" dur="500"/>
-                                        <p:tgtEl>
-                                          <p:spTgt spid="5">
-                                            <p:txEl>
-                                              <p:pRg st="2" end="2"/>
-                                            </p:txEl>
-                                          </p:spTgt>
-                                        </p:tgtEl>
-                                      </p:cBhvr>
-                                    </p:animEffect>
-                                  </p:childTnLst>
-                                </p:cTn>
-                              </p:par>
-                              <p:par>
-                                <p:cTn id="18" presetID="10" presetClass="entr" presetSubtype="0" fill="hold" nodeType="withEffect">
-                                  <p:stCondLst>
-                                    <p:cond delay="0"/>
-                                  </p:stCondLst>
-                                  <p:childTnLst>
-                                    <p:set>
-                                      <p:cBhvr>
-                                        <p:cTn id="19" dur="1" fill="hold">
-                                          <p:stCondLst>
-                                            <p:cond delay="0"/>
-                                          </p:stCondLst>
-                                        </p:cTn>
-                                        <p:tgtEl>
-                                          <p:spTgt spid="5">
-                                            <p:txEl>
-                                              <p:pRg st="3" end="3"/>
-                                            </p:txEl>
-                                          </p:spTgt>
-                                        </p:tgtEl>
-                                        <p:attrNameLst>
-                                          <p:attrName>style.visibility</p:attrName>
-                                        </p:attrNameLst>
-                                      </p:cBhvr>
-                                      <p:to>
-                                        <p:strVal val="visible"/>
-                                      </p:to>
-                                    </p:set>
-                                    <p:animEffect transition="in" filter="fade">
-                                      <p:cBhvr>
-                                        <p:cTn id="20" dur="500"/>
-                                        <p:tgtEl>
-                                          <p:spTgt spid="5">
-                                            <p:txEl>
-                                              <p:pRg st="3" end="3"/>
-                                            </p:txEl>
-                                          </p:spTgt>
-                                        </p:tgtEl>
-                                      </p:cBhvr>
-                                    </p:animEffect>
-                                  </p:childTnLst>
-                                </p:cTn>
-                              </p:par>
-                            </p:childTnLst>
-                          </p:cTn>
-                        </p:par>
-                      </p:childTnLst>
-                    </p:cTn>
-                  </p:par>
-                  <p:par>
-                    <p:cTn id="21" fill="hold">
-                      <p:stCondLst>
-                        <p:cond delay="indefinite"/>
-                      </p:stCondLst>
-                      <p:childTnLst>
-                        <p:par>
-                          <p:cTn id="22" fill="hold">
-                            <p:stCondLst>
-                              <p:cond delay="0"/>
-                            </p:stCondLst>
-                            <p:childTnLst>
-                              <p:par>
-                                <p:cTn id="23" presetID="10" presetClass="entr" presetSubtype="0" fill="hold" nodeType="clickEffect">
-                                  <p:stCondLst>
-                                    <p:cond delay="0"/>
-                                  </p:stCondLst>
-                                  <p:childTnLst>
-                                    <p:set>
-                                      <p:cBhvr>
-                                        <p:cTn id="24" dur="1" fill="hold">
-                                          <p:stCondLst>
-                                            <p:cond delay="0"/>
-                                          </p:stCondLst>
-                                        </p:cTn>
-                                        <p:tgtEl>
-                                          <p:spTgt spid="5">
-                                            <p:txEl>
-                                              <p:pRg st="4" end="4"/>
-                                            </p:txEl>
-                                          </p:spTgt>
-                                        </p:tgtEl>
-                                        <p:attrNameLst>
-                                          <p:attrName>style.visibility</p:attrName>
-                                        </p:attrNameLst>
-                                      </p:cBhvr>
-                                      <p:to>
-                                        <p:strVal val="visible"/>
-                                      </p:to>
-                                    </p:set>
-                                    <p:animEffect transition="in" filter="fade">
-                                      <p:cBhvr>
-                                        <p:cTn id="25" dur="500"/>
-                                        <p:tgtEl>
-                                          <p:spTgt spid="5">
-                                            <p:txEl>
-                                              <p:pRg st="4" end="4"/>
-                                            </p:txEl>
-                                          </p:spTgt>
-                                        </p:tgtEl>
-                                      </p:cBhvr>
-                                    </p:animEffect>
-                                  </p:childTnLst>
-                                </p:cTn>
-                              </p:par>
-                              <p:par>
-                                <p:cTn id="26" presetID="10" presetClass="entr" presetSubtype="0" fill="hold" nodeType="withEffect">
-                                  <p:stCondLst>
-                                    <p:cond delay="0"/>
-                                  </p:stCondLst>
-                                  <p:childTnLst>
-                                    <p:set>
-                                      <p:cBhvr>
-                                        <p:cTn id="27" dur="1" fill="hold">
-                                          <p:stCondLst>
-                                            <p:cond delay="0"/>
-                                          </p:stCondLst>
-                                        </p:cTn>
-                                        <p:tgtEl>
-                                          <p:spTgt spid="5">
-                                            <p:txEl>
-                                              <p:pRg st="5" end="5"/>
-                                            </p:txEl>
-                                          </p:spTgt>
-                                        </p:tgtEl>
-                                        <p:attrNameLst>
-                                          <p:attrName>style.visibility</p:attrName>
-                                        </p:attrNameLst>
-                                      </p:cBhvr>
-                                      <p:to>
-                                        <p:strVal val="visible"/>
-                                      </p:to>
-                                    </p:set>
-                                    <p:animEffect transition="in" filter="fade">
-                                      <p:cBhvr>
-                                        <p:cTn id="28" dur="500"/>
-                                        <p:tgtEl>
-                                          <p:spTgt spid="5">
-                                            <p:txEl>
-                                              <p:pRg st="5" end="5"/>
-                                            </p:txEl>
-                                          </p:spTgt>
-                                        </p:tgtEl>
-                                      </p:cBhvr>
-                                    </p:animEffect>
-                                  </p:childTnLst>
-                                </p:cTn>
-                              </p:par>
-                            </p:childTnLst>
-                          </p:cTn>
-                        </p:par>
-                      </p:childTnLst>
-                    </p:cTn>
-                  </p:par>
-                </p:childTnLst>
-              </p:cTn>
-              <p:prevCondLst>
-                <p:cond evt="onPrev" delay="0">
-                  <p:tgtEl>
-                    <p:sldTgt/>
-                  </p:tgtEl>
-                </p:cond>
-              </p:prevCondLst>
-              <p:nextCondLst>
-                <p:cond evt="onNext" delay="0">
-                  <p:tgtEl>
-                    <p:sldTgt/>
-                  </p:tgtEl>
-                </p:cond>
-              </p:nextCondLst>
-            </p:seq>
-          </p:childTnLst>
-        </p:cTn>
-      </p:par>
-    </p:tnLst>
-  </p:timing>
 </p:sld>
 </file>
 
@@ -11585,7 +10893,9 @@
         <p:blipFill rotWithShape="1">
           <a:blip r:embed="rId5"/>
           <a:srcRect b="11402"/>
-          <a:stretch/>
+          <a:stretch>
+            <a:fillRect/>
+          </a:stretch>
         </p:blipFill>
         <p:spPr>
           <a:xfrm>
@@ -11801,6 +11111,58 @@
               </a:rPr>
               <a:t>Humpback whales</a:t>
             </a:r>
+          </a:p>
+        </p:txBody>
+      </p:sp>
+      <p:sp>
+        <p:nvSpPr>
+          <p:cNvPr id="2" name="Rectangle 1">
+            <a:extLst>
+              <a:ext uri="{FF2B5EF4-FFF2-40B4-BE49-F238E27FC236}">
+                <a16:creationId xmlns:a16="http://schemas.microsoft.com/office/drawing/2014/main" id="{CB421A68-93EF-019A-B1EA-E7F7A220940D}"/>
+              </a:ext>
+            </a:extLst>
+          </p:cNvPr>
+          <p:cNvSpPr/>
+          <p:nvPr/>
+        </p:nvSpPr>
+        <p:spPr>
+          <a:xfrm>
+            <a:off x="9416955" y="3903260"/>
+            <a:ext cx="1595320" cy="1100663"/>
+          </a:xfrm>
+          <a:prstGeom prst="rect">
+            <a:avLst/>
+          </a:prstGeom>
+          <a:noFill/>
+          <a:ln w="25400">
+            <a:solidFill>
+              <a:srgbClr val="FF0000"/>
+            </a:solidFill>
+          </a:ln>
+        </p:spPr>
+        <p:style>
+          <a:lnRef idx="2">
+            <a:schemeClr val="accent1">
+              <a:shade val="15000"/>
+            </a:schemeClr>
+          </a:lnRef>
+          <a:fillRef idx="1">
+            <a:schemeClr val="accent1"/>
+          </a:fillRef>
+          <a:effectRef idx="0">
+            <a:schemeClr val="accent1"/>
+          </a:effectRef>
+          <a:fontRef idx="minor">
+            <a:schemeClr val="lt1"/>
+          </a:fontRef>
+        </p:style>
+        <p:txBody>
+          <a:bodyPr rtlCol="0" anchor="ctr"/>
+          <a:lstStyle/>
+          <a:p>
+            <a:pPr algn="ctr"/>
+            <a:endParaRPr lang="en-US"/>
           </a:p>
         </p:txBody>
       </p:sp>
@@ -12187,7 +11549,7 @@
 </file>
 
 <file path=ppt/slides/slide16.xml><?xml version="1.0" encoding="utf-8"?>
-<p:sld xmlns:a="http://schemas.openxmlformats.org/drawingml/2006/main" xmlns:r="http://schemas.openxmlformats.org/officeDocument/2006/relationships" xmlns:p="http://schemas.openxmlformats.org/presentationml/2006/main">
+<p:sld xmlns:a="http://schemas.openxmlformats.org/drawingml/2006/main" xmlns:r="http://schemas.openxmlformats.org/officeDocument/2006/relationships" xmlns:p="http://schemas.openxmlformats.org/presentationml/2006/main" show="0">
   <p:cSld>
     <p:spTree>
       <p:nvGrpSpPr>
@@ -13130,451 +12492,49 @@
           <a:chExt cx="0" cy="0"/>
         </a:xfrm>
       </p:grpSpPr>
-      <p:sp>
-        <p:nvSpPr>
-          <p:cNvPr id="3" name="Content Placeholder 2">
-            <a:extLst>
-              <a:ext uri="{FF2B5EF4-FFF2-40B4-BE49-F238E27FC236}">
-                <a16:creationId xmlns:a16="http://schemas.microsoft.com/office/drawing/2014/main" id="{8E7664B6-E591-768E-08A1-E2467FE3AA0A}"/>
-              </a:ext>
-            </a:extLst>
-          </p:cNvPr>
-          <p:cNvSpPr>
-            <a:spLocks noGrp="1"/>
-          </p:cNvSpPr>
-          <p:nvPr>
-            <p:ph idx="4294967295"/>
-          </p:nvPr>
-        </p:nvSpPr>
+      <p:pic>
+        <p:nvPicPr>
+          <p:cNvPr id="3" name="Picture 2">
+            <a:extLst>
+              <a:ext uri="{FF2B5EF4-FFF2-40B4-BE49-F238E27FC236}">
+                <a16:creationId xmlns:a16="http://schemas.microsoft.com/office/drawing/2014/main" id="{E6DBBC0C-73CC-29FB-2A11-CD401788A449}"/>
+              </a:ext>
+            </a:extLst>
+          </p:cNvPr>
+          <p:cNvPicPr>
+            <a:picLocks noChangeAspect="1"/>
+          </p:cNvPicPr>
+          <p:nvPr/>
+        </p:nvPicPr>
+        <p:blipFill>
+          <a:blip r:embed="rId2"/>
+          <a:stretch>
+            <a:fillRect/>
+          </a:stretch>
+        </p:blipFill>
         <p:spPr>
           <a:xfrm>
-            <a:off x="605641" y="1164664"/>
-            <a:ext cx="10770919" cy="5069881"/>
+            <a:off x="7796232" y="85543"/>
+            <a:ext cx="4291675" cy="1325563"/>
           </a:xfrm>
+          <a:prstGeom prst="rect">
+            <a:avLst/>
+          </a:prstGeom>
+          <a:effectLst>
+            <a:outerShdw blurRad="50800" dist="38100" dir="2700000" algn="tl" rotWithShape="0">
+              <a:prstClr val="black">
+                <a:alpha val="40000"/>
+              </a:prstClr>
+            </a:outerShdw>
+          </a:effectLst>
         </p:spPr>
-        <p:txBody>
-          <a:bodyPr>
-            <a:normAutofit/>
-          </a:bodyPr>
-          <a:lstStyle/>
-          <a:p>
-            <a:r>
-              <a:rPr lang="en-US" sz="1600" b="0" i="0" u="none" strike="noStrike" baseline="0" dirty="0">
-                <a:solidFill>
-                  <a:srgbClr val="000000"/>
-                </a:solidFill>
-              </a:rPr>
-              <a:t>Cagnacci, F., Focardi, S., </a:t>
-            </a:r>
-            <a:r>
-              <a:rPr lang="en-US" sz="1600" b="0" i="0" u="none" strike="noStrike" baseline="0" dirty="0" err="1">
-                <a:solidFill>
-                  <a:srgbClr val="000000"/>
-                </a:solidFill>
-              </a:rPr>
-              <a:t>Ghisla</a:t>
-            </a:r>
-            <a:r>
-              <a:rPr lang="en-US" sz="1600" b="0" i="0" u="none" strike="noStrike" baseline="0" dirty="0">
-                <a:solidFill>
-                  <a:srgbClr val="000000"/>
-                </a:solidFill>
-              </a:rPr>
-              <a:t>, A., van </a:t>
-            </a:r>
-            <a:r>
-              <a:rPr lang="en-US" sz="1600" b="0" i="0" u="none" strike="noStrike" baseline="0" dirty="0" err="1">
-                <a:solidFill>
-                  <a:srgbClr val="000000"/>
-                </a:solidFill>
-              </a:rPr>
-              <a:t>Moorter</a:t>
-            </a:r>
-            <a:r>
-              <a:rPr lang="en-US" sz="1600" b="0" i="0" u="none" strike="noStrike" baseline="0" dirty="0">
-                <a:solidFill>
-                  <a:srgbClr val="000000"/>
-                </a:solidFill>
-              </a:rPr>
-              <a:t>, B., Merrill, E.H., Gurarie, E., </a:t>
-            </a:r>
-            <a:r>
-              <a:rPr lang="en-US" sz="1600" b="0" i="0" u="none" strike="noStrike" baseline="0" dirty="0" err="1">
-                <a:solidFill>
-                  <a:srgbClr val="000000"/>
-                </a:solidFill>
-              </a:rPr>
-              <a:t>Heurich</a:t>
-            </a:r>
-            <a:r>
-              <a:rPr lang="en-US" sz="1600" b="0" i="0" u="none" strike="noStrike" baseline="0" dirty="0">
-                <a:solidFill>
-                  <a:srgbClr val="000000"/>
-                </a:solidFill>
-              </a:rPr>
-              <a:t>, M., Mysterud, A., Linnell, J., </a:t>
-            </a:r>
-            <a:r>
-              <a:rPr lang="en-US" sz="1600" b="0" i="0" u="none" strike="noStrike" baseline="0" dirty="0" err="1">
-                <a:solidFill>
-                  <a:srgbClr val="000000"/>
-                </a:solidFill>
-              </a:rPr>
-              <a:t>Panzacchi</a:t>
-            </a:r>
-            <a:r>
-              <a:rPr lang="en-US" sz="1600" b="0" i="0" u="none" strike="noStrike" baseline="0" dirty="0">
-                <a:solidFill>
-                  <a:srgbClr val="000000"/>
-                </a:solidFill>
-              </a:rPr>
-              <a:t>, M., May, R., </a:t>
-            </a:r>
-            <a:r>
-              <a:rPr lang="en-US" sz="1600" b="0" i="0" u="none" strike="noStrike" baseline="0" dirty="0" err="1">
-                <a:solidFill>
-                  <a:srgbClr val="000000"/>
-                </a:solidFill>
-              </a:rPr>
-              <a:t>Nygård</a:t>
-            </a:r>
-            <a:r>
-              <a:rPr lang="en-US" sz="1600" b="0" i="0" u="none" strike="noStrike" baseline="0" dirty="0">
-                <a:solidFill>
-                  <a:srgbClr val="000000"/>
-                </a:solidFill>
-              </a:rPr>
-              <a:t>, T., </a:t>
-            </a:r>
-            <a:r>
-              <a:rPr lang="en-US" sz="1600" b="0" i="0" u="none" strike="noStrike" baseline="0" dirty="0" err="1">
-                <a:solidFill>
-                  <a:srgbClr val="000000"/>
-                </a:solidFill>
-              </a:rPr>
-              <a:t>Rolandsen</a:t>
-            </a:r>
-            <a:r>
-              <a:rPr lang="en-US" sz="1600" b="0" i="0" u="none" strike="noStrike" baseline="0" dirty="0">
-                <a:solidFill>
-                  <a:srgbClr val="000000"/>
-                </a:solidFill>
-              </a:rPr>
-              <a:t>, C. and Hebblewhite, M. (2016), How many routes lead to migration? Comparison of methods to assess and characterize migratory movements. J Anim </a:t>
-            </a:r>
-            <a:r>
-              <a:rPr lang="en-US" sz="1600" b="0" i="0" u="none" strike="noStrike" baseline="0" dirty="0" err="1">
-                <a:solidFill>
-                  <a:srgbClr val="000000"/>
-                </a:solidFill>
-              </a:rPr>
-              <a:t>Ecol</a:t>
-            </a:r>
-            <a:r>
-              <a:rPr lang="en-US" sz="1600" b="0" i="0" u="none" strike="noStrike" baseline="0" dirty="0">
-                <a:solidFill>
-                  <a:srgbClr val="000000"/>
-                </a:solidFill>
-              </a:rPr>
-              <a:t>, 85: 54-68. </a:t>
-            </a:r>
-          </a:p>
-          <a:p>
-            <a:r>
-              <a:rPr lang="en-US" sz="1600" b="0" i="0" u="none" strike="noStrike" baseline="0" dirty="0" err="1">
-                <a:solidFill>
-                  <a:srgbClr val="000000"/>
-                </a:solidFill>
-              </a:rPr>
-              <a:t>Karelus</a:t>
-            </a:r>
-            <a:r>
-              <a:rPr lang="en-US" sz="1600" b="0" i="0" u="none" strike="noStrike" baseline="0" dirty="0">
-                <a:solidFill>
-                  <a:srgbClr val="000000"/>
-                </a:solidFill>
-              </a:rPr>
-              <a:t>, D.L., J. Walter McCown, Brian K. </a:t>
-            </a:r>
-            <a:r>
-              <a:rPr lang="en-US" sz="1600" b="0" i="0" u="none" strike="noStrike" baseline="0" dirty="0" err="1">
-                <a:solidFill>
-                  <a:srgbClr val="000000"/>
-                </a:solidFill>
-              </a:rPr>
-              <a:t>Scheick</a:t>
-            </a:r>
-            <a:r>
-              <a:rPr lang="en-US" sz="1600" b="0" i="0" u="none" strike="noStrike" baseline="0" dirty="0">
-                <a:solidFill>
-                  <a:srgbClr val="000000"/>
-                </a:solidFill>
-              </a:rPr>
-              <a:t>, </a:t>
-            </a:r>
-            <a:r>
-              <a:rPr lang="en-US" sz="1600" b="0" i="0" u="none" strike="noStrike" baseline="0" dirty="0" err="1">
-                <a:solidFill>
-                  <a:srgbClr val="000000"/>
-                </a:solidFill>
-              </a:rPr>
-              <a:t>Madelonvan</a:t>
-            </a:r>
-            <a:r>
-              <a:rPr lang="en-US" sz="1600" b="0" i="0" u="none" strike="noStrike" baseline="0" dirty="0">
-                <a:solidFill>
-                  <a:srgbClr val="000000"/>
-                </a:solidFill>
-              </a:rPr>
-              <a:t> de </a:t>
-            </a:r>
-            <a:r>
-              <a:rPr lang="en-US" sz="1600" b="0" i="0" u="none" strike="noStrike" baseline="0" dirty="0" err="1">
-                <a:solidFill>
-                  <a:srgbClr val="000000"/>
-                </a:solidFill>
-              </a:rPr>
-              <a:t>Kerk</a:t>
-            </a:r>
-            <a:r>
-              <a:rPr lang="en-US" sz="1600" b="0" i="0" u="none" strike="noStrike" baseline="0" dirty="0">
-                <a:solidFill>
-                  <a:srgbClr val="000000"/>
-                </a:solidFill>
-              </a:rPr>
-              <a:t>, Benjamin M. </a:t>
-            </a:r>
-            <a:r>
-              <a:rPr lang="en-US" sz="1600" b="0" i="0" u="none" strike="noStrike" baseline="0" dirty="0" err="1">
-                <a:solidFill>
-                  <a:srgbClr val="000000"/>
-                </a:solidFill>
-              </a:rPr>
-              <a:t>Bolker</a:t>
-            </a:r>
-            <a:r>
-              <a:rPr lang="en-US" sz="1600" b="0" i="0" u="none" strike="noStrike" baseline="0" dirty="0">
-                <a:solidFill>
-                  <a:srgbClr val="000000"/>
-                </a:solidFill>
-              </a:rPr>
-              <a:t>, Madan K. Oli "Incorporating movement patterns to discern habitat selection: black bears as a case study," Wildlife Research, 46(1), 76-88, (15 February 2019) </a:t>
-            </a:r>
-          </a:p>
-          <a:p>
-            <a:r>
-              <a:rPr lang="en-US" sz="1600" b="0" i="0" u="none" strike="noStrike" baseline="0" dirty="0">
-                <a:solidFill>
-                  <a:srgbClr val="000000"/>
-                </a:solidFill>
-              </a:rPr>
-              <a:t>Kennedy, A. S., A. N. </a:t>
-            </a:r>
-            <a:r>
-              <a:rPr lang="en-US" sz="1600" b="0" i="0" u="none" strike="noStrike" baseline="0" dirty="0" err="1">
-                <a:solidFill>
-                  <a:srgbClr val="000000"/>
-                </a:solidFill>
-              </a:rPr>
-              <a:t>Zerbini</a:t>
-            </a:r>
-            <a:r>
-              <a:rPr lang="en-US" sz="1600" b="0" i="0" u="none" strike="noStrike" baseline="0" dirty="0">
-                <a:solidFill>
-                  <a:srgbClr val="000000"/>
-                </a:solidFill>
-              </a:rPr>
-              <a:t>, B. K. </a:t>
-            </a:r>
-            <a:r>
-              <a:rPr lang="en-US" sz="1600" b="0" i="0" u="none" strike="noStrike" baseline="0" dirty="0" err="1">
-                <a:solidFill>
-                  <a:srgbClr val="000000"/>
-                </a:solidFill>
-              </a:rPr>
-              <a:t>Rone</a:t>
-            </a:r>
-            <a:r>
-              <a:rPr lang="en-US" sz="1600" b="0" i="0" u="none" strike="noStrike" baseline="0" dirty="0">
-                <a:solidFill>
-                  <a:srgbClr val="000000"/>
-                </a:solidFill>
-              </a:rPr>
-              <a:t>, and P. J. Clapham. 2014. Individual variation in movements of satellite-tracked humpback whales Megaptera novaeangliae in the eastern Aleutian Islands and Bering Sea. Endangered Species Research 23:187195 </a:t>
-            </a:r>
-          </a:p>
-          <a:p>
-            <a:r>
-              <a:rPr lang="en-US" sz="1600" b="0" i="0" u="none" strike="noStrike" baseline="0" dirty="0" err="1">
-                <a:solidFill>
-                  <a:srgbClr val="000000"/>
-                </a:solidFill>
-              </a:rPr>
-              <a:t>Klappstein</a:t>
-            </a:r>
-            <a:r>
-              <a:rPr lang="en-US" sz="1600" b="0" i="0" u="none" strike="noStrike" baseline="0" dirty="0">
-                <a:solidFill>
-                  <a:srgbClr val="000000"/>
-                </a:solidFill>
-              </a:rPr>
-              <a:t> NJ, Thomas L, Michelot T. Flexible hidden Markov models for </a:t>
-            </a:r>
-            <a:r>
-              <a:rPr lang="en-US" sz="1600" b="0" i="0" u="none" strike="noStrike" baseline="0" dirty="0" err="1">
-                <a:solidFill>
-                  <a:srgbClr val="000000"/>
-                </a:solidFill>
-              </a:rPr>
-              <a:t>behaviour</a:t>
-            </a:r>
-            <a:r>
-              <a:rPr lang="en-US" sz="1600" b="0" i="0" u="none" strike="noStrike" baseline="0" dirty="0">
-                <a:solidFill>
-                  <a:srgbClr val="000000"/>
-                </a:solidFill>
-              </a:rPr>
-              <a:t>-dependent habitat selection. Mov Ecol. 2023 Jun 3;11(1):30. </a:t>
-            </a:r>
-            <a:r>
-              <a:rPr lang="en-US" sz="1600" b="0" i="0" u="none" strike="noStrike" baseline="0" dirty="0" err="1">
-                <a:solidFill>
-                  <a:srgbClr val="000000"/>
-                </a:solidFill>
-              </a:rPr>
-              <a:t>doi</a:t>
-            </a:r>
-            <a:r>
-              <a:rPr lang="en-US" sz="1600" b="0" i="0" u="none" strike="noStrike" baseline="0" dirty="0">
-                <a:solidFill>
-                  <a:srgbClr val="000000"/>
-                </a:solidFill>
-              </a:rPr>
-              <a:t>: 10.1186/s40462-023-00392-3. </a:t>
-            </a:r>
-            <a:endParaRPr lang="en-US" dirty="0"/>
-          </a:p>
-          <a:p>
-            <a:r>
-              <a:rPr lang="en-US" sz="1600" dirty="0"/>
-              <a:t>McClintock, B.T. and Michelot, T. (2018), </a:t>
-            </a:r>
-            <a:r>
-              <a:rPr lang="en-US" sz="1600" dirty="0" err="1"/>
-              <a:t>momentuHMM</a:t>
-            </a:r>
-            <a:r>
-              <a:rPr lang="en-US" sz="1600" dirty="0"/>
-              <a:t>: </a:t>
-            </a:r>
-            <a:r>
-              <a:rPr lang="en-US" sz="1600" cap="small" dirty="0"/>
-              <a:t>R</a:t>
-            </a:r>
-            <a:r>
-              <a:rPr lang="en-US" sz="1600" dirty="0"/>
-              <a:t> package for generalized hidden Markov models of animal movement. </a:t>
-            </a:r>
-            <a:r>
-              <a:rPr lang="en-US" sz="1600" dirty="0">
-                <a:solidFill>
-                  <a:srgbClr val="000000"/>
-                </a:solidFill>
-              </a:rPr>
-              <a:t>Methods </a:t>
-            </a:r>
-            <a:r>
-              <a:rPr lang="en-US" sz="1600" dirty="0" err="1">
-                <a:solidFill>
-                  <a:srgbClr val="000000"/>
-                </a:solidFill>
-              </a:rPr>
-              <a:t>Ecol</a:t>
-            </a:r>
-            <a:r>
-              <a:rPr lang="en-US" sz="1600">
-                <a:solidFill>
-                  <a:srgbClr val="000000"/>
-                </a:solidFill>
-              </a:rPr>
-              <a:t> Evol, 9(6): 1518-1530.</a:t>
-            </a:r>
-            <a:r>
-              <a:rPr lang="en-US" sz="1600"/>
-              <a:t> </a:t>
-            </a:r>
-            <a:r>
-              <a:rPr lang="en-US" sz="1600" dirty="0"/>
-              <a:t>https://doi.org/10.1111/2041-210X.12995.</a:t>
-            </a:r>
-          </a:p>
-          <a:p>
-            <a:r>
-              <a:rPr lang="en-US" sz="1600" b="0" i="0" u="none" strike="noStrike" baseline="0" dirty="0">
-                <a:solidFill>
-                  <a:srgbClr val="000000"/>
-                </a:solidFill>
-              </a:rPr>
-              <a:t>Michelot, T., Langrock, R. and Patterson, T.A. (2016), </a:t>
-            </a:r>
-            <a:r>
-              <a:rPr lang="en-US" sz="1600" b="0" i="0" u="none" strike="noStrike" baseline="0" dirty="0" err="1">
-                <a:solidFill>
-                  <a:srgbClr val="000000"/>
-                </a:solidFill>
-              </a:rPr>
-              <a:t>moveHMM</a:t>
-            </a:r>
-            <a:r>
-              <a:rPr lang="en-US" sz="1600" b="0" i="0" u="none" strike="noStrike" baseline="0" dirty="0">
-                <a:solidFill>
-                  <a:srgbClr val="000000"/>
-                </a:solidFill>
-              </a:rPr>
-              <a:t>: an R package for the statistical modelling of animal movement data using hidden Markov models. Methods </a:t>
-            </a:r>
-            <a:r>
-              <a:rPr lang="en-US" sz="1600" b="0" i="0" u="none" strike="noStrike" baseline="0" dirty="0" err="1">
-                <a:solidFill>
-                  <a:srgbClr val="000000"/>
-                </a:solidFill>
-              </a:rPr>
-              <a:t>Ecol</a:t>
-            </a:r>
-            <a:r>
-              <a:rPr lang="en-US" sz="1600" b="0" i="0" u="none" strike="noStrike" baseline="0" dirty="0">
-                <a:solidFill>
-                  <a:srgbClr val="000000"/>
-                </a:solidFill>
-              </a:rPr>
-              <a:t> </a:t>
-            </a:r>
-            <a:r>
-              <a:rPr lang="en-US" sz="1600" b="0" i="0" u="none" strike="noStrike" baseline="0" dirty="0" err="1">
-                <a:solidFill>
-                  <a:srgbClr val="000000"/>
-                </a:solidFill>
-              </a:rPr>
-              <a:t>Evol</a:t>
-            </a:r>
-            <a:r>
-              <a:rPr lang="en-US" sz="1600" b="0" i="0" u="none" strike="noStrike" baseline="0" dirty="0">
-                <a:solidFill>
-                  <a:srgbClr val="000000"/>
-                </a:solidFill>
-              </a:rPr>
-              <a:t>, 7: 1308-1315. </a:t>
-            </a:r>
-            <a:endParaRPr lang="en-US" sz="1600" dirty="0"/>
-          </a:p>
-        </p:txBody>
-      </p:sp>
+      </p:pic>
       <p:sp>
         <p:nvSpPr>
           <p:cNvPr id="4" name="Title 1">
             <a:extLst>
               <a:ext uri="{FF2B5EF4-FFF2-40B4-BE49-F238E27FC236}">
-                <a16:creationId xmlns:a16="http://schemas.microsoft.com/office/drawing/2014/main" id="{7399F66D-D444-F92A-B5F9-9B6852FEFDCE}"/>
+                <a16:creationId xmlns:a16="http://schemas.microsoft.com/office/drawing/2014/main" id="{5F5CB036-49B3-7911-0438-78B8FDB7BEF9}"/>
               </a:ext>
             </a:extLst>
           </p:cNvPr>
@@ -13622,7 +12582,7 @@
                   <a:srgbClr val="000000"/>
                 </a:solidFill>
               </a:rPr>
-              <a:t>References</a:t>
+              <a:t>HMM Examples/Applications</a:t>
             </a:r>
             <a:br>
               <a:rPr lang="en-US" sz="3200" b="1" dirty="0">
@@ -13635,10 +12595,247 @@
           </a:p>
         </p:txBody>
       </p:sp>
+      <p:sp>
+        <p:nvSpPr>
+          <p:cNvPr id="5" name="Content Placeholder 2">
+            <a:extLst>
+              <a:ext uri="{FF2B5EF4-FFF2-40B4-BE49-F238E27FC236}">
+                <a16:creationId xmlns:a16="http://schemas.microsoft.com/office/drawing/2014/main" id="{65637429-5341-0104-56D7-C9D78E6881AF}"/>
+              </a:ext>
+            </a:extLst>
+          </p:cNvPr>
+          <p:cNvSpPr txBox="1">
+            <a:spLocks/>
+          </p:cNvSpPr>
+          <p:nvPr/>
+        </p:nvSpPr>
+        <p:spPr>
+          <a:xfrm>
+            <a:off x="969484" y="1167789"/>
+            <a:ext cx="10515600" cy="796562"/>
+          </a:xfrm>
+          <a:prstGeom prst="rect">
+            <a:avLst/>
+          </a:prstGeom>
+        </p:spPr>
+        <p:txBody>
+          <a:bodyPr vert="horz" lIns="91440" tIns="45720" rIns="91440" bIns="45720" rtlCol="0">
+            <a:noAutofit/>
+          </a:bodyPr>
+          <a:lstStyle>
+            <a:lvl1pPr marL="228600" indent="-228600" algn="l" defTabSz="914400" rtl="0" eaLnBrk="1" latinLnBrk="0" hangingPunct="1">
+              <a:lnSpc>
+                <a:spcPct val="90000"/>
+              </a:lnSpc>
+              <a:spcBef>
+                <a:spcPts val="1000"/>
+              </a:spcBef>
+              <a:buFont typeface="Arial" panose="020B0604020202020204" pitchFamily="34" charset="0"/>
+              <a:buChar char="•"/>
+              <a:defRPr sz="2800" kern="1200">
+                <a:solidFill>
+                  <a:schemeClr val="tx1"/>
+                </a:solidFill>
+                <a:latin typeface="+mn-lt"/>
+                <a:ea typeface="+mn-ea"/>
+                <a:cs typeface="+mn-cs"/>
+              </a:defRPr>
+            </a:lvl1pPr>
+            <a:lvl2pPr marL="685800" indent="-228600" algn="l" defTabSz="914400" rtl="0" eaLnBrk="1" latinLnBrk="0" hangingPunct="1">
+              <a:lnSpc>
+                <a:spcPct val="90000"/>
+              </a:lnSpc>
+              <a:spcBef>
+                <a:spcPts val="500"/>
+              </a:spcBef>
+              <a:buFont typeface="Arial" panose="020B0604020202020204" pitchFamily="34" charset="0"/>
+              <a:buChar char="•"/>
+              <a:defRPr sz="2400" kern="1200">
+                <a:solidFill>
+                  <a:schemeClr val="tx1"/>
+                </a:solidFill>
+                <a:latin typeface="+mn-lt"/>
+                <a:ea typeface="+mn-ea"/>
+                <a:cs typeface="+mn-cs"/>
+              </a:defRPr>
+            </a:lvl2pPr>
+            <a:lvl3pPr marL="1143000" indent="-228600" algn="l" defTabSz="914400" rtl="0" eaLnBrk="1" latinLnBrk="0" hangingPunct="1">
+              <a:lnSpc>
+                <a:spcPct val="90000"/>
+              </a:lnSpc>
+              <a:spcBef>
+                <a:spcPts val="500"/>
+              </a:spcBef>
+              <a:buFont typeface="Arial" panose="020B0604020202020204" pitchFamily="34" charset="0"/>
+              <a:buChar char="•"/>
+              <a:defRPr sz="2000" kern="1200">
+                <a:solidFill>
+                  <a:schemeClr val="tx1"/>
+                </a:solidFill>
+                <a:latin typeface="+mn-lt"/>
+                <a:ea typeface="+mn-ea"/>
+                <a:cs typeface="+mn-cs"/>
+              </a:defRPr>
+            </a:lvl3pPr>
+            <a:lvl4pPr marL="1600200" indent="-228600" algn="l" defTabSz="914400" rtl="0" eaLnBrk="1" latinLnBrk="0" hangingPunct="1">
+              <a:lnSpc>
+                <a:spcPct val="90000"/>
+              </a:lnSpc>
+              <a:spcBef>
+                <a:spcPts val="500"/>
+              </a:spcBef>
+              <a:buFont typeface="Arial" panose="020B0604020202020204" pitchFamily="34" charset="0"/>
+              <a:buChar char="•"/>
+              <a:defRPr sz="1800" kern="1200">
+                <a:solidFill>
+                  <a:schemeClr val="tx1"/>
+                </a:solidFill>
+                <a:latin typeface="+mn-lt"/>
+                <a:ea typeface="+mn-ea"/>
+                <a:cs typeface="+mn-cs"/>
+              </a:defRPr>
+            </a:lvl4pPr>
+            <a:lvl5pPr marL="2057400" indent="-228600" algn="l" defTabSz="914400" rtl="0" eaLnBrk="1" latinLnBrk="0" hangingPunct="1">
+              <a:lnSpc>
+                <a:spcPct val="90000"/>
+              </a:lnSpc>
+              <a:spcBef>
+                <a:spcPts val="500"/>
+              </a:spcBef>
+              <a:buFont typeface="Arial" panose="020B0604020202020204" pitchFamily="34" charset="0"/>
+              <a:buChar char="•"/>
+              <a:defRPr sz="1800" kern="1200">
+                <a:solidFill>
+                  <a:schemeClr val="tx1"/>
+                </a:solidFill>
+                <a:latin typeface="+mn-lt"/>
+                <a:ea typeface="+mn-ea"/>
+                <a:cs typeface="+mn-cs"/>
+              </a:defRPr>
+            </a:lvl5pPr>
+            <a:lvl6pPr marL="2514600" indent="-228600" algn="l" defTabSz="914400" rtl="0" eaLnBrk="1" latinLnBrk="0" hangingPunct="1">
+              <a:lnSpc>
+                <a:spcPct val="90000"/>
+              </a:lnSpc>
+              <a:spcBef>
+                <a:spcPts val="500"/>
+              </a:spcBef>
+              <a:buFont typeface="Arial" panose="020B0604020202020204" pitchFamily="34" charset="0"/>
+              <a:buChar char="•"/>
+              <a:defRPr sz="1800" kern="1200">
+                <a:solidFill>
+                  <a:schemeClr val="tx1"/>
+                </a:solidFill>
+                <a:latin typeface="+mn-lt"/>
+                <a:ea typeface="+mn-ea"/>
+                <a:cs typeface="+mn-cs"/>
+              </a:defRPr>
+            </a:lvl6pPr>
+            <a:lvl7pPr marL="2971800" indent="-228600" algn="l" defTabSz="914400" rtl="0" eaLnBrk="1" latinLnBrk="0" hangingPunct="1">
+              <a:lnSpc>
+                <a:spcPct val="90000"/>
+              </a:lnSpc>
+              <a:spcBef>
+                <a:spcPts val="500"/>
+              </a:spcBef>
+              <a:buFont typeface="Arial" panose="020B0604020202020204" pitchFamily="34" charset="0"/>
+              <a:buChar char="•"/>
+              <a:defRPr sz="1800" kern="1200">
+                <a:solidFill>
+                  <a:schemeClr val="tx1"/>
+                </a:solidFill>
+                <a:latin typeface="+mn-lt"/>
+                <a:ea typeface="+mn-ea"/>
+                <a:cs typeface="+mn-cs"/>
+              </a:defRPr>
+            </a:lvl7pPr>
+            <a:lvl8pPr marL="3429000" indent="-228600" algn="l" defTabSz="914400" rtl="0" eaLnBrk="1" latinLnBrk="0" hangingPunct="1">
+              <a:lnSpc>
+                <a:spcPct val="90000"/>
+              </a:lnSpc>
+              <a:spcBef>
+                <a:spcPts val="500"/>
+              </a:spcBef>
+              <a:buFont typeface="Arial" panose="020B0604020202020204" pitchFamily="34" charset="0"/>
+              <a:buChar char="•"/>
+              <a:defRPr sz="1800" kern="1200">
+                <a:solidFill>
+                  <a:schemeClr val="tx1"/>
+                </a:solidFill>
+                <a:latin typeface="+mn-lt"/>
+                <a:ea typeface="+mn-ea"/>
+                <a:cs typeface="+mn-cs"/>
+              </a:defRPr>
+            </a:lvl8pPr>
+            <a:lvl9pPr marL="3886200" indent="-228600" algn="l" defTabSz="914400" rtl="0" eaLnBrk="1" latinLnBrk="0" hangingPunct="1">
+              <a:lnSpc>
+                <a:spcPct val="90000"/>
+              </a:lnSpc>
+              <a:spcBef>
+                <a:spcPts val="500"/>
+              </a:spcBef>
+              <a:buFont typeface="Arial" panose="020B0604020202020204" pitchFamily="34" charset="0"/>
+              <a:buChar char="•"/>
+              <a:defRPr sz="1800" kern="1200">
+                <a:solidFill>
+                  <a:schemeClr val="tx1"/>
+                </a:solidFill>
+                <a:latin typeface="+mn-lt"/>
+                <a:ea typeface="+mn-ea"/>
+                <a:cs typeface="+mn-cs"/>
+              </a:defRPr>
+            </a:lvl9pPr>
+          </a:lstStyle>
+          <a:p>
+            <a:pPr marL="0" indent="0">
+              <a:buNone/>
+            </a:pPr>
+            <a:r>
+              <a:rPr lang="en-US" sz="2400" dirty="0">
+                <a:solidFill>
+                  <a:srgbClr val="000000"/>
+                </a:solidFill>
+                <a:latin typeface="Century Gothic" panose="020B0502020202020204" pitchFamily="34" charset="0"/>
+              </a:rPr>
+              <a:t>Albatross</a:t>
+            </a:r>
+          </a:p>
+        </p:txBody>
+      </p:sp>
+      <p:pic>
+        <p:nvPicPr>
+          <p:cNvPr id="7" name="Picture 6">
+            <a:extLst>
+              <a:ext uri="{FF2B5EF4-FFF2-40B4-BE49-F238E27FC236}">
+                <a16:creationId xmlns:a16="http://schemas.microsoft.com/office/drawing/2014/main" id="{54D9E5D1-CE16-75A9-FBF6-C95C7FB3A491}"/>
+              </a:ext>
+            </a:extLst>
+          </p:cNvPr>
+          <p:cNvPicPr>
+            <a:picLocks noChangeAspect="1"/>
+          </p:cNvPicPr>
+          <p:nvPr/>
+        </p:nvPicPr>
+        <p:blipFill>
+          <a:blip r:embed="rId3"/>
+          <a:stretch>
+            <a:fillRect/>
+          </a:stretch>
+        </p:blipFill>
+        <p:spPr>
+          <a:xfrm>
+            <a:off x="2079172" y="1615730"/>
+            <a:ext cx="7849948" cy="4716930"/>
+          </a:xfrm>
+          <a:prstGeom prst="rect">
+            <a:avLst/>
+          </a:prstGeom>
+        </p:spPr>
+      </p:pic>
     </p:spTree>
     <p:extLst>
       <p:ext uri="{BB962C8B-B14F-4D97-AF65-F5344CB8AC3E}">
-        <p14:creationId xmlns:p14="http://schemas.microsoft.com/office/powerpoint/2010/main" val="2707603935"/>
+        <p14:creationId xmlns:p14="http://schemas.microsoft.com/office/powerpoint/2010/main" val="3517056293"/>
       </p:ext>
     </p:extLst>
   </p:cSld>
@@ -13670,7 +12867,7 @@
           <p:cNvPr id="3" name="Content Placeholder 2">
             <a:extLst>
               <a:ext uri="{FF2B5EF4-FFF2-40B4-BE49-F238E27FC236}">
-                <a16:creationId xmlns:a16="http://schemas.microsoft.com/office/drawing/2014/main" id="{61DC47D5-EC06-36E6-5D6C-07CE82108FC4}"/>
+                <a16:creationId xmlns:a16="http://schemas.microsoft.com/office/drawing/2014/main" id="{8E7664B6-E591-768E-08A1-E2467FE3AA0A}"/>
               </a:ext>
             </a:extLst>
           </p:cNvPr>
@@ -13683,398 +12880,424 @@
         </p:nvSpPr>
         <p:spPr>
           <a:xfrm>
-            <a:off x="605642" y="1184359"/>
-            <a:ext cx="10515600" cy="4351338"/>
+            <a:off x="605641" y="1164664"/>
+            <a:ext cx="10770919" cy="5069881"/>
           </a:xfrm>
         </p:spPr>
         <p:txBody>
           <a:bodyPr>
-            <a:normAutofit lnSpcReduction="10000"/>
+            <a:normAutofit/>
           </a:bodyPr>
           <a:lstStyle/>
           <a:p>
             <a:r>
-              <a:rPr lang="en-US" sz="1700" b="0" i="0" u="none" strike="noStrike" baseline="0" dirty="0">
+              <a:rPr lang="en-US" sz="1600" b="0" i="0" u="none" strike="noStrike" baseline="0" dirty="0">
                 <a:solidFill>
                   <a:srgbClr val="000000"/>
                 </a:solidFill>
-                <a:latin typeface="+mj-lt"/>
-              </a:rPr>
-              <a:t>Nicholson, K.L., Matthew J. Warren, Camille </a:t>
-            </a:r>
-            <a:r>
-              <a:rPr lang="en-US" sz="1700" b="0" i="0" u="none" strike="noStrike" baseline="0" dirty="0" err="1">
+              </a:rPr>
+              <a:t>Cagnacci, F., Focardi, S., </a:t>
+            </a:r>
+            <a:r>
+              <a:rPr lang="en-US" sz="1600" b="0" i="0" u="none" strike="noStrike" baseline="0" dirty="0" err="1">
                 <a:solidFill>
                   <a:srgbClr val="000000"/>
                 </a:solidFill>
-                <a:latin typeface="+mj-lt"/>
-              </a:rPr>
-              <a:t>Rostan</a:t>
-            </a:r>
-            <a:r>
-              <a:rPr lang="en-US" sz="1700" b="0" i="0" u="none" strike="noStrike" baseline="0" dirty="0">
+              </a:rPr>
+              <a:t>Ghisla</a:t>
+            </a:r>
+            <a:r>
+              <a:rPr lang="en-US" sz="1600" b="0" i="0" u="none" strike="noStrike" baseline="0" dirty="0">
                 <a:solidFill>
                   <a:srgbClr val="000000"/>
                 </a:solidFill>
-                <a:latin typeface="+mj-lt"/>
-              </a:rPr>
-              <a:t>, Johan </a:t>
-            </a:r>
-            <a:r>
-              <a:rPr lang="en-US" sz="1700" b="0" i="0" u="none" strike="noStrike" baseline="0" dirty="0" err="1">
+              </a:rPr>
+              <a:t>, A., van </a:t>
+            </a:r>
+            <a:r>
+              <a:rPr lang="en-US" sz="1600" b="0" i="0" u="none" strike="noStrike" baseline="0" dirty="0" err="1">
                 <a:solidFill>
                   <a:srgbClr val="000000"/>
                 </a:solidFill>
-                <a:latin typeface="+mj-lt"/>
-              </a:rPr>
-              <a:t>Månsson</a:t>
-            </a:r>
-            <a:r>
-              <a:rPr lang="en-US" sz="1700" b="0" i="0" u="none" strike="noStrike" baseline="0" dirty="0">
+              </a:rPr>
+              <a:t>Moorter</a:t>
+            </a:r>
+            <a:r>
+              <a:rPr lang="en-US" sz="1600" b="0" i="0" u="none" strike="noStrike" baseline="0" dirty="0">
                 <a:solidFill>
                   <a:srgbClr val="000000"/>
                 </a:solidFill>
-                <a:latin typeface="+mj-lt"/>
-              </a:rPr>
-              <a:t>, Thomas F. </a:t>
-            </a:r>
-            <a:r>
-              <a:rPr lang="en-US" sz="1700" b="0" i="0" u="none" strike="noStrike" baseline="0" dirty="0" err="1">
+              </a:rPr>
+              <a:t>, B., Merrill, E.H., Gurarie, E., </a:t>
+            </a:r>
+            <a:r>
+              <a:rPr lang="en-US" sz="1600" b="0" i="0" u="none" strike="noStrike" baseline="0" dirty="0" err="1">
                 <a:solidFill>
                   <a:srgbClr val="000000"/>
                 </a:solidFill>
-                <a:latin typeface="+mj-lt"/>
-              </a:rPr>
-              <a:t>Paragi</a:t>
-            </a:r>
-            <a:r>
-              <a:rPr lang="en-US" sz="1700" b="0" i="0" u="none" strike="noStrike" baseline="0" dirty="0">
+              </a:rPr>
+              <a:t>Heurich</a:t>
+            </a:r>
+            <a:r>
+              <a:rPr lang="en-US" sz="1600" b="0" i="0" u="none" strike="noStrike" baseline="0" dirty="0">
                 <a:solidFill>
                   <a:srgbClr val="000000"/>
                 </a:solidFill>
-                <a:latin typeface="+mj-lt"/>
+              </a:rPr>
+              <a:t>, M., Mysterud, A., Linnell, J., </a:t>
+            </a:r>
+            <a:r>
+              <a:rPr lang="en-US" sz="1600" b="0" i="0" u="none" strike="noStrike" baseline="0" dirty="0" err="1">
+                <a:solidFill>
+                  <a:srgbClr val="000000"/>
+                </a:solidFill>
+              </a:rPr>
+              <a:t>Panzacchi</a:t>
+            </a:r>
+            <a:r>
+              <a:rPr lang="en-US" sz="1600" b="0" i="0" u="none" strike="noStrike" baseline="0" dirty="0">
+                <a:solidFill>
+                  <a:srgbClr val="000000"/>
+                </a:solidFill>
+              </a:rPr>
+              <a:t>, M., May, R., </a:t>
+            </a:r>
+            <a:r>
+              <a:rPr lang="en-US" sz="1600" b="0" i="0" u="none" strike="noStrike" baseline="0" dirty="0" err="1">
+                <a:solidFill>
+                  <a:srgbClr val="000000"/>
+                </a:solidFill>
+              </a:rPr>
+              <a:t>Nygård</a:t>
+            </a:r>
+            <a:r>
+              <a:rPr lang="en-US" sz="1600" b="0" i="0" u="none" strike="noStrike" baseline="0" dirty="0">
+                <a:solidFill>
+                  <a:srgbClr val="000000"/>
+                </a:solidFill>
+              </a:rPr>
+              <a:t>, T., </a:t>
+            </a:r>
+            <a:r>
+              <a:rPr lang="en-US" sz="1600" b="0" i="0" u="none" strike="noStrike" baseline="0" dirty="0" err="1">
+                <a:solidFill>
+                  <a:srgbClr val="000000"/>
+                </a:solidFill>
+              </a:rPr>
+              <a:t>Rolandsen</a:t>
+            </a:r>
+            <a:r>
+              <a:rPr lang="en-US" sz="1600" b="0" i="0" u="none" strike="noStrike" baseline="0" dirty="0">
+                <a:solidFill>
+                  <a:srgbClr val="000000"/>
+                </a:solidFill>
+              </a:rPr>
+              <a:t>, C. and Hebblewhite, M. (2016), How many routes lead to migration? Comparison of methods to assess and characterize migratory movements. J Anim </a:t>
+            </a:r>
+            <a:r>
+              <a:rPr lang="en-US" sz="1600" b="0" i="0" u="none" strike="noStrike" baseline="0" dirty="0" err="1">
+                <a:solidFill>
+                  <a:srgbClr val="000000"/>
+                </a:solidFill>
+              </a:rPr>
+              <a:t>Ecol</a:t>
+            </a:r>
+            <a:r>
+              <a:rPr lang="en-US" sz="1600" b="0" i="0" u="none" strike="noStrike" baseline="0" dirty="0">
+                <a:solidFill>
+                  <a:srgbClr val="000000"/>
+                </a:solidFill>
+              </a:rPr>
+              <a:t>, 85: 54-68. </a:t>
+            </a:r>
+          </a:p>
+          <a:p>
+            <a:r>
+              <a:rPr lang="en-US" sz="1600" b="0" i="0" u="none" strike="noStrike" baseline="0" dirty="0" err="1">
+                <a:solidFill>
+                  <a:srgbClr val="000000"/>
+                </a:solidFill>
+              </a:rPr>
+              <a:t>Karelus</a:t>
+            </a:r>
+            <a:r>
+              <a:rPr lang="en-US" sz="1600" b="0" i="0" u="none" strike="noStrike" baseline="0" dirty="0">
+                <a:solidFill>
+                  <a:srgbClr val="000000"/>
+                </a:solidFill>
+              </a:rPr>
+              <a:t>, D.L., J. Walter McCown, Brian K. </a:t>
+            </a:r>
+            <a:r>
+              <a:rPr lang="en-US" sz="1600" b="0" i="0" u="none" strike="noStrike" baseline="0" dirty="0" err="1">
+                <a:solidFill>
+                  <a:srgbClr val="000000"/>
+                </a:solidFill>
+              </a:rPr>
+              <a:t>Scheick</a:t>
+            </a:r>
+            <a:r>
+              <a:rPr lang="en-US" sz="1600" b="0" i="0" u="none" strike="noStrike" baseline="0" dirty="0">
+                <a:solidFill>
+                  <a:srgbClr val="000000"/>
+                </a:solidFill>
               </a:rPr>
               <a:t>, </a:t>
             </a:r>
             <a:r>
-              <a:rPr lang="en-US" sz="1700" b="0" i="0" u="none" strike="noStrike" baseline="0" dirty="0" err="1">
+              <a:rPr lang="en-US" sz="1600" b="0" i="0" u="none" strike="noStrike" baseline="0" dirty="0" err="1">
                 <a:solidFill>
                   <a:srgbClr val="000000"/>
                 </a:solidFill>
-                <a:latin typeface="+mj-lt"/>
-              </a:rPr>
-              <a:t>HåkanSand</a:t>
-            </a:r>
-            <a:r>
-              <a:rPr lang="en-US" sz="1700" b="0" i="0" u="none" strike="noStrike" baseline="0" dirty="0">
+              </a:rPr>
+              <a:t>Madelonvan</a:t>
+            </a:r>
+            <a:r>
+              <a:rPr lang="en-US" sz="1600" b="0" i="0" u="none" strike="noStrike" baseline="0" dirty="0">
                 <a:solidFill>
                   <a:srgbClr val="000000"/>
                 </a:solidFill>
-                <a:latin typeface="+mj-lt"/>
-              </a:rPr>
-              <a:t>. 2019. Using fine-scale movement patterns to infer ungulate parturition. Ecological Indicators 101: 22-30. </a:t>
-            </a:r>
-            <a:r>
-              <a:rPr lang="en-US" sz="1700" b="0" i="0" u="none" strike="noStrike" baseline="0" dirty="0">
-                <a:solidFill>
-                  <a:srgbClr val="0462C1"/>
-                </a:solidFill>
-                <a:latin typeface="+mj-lt"/>
-              </a:rPr>
-              <a:t>https://doi.org/10.1016/j.ecolind.2019.01.004</a:t>
-            </a:r>
-            <a:r>
-              <a:rPr lang="en-US" sz="1700" b="0" i="0" u="none" strike="noStrike" baseline="0" dirty="0">
+              </a:rPr>
+              <a:t> de </a:t>
+            </a:r>
+            <a:r>
+              <a:rPr lang="en-US" sz="1600" b="0" i="0" u="none" strike="noStrike" baseline="0" dirty="0" err="1">
                 <a:solidFill>
                   <a:srgbClr val="000000"/>
                 </a:solidFill>
-                <a:latin typeface="+mj-lt"/>
-              </a:rPr>
-              <a:t>. </a:t>
-            </a:r>
-          </a:p>
-          <a:p>
-            <a:r>
-              <a:rPr lang="en-US" sz="1700" b="0" i="0" u="none" strike="noStrike" baseline="0" dirty="0" err="1">
+              </a:rPr>
+              <a:t>Kerk</a:t>
+            </a:r>
+            <a:r>
+              <a:rPr lang="en-US" sz="1600" b="0" i="0" u="none" strike="noStrike" baseline="0" dirty="0">
                 <a:solidFill>
                   <a:srgbClr val="000000"/>
                 </a:solidFill>
-                <a:latin typeface="+mj-lt"/>
-              </a:rPr>
-              <a:t>Patin</a:t>
-            </a:r>
-            <a:r>
-              <a:rPr lang="en-US" sz="1700" b="0" i="0" u="none" strike="noStrike" baseline="0" dirty="0">
+              </a:rPr>
+              <a:t>, Benjamin M. </a:t>
+            </a:r>
+            <a:r>
+              <a:rPr lang="en-US" sz="1600" b="0" i="0" u="none" strike="noStrike" baseline="0" dirty="0" err="1">
                 <a:solidFill>
                   <a:srgbClr val="000000"/>
                 </a:solidFill>
-                <a:latin typeface="+mj-lt"/>
-              </a:rPr>
-              <a:t>, R, Etienne, M-P, </a:t>
-            </a:r>
-            <a:r>
-              <a:rPr lang="en-US" sz="1700" b="0" i="0" u="none" strike="noStrike" baseline="0" dirty="0" err="1">
+              </a:rPr>
+              <a:t>Bolker</a:t>
+            </a:r>
+            <a:r>
+              <a:rPr lang="en-US" sz="1600" b="0" i="0" u="none" strike="noStrike" baseline="0" dirty="0">
                 <a:solidFill>
                   <a:srgbClr val="000000"/>
                 </a:solidFill>
-                <a:latin typeface="+mj-lt"/>
-              </a:rPr>
-              <a:t>Lebarbier</a:t>
-            </a:r>
-            <a:r>
-              <a:rPr lang="en-US" sz="1700" b="0" i="0" u="none" strike="noStrike" baseline="0" dirty="0">
+              </a:rPr>
+              <a:t>, Madan K. Oli "Incorporating movement patterns to discern habitat selection: black bears as a case study," Wildlife Research, 46(1), 76-88, (15 February 2019) </a:t>
+            </a:r>
+          </a:p>
+          <a:p>
+            <a:r>
+              <a:rPr lang="en-US" sz="1600" b="0" i="0" u="none" strike="noStrike" baseline="0" dirty="0">
                 <a:solidFill>
                   <a:srgbClr val="000000"/>
                 </a:solidFill>
-                <a:latin typeface="+mj-lt"/>
-              </a:rPr>
-              <a:t>, E, Chamaillé-Jammes, S, Benhamou, S. Identifying stationary phases in multivariate time series for highlighting </a:t>
-            </a:r>
-            <a:r>
-              <a:rPr lang="en-US" sz="1700" b="0" i="0" u="none" strike="noStrike" baseline="0" dirty="0" err="1">
+              </a:rPr>
+              <a:t>Kennedy, A. S., A. N. </a:t>
+            </a:r>
+            <a:r>
+              <a:rPr lang="en-US" sz="1600" b="0" i="0" u="none" strike="noStrike" baseline="0" dirty="0" err="1">
                 <a:solidFill>
                   <a:srgbClr val="000000"/>
                 </a:solidFill>
-                <a:latin typeface="+mj-lt"/>
-              </a:rPr>
-              <a:t>behavioural</a:t>
-            </a:r>
-            <a:r>
-              <a:rPr lang="en-US" sz="1700" b="0" i="0" u="none" strike="noStrike" baseline="0" dirty="0">
+              </a:rPr>
+              <a:t>Zerbini</a:t>
+            </a:r>
+            <a:r>
+              <a:rPr lang="en-US" sz="1600" b="0" i="0" u="none" strike="noStrike" baseline="0" dirty="0">
                 <a:solidFill>
                   <a:srgbClr val="000000"/>
                 </a:solidFill>
-                <a:latin typeface="+mj-lt"/>
-              </a:rPr>
-              <a:t> modes and home range settlements. </a:t>
-            </a:r>
-            <a:r>
-              <a:rPr lang="en-US" sz="1700" b="0" i="1" u="none" strike="noStrike" baseline="0" dirty="0">
+              </a:rPr>
+              <a:t>, B. K. </a:t>
+            </a:r>
+            <a:r>
+              <a:rPr lang="en-US" sz="1600" b="0" i="0" u="none" strike="noStrike" baseline="0" dirty="0" err="1">
                 <a:solidFill>
                   <a:srgbClr val="000000"/>
                 </a:solidFill>
-                <a:latin typeface="+mj-lt"/>
-              </a:rPr>
-              <a:t>J Anim Ecol</a:t>
-            </a:r>
-            <a:r>
-              <a:rPr lang="en-US" sz="1700" b="0" i="0" u="none" strike="noStrike" baseline="0" dirty="0">
+              </a:rPr>
+              <a:t>Rone</a:t>
+            </a:r>
+            <a:r>
+              <a:rPr lang="en-US" sz="1600" b="0" i="0" u="none" strike="noStrike" baseline="0" dirty="0">
                 <a:solidFill>
                   <a:srgbClr val="000000"/>
                 </a:solidFill>
-                <a:latin typeface="+mj-lt"/>
-              </a:rPr>
-              <a:t>. 2020; 89: 44–56. </a:t>
-            </a:r>
-          </a:p>
-          <a:p>
-            <a:r>
-              <a:rPr lang="en-US" sz="1700" b="0" i="0" u="none" strike="noStrike" baseline="0" dirty="0" err="1">
+              </a:rPr>
+              <a:t>, and P. J. Clapham. 2014. Individual variation in movements of satellite-tracked humpback whales Megaptera novaeangliae in the eastern Aleutian Islands and Bering Sea. Endangered Species Research 23:187195 </a:t>
+            </a:r>
+          </a:p>
+          <a:p>
+            <a:r>
+              <a:rPr lang="en-US" sz="1600" b="0" i="0" u="none" strike="noStrike" baseline="0" dirty="0" err="1">
                 <a:solidFill>
                   <a:srgbClr val="000000"/>
                 </a:solidFill>
-                <a:latin typeface="+mj-lt"/>
-              </a:rPr>
-              <a:t>Pohle</a:t>
-            </a:r>
-            <a:r>
-              <a:rPr lang="en-US" sz="1700" b="0" i="0" u="none" strike="noStrike" baseline="0" dirty="0">
+              </a:rPr>
+              <a:t>Klappstein</a:t>
+            </a:r>
+            <a:r>
+              <a:rPr lang="en-US" sz="1600" b="0" i="0" u="none" strike="noStrike" baseline="0" dirty="0">
                 <a:solidFill>
                   <a:srgbClr val="000000"/>
                 </a:solidFill>
-                <a:latin typeface="+mj-lt"/>
-              </a:rPr>
-              <a:t>, J., </a:t>
-            </a:r>
-            <a:r>
-              <a:rPr lang="en-US" sz="1700" b="0" i="0" u="none" strike="noStrike" baseline="0" dirty="0" err="1">
+              </a:rPr>
+              <a:t> NJ, Thomas L, Michelot T. Flexible hidden Markov models for </a:t>
+            </a:r>
+            <a:r>
+              <a:rPr lang="en-US" sz="1600" b="0" i="0" u="none" strike="noStrike" baseline="0" dirty="0" err="1">
                 <a:solidFill>
                   <a:srgbClr val="000000"/>
                 </a:solidFill>
-                <a:latin typeface="+mj-lt"/>
-              </a:rPr>
-              <a:t>Langrock</a:t>
-            </a:r>
-            <a:r>
-              <a:rPr lang="en-US" sz="1700" b="0" i="0" u="none" strike="noStrike" baseline="0" dirty="0">
+              </a:rPr>
+              <a:t>behaviour</a:t>
+            </a:r>
+            <a:r>
+              <a:rPr lang="en-US" sz="1600" b="0" i="0" u="none" strike="noStrike" baseline="0" dirty="0">
                 <a:solidFill>
                   <a:srgbClr val="000000"/>
                 </a:solidFill>
-                <a:latin typeface="+mj-lt"/>
-              </a:rPr>
-              <a:t>, R., van </a:t>
-            </a:r>
-            <a:r>
-              <a:rPr lang="en-US" sz="1700" b="0" i="0" u="none" strike="noStrike" baseline="0" dirty="0" err="1">
+              </a:rPr>
+              <a:t>-dependent habitat selection. Mov Ecol. 2023 Jun 3;11(1):30. </a:t>
+            </a:r>
+            <a:r>
+              <a:rPr lang="en-US" sz="1600" b="0" i="0" u="none" strike="noStrike" baseline="0" dirty="0" err="1">
                 <a:solidFill>
                   <a:srgbClr val="000000"/>
                 </a:solidFill>
-                <a:latin typeface="+mj-lt"/>
-              </a:rPr>
-              <a:t>Beest</a:t>
-            </a:r>
-            <a:r>
-              <a:rPr lang="en-US" sz="1700" b="0" i="0" u="none" strike="noStrike" baseline="0" dirty="0">
+              </a:rPr>
+              <a:t>doi</a:t>
+            </a:r>
+            <a:r>
+              <a:rPr lang="en-US" sz="1600" b="0" i="0" u="none" strike="noStrike" baseline="0" dirty="0">
                 <a:solidFill>
                   <a:srgbClr val="000000"/>
                 </a:solidFill>
-                <a:latin typeface="+mj-lt"/>
-              </a:rPr>
-              <a:t>, F.M. et al. Selecting the Number of States in Hidden Markov Models: Pragmatic Solutions Illustrated Using Animal Movement. JABES 22, 270–293 (2017). </a:t>
-            </a:r>
-            <a:r>
-              <a:rPr lang="en-US" sz="1700" b="0" i="0" u="none" strike="noStrike" baseline="0" dirty="0">
-                <a:solidFill>
-                  <a:srgbClr val="0462C1"/>
-                </a:solidFill>
-                <a:latin typeface="+mj-lt"/>
-              </a:rPr>
-              <a:t>https://doi.org/10.1007/s13253-017-0283-8</a:t>
-            </a:r>
-          </a:p>
-          <a:p>
-            <a:r>
-              <a:rPr lang="en-US" sz="1700" b="0" i="0" u="none" strike="noStrike" baseline="0" dirty="0">
+              </a:rPr>
+              <a:t>: 10.1186/s40462-023-00392-3. </a:t>
+            </a:r>
+            <a:endParaRPr lang="en-US" dirty="0"/>
+          </a:p>
+          <a:p>
+            <a:r>
+              <a:rPr lang="en-US" sz="1600" dirty="0"/>
+              <a:t>McClintock, B.T. and Michelot, T. (2018), </a:t>
+            </a:r>
+            <a:r>
+              <a:rPr lang="en-US" sz="1600" dirty="0" err="1"/>
+              <a:t>momentuHMM</a:t>
+            </a:r>
+            <a:r>
+              <a:rPr lang="en-US" sz="1600" dirty="0"/>
+              <a:t>: </a:t>
+            </a:r>
+            <a:r>
+              <a:rPr lang="en-US" sz="1600" cap="small" dirty="0"/>
+              <a:t>R</a:t>
+            </a:r>
+            <a:r>
+              <a:rPr lang="en-US" sz="1600" dirty="0"/>
+              <a:t> package for generalized hidden Markov models of animal movement. </a:t>
+            </a:r>
+            <a:r>
+              <a:rPr lang="en-US" sz="1600" dirty="0">
                 <a:solidFill>
                   <a:srgbClr val="000000"/>
                 </a:solidFill>
-                <a:latin typeface="+mj-lt"/>
-              </a:rPr>
-              <a:t>Postlethwaite CM, Dennis TE (2013) Effects of Temporal Resolution on an Inferential Model of Animal Movement. </a:t>
-            </a:r>
-            <a:r>
-              <a:rPr lang="en-US" sz="1700" b="0" i="0" u="none" strike="noStrike" baseline="0" dirty="0" err="1">
+              </a:rPr>
+              <a:t>Methods </a:t>
+            </a:r>
+            <a:r>
+              <a:rPr lang="en-US" sz="1600" dirty="0" err="1">
                 <a:solidFill>
                   <a:srgbClr val="000000"/>
                 </a:solidFill>
-                <a:latin typeface="+mj-lt"/>
-              </a:rPr>
-              <a:t>PLoS</a:t>
-            </a:r>
-            <a:r>
-              <a:rPr lang="en-US" sz="1700" b="0" i="0" u="none" strike="noStrike" baseline="0" dirty="0">
+              </a:rPr>
+              <a:t>Ecol</a:t>
+            </a:r>
+            <a:r>
+              <a:rPr lang="en-US" sz="1600">
                 <a:solidFill>
                   <a:srgbClr val="000000"/>
                 </a:solidFill>
-                <a:latin typeface="+mj-lt"/>
-              </a:rPr>
-              <a:t> ONE 8(5): e57640. </a:t>
-            </a:r>
-          </a:p>
-          <a:p>
-            <a:r>
-              <a:rPr lang="en-US" sz="1700" b="0" i="0" u="none" strike="noStrike" baseline="0" dirty="0">
+              </a:rPr>
+              <a:t> Evol, 9(6): 1518-1530.</a:t>
+            </a:r>
+            <a:r>
+              <a:rPr lang="en-US" sz="1600"/>
+              <a:t> </a:t>
+            </a:r>
+            <a:r>
+              <a:rPr lang="en-US" sz="1600" dirty="0"/>
+              <a:t>https://doi.org/10.1111/2041-210X.12995.</a:t>
+            </a:r>
+          </a:p>
+          <a:p>
+            <a:r>
+              <a:rPr lang="en-US" sz="1600" b="0" i="0" u="none" strike="noStrike" baseline="0" dirty="0">
                 <a:solidFill>
                   <a:srgbClr val="000000"/>
                 </a:solidFill>
-                <a:latin typeface="+mj-lt"/>
-              </a:rPr>
-              <a:t>Towner, A.V., Leos-Barajas, V., Langrock, R., Schick, R.S., Smale, M.J., </a:t>
-            </a:r>
-            <a:r>
-              <a:rPr lang="en-US" sz="1700" b="0" i="0" u="none" strike="noStrike" baseline="0" dirty="0" err="1">
+              </a:rPr>
+              <a:t>Michelot, T., Langrock, R. and Patterson, T.A. (2016), </a:t>
+            </a:r>
+            <a:r>
+              <a:rPr lang="en-US" sz="1600" b="0" i="0" u="none" strike="noStrike" baseline="0" dirty="0" err="1">
                 <a:solidFill>
                   <a:srgbClr val="000000"/>
                 </a:solidFill>
-                <a:latin typeface="+mj-lt"/>
-              </a:rPr>
-              <a:t>Kaschke</a:t>
-            </a:r>
-            <a:r>
-              <a:rPr lang="en-US" sz="1700" b="0" i="0" u="none" strike="noStrike" baseline="0" dirty="0">
+              </a:rPr>
+              <a:t>moveHMM</a:t>
+            </a:r>
+            <a:r>
+              <a:rPr lang="en-US" sz="1600" b="0" i="0" u="none" strike="noStrike" baseline="0" dirty="0">
                 <a:solidFill>
                   <a:srgbClr val="000000"/>
                 </a:solidFill>
-                <a:latin typeface="+mj-lt"/>
-              </a:rPr>
-              <a:t>, T., Jewell, O.J.D. and </a:t>
-            </a:r>
-            <a:r>
-              <a:rPr lang="en-US" sz="1700" b="0" i="0" u="none" strike="noStrike" baseline="0" dirty="0" err="1">
+              </a:rPr>
+              <a:t>: an R package for the statistical modelling of animal movement data using hidden Markov models. Methods </a:t>
+            </a:r>
+            <a:r>
+              <a:rPr lang="en-US" sz="1600" b="0" i="0" u="none" strike="noStrike" baseline="0" dirty="0" err="1">
                 <a:solidFill>
                   <a:srgbClr val="000000"/>
                 </a:solidFill>
-                <a:latin typeface="+mj-lt"/>
-              </a:rPr>
-              <a:t>Papastamatiou</a:t>
-            </a:r>
-            <a:r>
-              <a:rPr lang="en-US" sz="1700" b="0" i="0" u="none" strike="noStrike" baseline="0" dirty="0">
+              </a:rPr>
+              <a:t>Ecol</a:t>
+            </a:r>
+            <a:r>
+              <a:rPr lang="en-US" sz="1600" b="0" i="0" u="none" strike="noStrike" baseline="0" dirty="0">
                 <a:solidFill>
                   <a:srgbClr val="000000"/>
                 </a:solidFill>
-                <a:latin typeface="+mj-lt"/>
-              </a:rPr>
-              <a:t>, Y.P. (2016), Sex-specific and individual preferences for hunting strategies in white sharks. </a:t>
-            </a:r>
-            <a:r>
-              <a:rPr lang="en-US" sz="1700" b="0" i="0" u="none" strike="noStrike" baseline="0" dirty="0" err="1">
+              </a:rPr>
+              <a:t> </a:t>
+            </a:r>
+            <a:r>
+              <a:rPr lang="en-US" sz="1600" b="0" i="0" u="none" strike="noStrike" baseline="0" dirty="0" err="1">
                 <a:solidFill>
                   <a:srgbClr val="000000"/>
                 </a:solidFill>
-                <a:latin typeface="+mj-lt"/>
-              </a:rPr>
-              <a:t>Funct</a:t>
-            </a:r>
-            <a:r>
-              <a:rPr lang="en-US" sz="1700" b="0" i="0" u="none" strike="noStrike" baseline="0" dirty="0">
+              </a:rPr>
+              <a:t>Evol</a:t>
+            </a:r>
+            <a:r>
+              <a:rPr lang="en-US" sz="1600" b="0" i="0" u="none" strike="noStrike" baseline="0" dirty="0">
                 <a:solidFill>
                   <a:srgbClr val="000000"/>
                 </a:solidFill>
-                <a:latin typeface="+mj-lt"/>
-              </a:rPr>
-              <a:t> </a:t>
-            </a:r>
-            <a:r>
-              <a:rPr lang="en-US" sz="1700" b="0" i="0" u="none" strike="noStrike" baseline="0" dirty="0" err="1">
-                <a:solidFill>
-                  <a:srgbClr val="000000"/>
-                </a:solidFill>
-                <a:latin typeface="+mj-lt"/>
-              </a:rPr>
-              <a:t>Ecol</a:t>
-            </a:r>
-            <a:r>
-              <a:rPr lang="en-US" sz="1700" b="0" i="0" u="none" strike="noStrike" baseline="0" dirty="0">
-                <a:solidFill>
-                  <a:srgbClr val="000000"/>
-                </a:solidFill>
-                <a:latin typeface="+mj-lt"/>
-              </a:rPr>
-              <a:t>, 30: 1397-1407. </a:t>
-            </a:r>
-          </a:p>
-          <a:p>
-            <a:r>
-              <a:rPr lang="en-US" sz="1700" b="0" i="0" u="none" strike="noStrike" baseline="0" dirty="0">
-                <a:solidFill>
-                  <a:srgbClr val="000000"/>
-                </a:solidFill>
-                <a:latin typeface="+mj-lt"/>
-              </a:rPr>
-              <a:t>Zucchini, W., MacDonald, I. L., and </a:t>
-            </a:r>
-            <a:r>
-              <a:rPr lang="en-US" sz="1700" b="0" i="0" u="none" strike="noStrike" baseline="0" dirty="0" err="1">
-                <a:solidFill>
-                  <a:srgbClr val="000000"/>
-                </a:solidFill>
-                <a:latin typeface="+mj-lt"/>
-              </a:rPr>
-              <a:t>Langrock</a:t>
-            </a:r>
-            <a:r>
-              <a:rPr lang="en-US" sz="1700" b="0" i="0" u="none" strike="noStrike" baseline="0" dirty="0">
-                <a:solidFill>
-                  <a:srgbClr val="000000"/>
-                </a:solidFill>
-                <a:latin typeface="+mj-lt"/>
-              </a:rPr>
-              <a:t>, R. (2016). Hidden Markov models for time series: an introduction using R, Second Edition. Chapman and Hall/CRC.</a:t>
-            </a:r>
-          </a:p>
-          <a:p>
-            <a:endParaRPr lang="en-US" dirty="0"/>
+              </a:rPr>
+              <a:t>, 7: 1308-1315. </a:t>
+            </a:r>
+            <a:endParaRPr lang="en-US" sz="1600" dirty="0"/>
           </a:p>
         </p:txBody>
       </p:sp>
@@ -14083,7 +13306,7 @@
           <p:cNvPr id="4" name="Title 1">
             <a:extLst>
               <a:ext uri="{FF2B5EF4-FFF2-40B4-BE49-F238E27FC236}">
-                <a16:creationId xmlns:a16="http://schemas.microsoft.com/office/drawing/2014/main" id="{1C11FC36-095B-3BF9-DE85-1789FC03B8C2}"/>
+                <a16:creationId xmlns:a16="http://schemas.microsoft.com/office/drawing/2014/main" id="{7399F66D-D444-F92A-B5F9-9B6852FEFDCE}"/>
               </a:ext>
             </a:extLst>
           </p:cNvPr>
@@ -14131,7 +13354,7 @@
                   <a:srgbClr val="000000"/>
                 </a:solidFill>
               </a:rPr>
-              <a:t>References (Cont’d)</a:t>
+              <a:t>References</a:t>
             </a:r>
             <a:br>
               <a:rPr lang="en-US" sz="3200" b="1" dirty="0">
@@ -14147,7 +13370,7 @@
     </p:spTree>
     <p:extLst>
       <p:ext uri="{BB962C8B-B14F-4D97-AF65-F5344CB8AC3E}">
-        <p14:creationId xmlns:p14="http://schemas.microsoft.com/office/powerpoint/2010/main" val="1549252542"/>
+        <p14:creationId xmlns:p14="http://schemas.microsoft.com/office/powerpoint/2010/main" val="2707603935"/>
       </p:ext>
     </p:extLst>
   </p:cSld>
@@ -14601,264 +13824,515 @@
   <p:clrMapOvr>
     <a:masterClrMapping/>
   </p:clrMapOvr>
-  <p:timing>
-    <p:tnLst>
-      <p:par>
-        <p:cTn id="1" dur="indefinite" restart="never" nodeType="tmRoot">
-          <p:childTnLst>
-            <p:seq concurrent="1" nextAc="seek">
-              <p:cTn id="2" dur="indefinite" nodeType="mainSeq">
-                <p:childTnLst>
-                  <p:par>
-                    <p:cTn id="3" fill="hold">
-                      <p:stCondLst>
-                        <p:cond delay="indefinite"/>
-                      </p:stCondLst>
-                      <p:childTnLst>
-                        <p:par>
-                          <p:cTn id="4" fill="hold">
-                            <p:stCondLst>
-                              <p:cond delay="0"/>
-                            </p:stCondLst>
-                            <p:childTnLst>
-                              <p:par>
-                                <p:cTn id="5" presetID="10" presetClass="exit" presetSubtype="0" fill="hold" nodeType="clickEffect">
-                                  <p:stCondLst>
-                                    <p:cond delay="0"/>
-                                  </p:stCondLst>
-                                  <p:childTnLst>
-                                    <p:animEffect transition="out" filter="fade">
-                                      <p:cBhvr>
-                                        <p:cTn id="6" dur="500"/>
-                                        <p:tgtEl>
-                                          <p:spTgt spid="3">
-                                            <p:txEl>
-                                              <p:pRg st="0" end="0"/>
-                                            </p:txEl>
-                                          </p:spTgt>
-                                        </p:tgtEl>
-                                      </p:cBhvr>
-                                    </p:animEffect>
-                                    <p:set>
-                                      <p:cBhvr>
-                                        <p:cTn id="7" dur="1" fill="hold">
-                                          <p:stCondLst>
-                                            <p:cond delay="499"/>
-                                          </p:stCondLst>
-                                        </p:cTn>
-                                        <p:tgtEl>
-                                          <p:spTgt spid="3">
-                                            <p:txEl>
-                                              <p:pRg st="0" end="0"/>
-                                            </p:txEl>
-                                          </p:spTgt>
-                                        </p:tgtEl>
-                                        <p:attrNameLst>
-                                          <p:attrName>style.visibility</p:attrName>
-                                        </p:attrNameLst>
-                                      </p:cBhvr>
-                                      <p:to>
-                                        <p:strVal val="hidden"/>
-                                      </p:to>
-                                    </p:set>
-                                  </p:childTnLst>
-                                </p:cTn>
-                              </p:par>
-                              <p:par>
-                                <p:cTn id="8" presetID="10" presetClass="exit" presetSubtype="0" fill="hold" nodeType="withEffect">
-                                  <p:stCondLst>
-                                    <p:cond delay="0"/>
-                                  </p:stCondLst>
-                                  <p:childTnLst>
-                                    <p:animEffect transition="out" filter="fade">
-                                      <p:cBhvr>
-                                        <p:cTn id="9" dur="500"/>
-                                        <p:tgtEl>
-                                          <p:spTgt spid="3">
-                                            <p:txEl>
-                                              <p:pRg st="1" end="1"/>
-                                            </p:txEl>
-                                          </p:spTgt>
-                                        </p:tgtEl>
-                                      </p:cBhvr>
-                                    </p:animEffect>
-                                    <p:set>
-                                      <p:cBhvr>
-                                        <p:cTn id="10" dur="1" fill="hold">
-                                          <p:stCondLst>
-                                            <p:cond delay="499"/>
-                                          </p:stCondLst>
-                                        </p:cTn>
-                                        <p:tgtEl>
-                                          <p:spTgt spid="3">
-                                            <p:txEl>
-                                              <p:pRg st="1" end="1"/>
-                                            </p:txEl>
-                                          </p:spTgt>
-                                        </p:tgtEl>
-                                        <p:attrNameLst>
-                                          <p:attrName>style.visibility</p:attrName>
-                                        </p:attrNameLst>
-                                      </p:cBhvr>
-                                      <p:to>
-                                        <p:strVal val="hidden"/>
-                                      </p:to>
-                                    </p:set>
-                                  </p:childTnLst>
-                                </p:cTn>
-                              </p:par>
-                              <p:par>
-                                <p:cTn id="11" presetID="10" presetClass="exit" presetSubtype="0" fill="hold" nodeType="withEffect">
-                                  <p:stCondLst>
-                                    <p:cond delay="0"/>
-                                  </p:stCondLst>
-                                  <p:childTnLst>
-                                    <p:animEffect transition="out" filter="fade">
-                                      <p:cBhvr>
-                                        <p:cTn id="12" dur="500"/>
-                                        <p:tgtEl>
-                                          <p:spTgt spid="3">
-                                            <p:txEl>
-                                              <p:pRg st="2" end="2"/>
-                                            </p:txEl>
-                                          </p:spTgt>
-                                        </p:tgtEl>
-                                      </p:cBhvr>
-                                    </p:animEffect>
-                                    <p:set>
-                                      <p:cBhvr>
-                                        <p:cTn id="13" dur="1" fill="hold">
-                                          <p:stCondLst>
-                                            <p:cond delay="499"/>
-                                          </p:stCondLst>
-                                        </p:cTn>
-                                        <p:tgtEl>
-                                          <p:spTgt spid="3">
-                                            <p:txEl>
-                                              <p:pRg st="2" end="2"/>
-                                            </p:txEl>
-                                          </p:spTgt>
-                                        </p:tgtEl>
-                                        <p:attrNameLst>
-                                          <p:attrName>style.visibility</p:attrName>
-                                        </p:attrNameLst>
-                                      </p:cBhvr>
-                                      <p:to>
-                                        <p:strVal val="hidden"/>
-                                      </p:to>
-                                    </p:set>
-                                  </p:childTnLst>
-                                </p:cTn>
-                              </p:par>
-                              <p:par>
-                                <p:cTn id="14" presetID="10" presetClass="exit" presetSubtype="0" fill="hold" nodeType="withEffect">
-                                  <p:stCondLst>
-                                    <p:cond delay="0"/>
-                                  </p:stCondLst>
-                                  <p:childTnLst>
-                                    <p:animEffect transition="out" filter="fade">
-                                      <p:cBhvr>
-                                        <p:cTn id="15" dur="500"/>
-                                        <p:tgtEl>
-                                          <p:spTgt spid="3">
-                                            <p:txEl>
-                                              <p:pRg st="3" end="3"/>
-                                            </p:txEl>
-                                          </p:spTgt>
-                                        </p:tgtEl>
-                                      </p:cBhvr>
-                                    </p:animEffect>
-                                    <p:set>
-                                      <p:cBhvr>
-                                        <p:cTn id="16" dur="1" fill="hold">
-                                          <p:stCondLst>
-                                            <p:cond delay="499"/>
-                                          </p:stCondLst>
-                                        </p:cTn>
-                                        <p:tgtEl>
-                                          <p:spTgt spid="3">
-                                            <p:txEl>
-                                              <p:pRg st="3" end="3"/>
-                                            </p:txEl>
-                                          </p:spTgt>
-                                        </p:tgtEl>
-                                        <p:attrNameLst>
-                                          <p:attrName>style.visibility</p:attrName>
-                                        </p:attrNameLst>
-                                      </p:cBhvr>
-                                      <p:to>
-                                        <p:strVal val="hidden"/>
-                                      </p:to>
-                                    </p:set>
-                                  </p:childTnLst>
-                                </p:cTn>
-                              </p:par>
-                              <p:par>
-                                <p:cTn id="17" presetID="10" presetClass="entr" presetSubtype="0" fill="hold" grpId="0" nodeType="withEffect">
-                                  <p:stCondLst>
-                                    <p:cond delay="0"/>
-                                  </p:stCondLst>
-                                  <p:childTnLst>
-                                    <p:set>
-                                      <p:cBhvr>
-                                        <p:cTn id="18" dur="1" fill="hold">
-                                          <p:stCondLst>
-                                            <p:cond delay="0"/>
-                                          </p:stCondLst>
-                                        </p:cTn>
-                                        <p:tgtEl>
-                                          <p:spTgt spid="9"/>
-                                        </p:tgtEl>
-                                        <p:attrNameLst>
-                                          <p:attrName>style.visibility</p:attrName>
-                                        </p:attrNameLst>
-                                      </p:cBhvr>
-                                      <p:to>
-                                        <p:strVal val="visible"/>
-                                      </p:to>
-                                    </p:set>
-                                    <p:animEffect transition="in" filter="fade">
-                                      <p:cBhvr>
-                                        <p:cTn id="19" dur="500"/>
-                                        <p:tgtEl>
-                                          <p:spTgt spid="9"/>
-                                        </p:tgtEl>
-                                      </p:cBhvr>
-                                    </p:animEffect>
-                                  </p:childTnLst>
-                                </p:cTn>
-                              </p:par>
-                            </p:childTnLst>
-                          </p:cTn>
-                        </p:par>
-                      </p:childTnLst>
-                    </p:cTn>
-                  </p:par>
-                </p:childTnLst>
-              </p:cTn>
-              <p:prevCondLst>
-                <p:cond evt="onPrev" delay="0">
-                  <p:tgtEl>
-                    <p:sldTgt/>
-                  </p:tgtEl>
-                </p:cond>
-              </p:prevCondLst>
-              <p:nextCondLst>
-                <p:cond evt="onNext" delay="0">
-                  <p:tgtEl>
-                    <p:sldTgt/>
-                  </p:tgtEl>
-                </p:cond>
-              </p:nextCondLst>
-            </p:seq>
-          </p:childTnLst>
-        </p:cTn>
-      </p:par>
-    </p:tnLst>
-    <p:bldLst>
-      <p:bldP spid="9" grpId="0"/>
-    </p:bldLst>
-  </p:timing>
+</p:sld>
+</file>
+
+<file path=ppt/slides/slide20.xml><?xml version="1.0" encoding="utf-8"?>
+<p:sld xmlns:a="http://schemas.openxmlformats.org/drawingml/2006/main" xmlns:r="http://schemas.openxmlformats.org/officeDocument/2006/relationships" xmlns:p="http://schemas.openxmlformats.org/presentationml/2006/main">
+  <p:cSld>
+    <p:spTree>
+      <p:nvGrpSpPr>
+        <p:cNvPr id="1" name=""/>
+        <p:cNvGrpSpPr/>
+        <p:nvPr/>
+      </p:nvGrpSpPr>
+      <p:grpSpPr>
+        <a:xfrm>
+          <a:off x="0" y="0"/>
+          <a:ext cx="0" cy="0"/>
+          <a:chOff x="0" y="0"/>
+          <a:chExt cx="0" cy="0"/>
+        </a:xfrm>
+      </p:grpSpPr>
+      <p:sp>
+        <p:nvSpPr>
+          <p:cNvPr id="3" name="Content Placeholder 2">
+            <a:extLst>
+              <a:ext uri="{FF2B5EF4-FFF2-40B4-BE49-F238E27FC236}">
+                <a16:creationId xmlns:a16="http://schemas.microsoft.com/office/drawing/2014/main" id="{61DC47D5-EC06-36E6-5D6C-07CE82108FC4}"/>
+              </a:ext>
+            </a:extLst>
+          </p:cNvPr>
+          <p:cNvSpPr>
+            <a:spLocks noGrp="1"/>
+          </p:cNvSpPr>
+          <p:nvPr>
+            <p:ph idx="4294967295"/>
+          </p:nvPr>
+        </p:nvSpPr>
+        <p:spPr>
+          <a:xfrm>
+            <a:off x="605642" y="1184359"/>
+            <a:ext cx="10515600" cy="4351338"/>
+          </a:xfrm>
+        </p:spPr>
+        <p:txBody>
+          <a:bodyPr>
+            <a:normAutofit lnSpcReduction="10000"/>
+          </a:bodyPr>
+          <a:lstStyle/>
+          <a:p>
+            <a:r>
+              <a:rPr lang="en-US" sz="1700" b="0" i="0" u="none" strike="noStrike" baseline="0" dirty="0">
+                <a:solidFill>
+                  <a:srgbClr val="000000"/>
+                </a:solidFill>
+                <a:latin typeface="+mj-lt"/>
+              </a:rPr>
+              <a:t>Nicholson, K.L., Matthew J. Warren, Camille </a:t>
+            </a:r>
+            <a:r>
+              <a:rPr lang="en-US" sz="1700" b="0" i="0" u="none" strike="noStrike" baseline="0" dirty="0" err="1">
+                <a:solidFill>
+                  <a:srgbClr val="000000"/>
+                </a:solidFill>
+                <a:latin typeface="+mj-lt"/>
+              </a:rPr>
+              <a:t>Rostan</a:t>
+            </a:r>
+            <a:r>
+              <a:rPr lang="en-US" sz="1700" b="0" i="0" u="none" strike="noStrike" baseline="0" dirty="0">
+                <a:solidFill>
+                  <a:srgbClr val="000000"/>
+                </a:solidFill>
+                <a:latin typeface="+mj-lt"/>
+              </a:rPr>
+              <a:t>, Johan </a:t>
+            </a:r>
+            <a:r>
+              <a:rPr lang="en-US" sz="1700" b="0" i="0" u="none" strike="noStrike" baseline="0" dirty="0" err="1">
+                <a:solidFill>
+                  <a:srgbClr val="000000"/>
+                </a:solidFill>
+                <a:latin typeface="+mj-lt"/>
+              </a:rPr>
+              <a:t>Månsson</a:t>
+            </a:r>
+            <a:r>
+              <a:rPr lang="en-US" sz="1700" b="0" i="0" u="none" strike="noStrike" baseline="0" dirty="0">
+                <a:solidFill>
+                  <a:srgbClr val="000000"/>
+                </a:solidFill>
+                <a:latin typeface="+mj-lt"/>
+              </a:rPr>
+              <a:t>, Thomas F. </a:t>
+            </a:r>
+            <a:r>
+              <a:rPr lang="en-US" sz="1700" b="0" i="0" u="none" strike="noStrike" baseline="0" dirty="0" err="1">
+                <a:solidFill>
+                  <a:srgbClr val="000000"/>
+                </a:solidFill>
+                <a:latin typeface="+mj-lt"/>
+              </a:rPr>
+              <a:t>Paragi</a:t>
+            </a:r>
+            <a:r>
+              <a:rPr lang="en-US" sz="1700" b="0" i="0" u="none" strike="noStrike" baseline="0" dirty="0">
+                <a:solidFill>
+                  <a:srgbClr val="000000"/>
+                </a:solidFill>
+                <a:latin typeface="+mj-lt"/>
+              </a:rPr>
+              <a:t>, </a:t>
+            </a:r>
+            <a:r>
+              <a:rPr lang="en-US" sz="1700" b="0" i="0" u="none" strike="noStrike" baseline="0" dirty="0" err="1">
+                <a:solidFill>
+                  <a:srgbClr val="000000"/>
+                </a:solidFill>
+                <a:latin typeface="+mj-lt"/>
+              </a:rPr>
+              <a:t>HåkanSand</a:t>
+            </a:r>
+            <a:r>
+              <a:rPr lang="en-US" sz="1700" b="0" i="0" u="none" strike="noStrike" baseline="0" dirty="0">
+                <a:solidFill>
+                  <a:srgbClr val="000000"/>
+                </a:solidFill>
+                <a:latin typeface="+mj-lt"/>
+              </a:rPr>
+              <a:t>. 2019. Using fine-scale movement patterns to infer ungulate parturition. Ecological Indicators 101: 22-30. </a:t>
+            </a:r>
+            <a:r>
+              <a:rPr lang="en-US" sz="1700" b="0" i="0" u="none" strike="noStrike" baseline="0" dirty="0">
+                <a:solidFill>
+                  <a:srgbClr val="0462C1"/>
+                </a:solidFill>
+                <a:latin typeface="+mj-lt"/>
+              </a:rPr>
+              <a:t>https://doi.org/10.1016/j.ecolind.2019.01.004</a:t>
+            </a:r>
+            <a:r>
+              <a:rPr lang="en-US" sz="1700" b="0" i="0" u="none" strike="noStrike" baseline="0" dirty="0">
+                <a:solidFill>
+                  <a:srgbClr val="000000"/>
+                </a:solidFill>
+                <a:latin typeface="+mj-lt"/>
+              </a:rPr>
+              <a:t>. </a:t>
+            </a:r>
+          </a:p>
+          <a:p>
+            <a:r>
+              <a:rPr lang="en-US" sz="1700" b="0" i="0" u="none" strike="noStrike" baseline="0" dirty="0" err="1">
+                <a:solidFill>
+                  <a:srgbClr val="000000"/>
+                </a:solidFill>
+                <a:latin typeface="+mj-lt"/>
+              </a:rPr>
+              <a:t>Patin</a:t>
+            </a:r>
+            <a:r>
+              <a:rPr lang="en-US" sz="1700" b="0" i="0" u="none" strike="noStrike" baseline="0" dirty="0">
+                <a:solidFill>
+                  <a:srgbClr val="000000"/>
+                </a:solidFill>
+                <a:latin typeface="+mj-lt"/>
+              </a:rPr>
+              <a:t>, R, Etienne, M-P, </a:t>
+            </a:r>
+            <a:r>
+              <a:rPr lang="en-US" sz="1700" b="0" i="0" u="none" strike="noStrike" baseline="0" dirty="0" err="1">
+                <a:solidFill>
+                  <a:srgbClr val="000000"/>
+                </a:solidFill>
+                <a:latin typeface="+mj-lt"/>
+              </a:rPr>
+              <a:t>Lebarbier</a:t>
+            </a:r>
+            <a:r>
+              <a:rPr lang="en-US" sz="1700" b="0" i="0" u="none" strike="noStrike" baseline="0" dirty="0">
+                <a:solidFill>
+                  <a:srgbClr val="000000"/>
+                </a:solidFill>
+                <a:latin typeface="+mj-lt"/>
+              </a:rPr>
+              <a:t>, E, Chamaillé-Jammes, S, Benhamou, S. Identifying stationary phases in multivariate time series for highlighting </a:t>
+            </a:r>
+            <a:r>
+              <a:rPr lang="en-US" sz="1700" b="0" i="0" u="none" strike="noStrike" baseline="0" dirty="0" err="1">
+                <a:solidFill>
+                  <a:srgbClr val="000000"/>
+                </a:solidFill>
+                <a:latin typeface="+mj-lt"/>
+              </a:rPr>
+              <a:t>behavioural</a:t>
+            </a:r>
+            <a:r>
+              <a:rPr lang="en-US" sz="1700" b="0" i="0" u="none" strike="noStrike" baseline="0" dirty="0">
+                <a:solidFill>
+                  <a:srgbClr val="000000"/>
+                </a:solidFill>
+                <a:latin typeface="+mj-lt"/>
+              </a:rPr>
+              <a:t> modes and home range settlements. </a:t>
+            </a:r>
+            <a:r>
+              <a:rPr lang="en-US" sz="1700" b="0" i="1" u="none" strike="noStrike" baseline="0" dirty="0">
+                <a:solidFill>
+                  <a:srgbClr val="000000"/>
+                </a:solidFill>
+                <a:latin typeface="+mj-lt"/>
+              </a:rPr>
+              <a:t>J Anim Ecol</a:t>
+            </a:r>
+            <a:r>
+              <a:rPr lang="en-US" sz="1700" b="0" i="0" u="none" strike="noStrike" baseline="0" dirty="0">
+                <a:solidFill>
+                  <a:srgbClr val="000000"/>
+                </a:solidFill>
+                <a:latin typeface="+mj-lt"/>
+              </a:rPr>
+              <a:t>. 2020; 89: 44–56. </a:t>
+            </a:r>
+          </a:p>
+          <a:p>
+            <a:r>
+              <a:rPr lang="en-US" sz="1700" b="0" i="0" u="none" strike="noStrike" baseline="0" dirty="0" err="1">
+                <a:solidFill>
+                  <a:srgbClr val="000000"/>
+                </a:solidFill>
+                <a:latin typeface="+mj-lt"/>
+              </a:rPr>
+              <a:t>Pohle</a:t>
+            </a:r>
+            <a:r>
+              <a:rPr lang="en-US" sz="1700" b="0" i="0" u="none" strike="noStrike" baseline="0" dirty="0">
+                <a:solidFill>
+                  <a:srgbClr val="000000"/>
+                </a:solidFill>
+                <a:latin typeface="+mj-lt"/>
+              </a:rPr>
+              <a:t>, J., </a:t>
+            </a:r>
+            <a:r>
+              <a:rPr lang="en-US" sz="1700" b="0" i="0" u="none" strike="noStrike" baseline="0" dirty="0" err="1">
+                <a:solidFill>
+                  <a:srgbClr val="000000"/>
+                </a:solidFill>
+                <a:latin typeface="+mj-lt"/>
+              </a:rPr>
+              <a:t>Langrock</a:t>
+            </a:r>
+            <a:r>
+              <a:rPr lang="en-US" sz="1700" b="0" i="0" u="none" strike="noStrike" baseline="0" dirty="0">
+                <a:solidFill>
+                  <a:srgbClr val="000000"/>
+                </a:solidFill>
+                <a:latin typeface="+mj-lt"/>
+              </a:rPr>
+              <a:t>, R., van </a:t>
+            </a:r>
+            <a:r>
+              <a:rPr lang="en-US" sz="1700" b="0" i="0" u="none" strike="noStrike" baseline="0" dirty="0" err="1">
+                <a:solidFill>
+                  <a:srgbClr val="000000"/>
+                </a:solidFill>
+                <a:latin typeface="+mj-lt"/>
+              </a:rPr>
+              <a:t>Beest</a:t>
+            </a:r>
+            <a:r>
+              <a:rPr lang="en-US" sz="1700" b="0" i="0" u="none" strike="noStrike" baseline="0" dirty="0">
+                <a:solidFill>
+                  <a:srgbClr val="000000"/>
+                </a:solidFill>
+                <a:latin typeface="+mj-lt"/>
+              </a:rPr>
+              <a:t>, F.M. et al. Selecting the Number of States in Hidden Markov Models: Pragmatic Solutions Illustrated Using Animal Movement. JABES 22, 270–293 (2017). </a:t>
+            </a:r>
+            <a:r>
+              <a:rPr lang="en-US" sz="1700" b="0" i="0" u="none" strike="noStrike" baseline="0" dirty="0">
+                <a:solidFill>
+                  <a:srgbClr val="0462C1"/>
+                </a:solidFill>
+                <a:latin typeface="+mj-lt"/>
+              </a:rPr>
+              <a:t>https://doi.org/10.1007/s13253-017-0283-8</a:t>
+            </a:r>
+          </a:p>
+          <a:p>
+            <a:r>
+              <a:rPr lang="en-US" sz="1700" b="0" i="0" u="none" strike="noStrike" baseline="0" dirty="0">
+                <a:solidFill>
+                  <a:srgbClr val="000000"/>
+                </a:solidFill>
+                <a:latin typeface="+mj-lt"/>
+              </a:rPr>
+              <a:t>Postlethwaite CM, Dennis TE (2013) Effects of Temporal Resolution on an Inferential Model of Animal Movement. </a:t>
+            </a:r>
+            <a:r>
+              <a:rPr lang="en-US" sz="1700" b="0" i="0" u="none" strike="noStrike" baseline="0" dirty="0" err="1">
+                <a:solidFill>
+                  <a:srgbClr val="000000"/>
+                </a:solidFill>
+                <a:latin typeface="+mj-lt"/>
+              </a:rPr>
+              <a:t>PLoS</a:t>
+            </a:r>
+            <a:r>
+              <a:rPr lang="en-US" sz="1700" b="0" i="0" u="none" strike="noStrike" baseline="0" dirty="0">
+                <a:solidFill>
+                  <a:srgbClr val="000000"/>
+                </a:solidFill>
+                <a:latin typeface="+mj-lt"/>
+              </a:rPr>
+              <a:t> ONE 8(5): e57640. </a:t>
+            </a:r>
+          </a:p>
+          <a:p>
+            <a:r>
+              <a:rPr lang="en-US" sz="1700" b="0" i="0" u="none" strike="noStrike" baseline="0" dirty="0">
+                <a:solidFill>
+                  <a:srgbClr val="000000"/>
+                </a:solidFill>
+                <a:latin typeface="+mj-lt"/>
+              </a:rPr>
+              <a:t>Towner, A.V., Leos-Barajas, V., Langrock, R., Schick, R.S., Smale, M.J., </a:t>
+            </a:r>
+            <a:r>
+              <a:rPr lang="en-US" sz="1700" b="0" i="0" u="none" strike="noStrike" baseline="0" dirty="0" err="1">
+                <a:solidFill>
+                  <a:srgbClr val="000000"/>
+                </a:solidFill>
+                <a:latin typeface="+mj-lt"/>
+              </a:rPr>
+              <a:t>Kaschke</a:t>
+            </a:r>
+            <a:r>
+              <a:rPr lang="en-US" sz="1700" b="0" i="0" u="none" strike="noStrike" baseline="0" dirty="0">
+                <a:solidFill>
+                  <a:srgbClr val="000000"/>
+                </a:solidFill>
+                <a:latin typeface="+mj-lt"/>
+              </a:rPr>
+              <a:t>, T., Jewell, O.J.D. and </a:t>
+            </a:r>
+            <a:r>
+              <a:rPr lang="en-US" sz="1700" b="0" i="0" u="none" strike="noStrike" baseline="0" dirty="0" err="1">
+                <a:solidFill>
+                  <a:srgbClr val="000000"/>
+                </a:solidFill>
+                <a:latin typeface="+mj-lt"/>
+              </a:rPr>
+              <a:t>Papastamatiou</a:t>
+            </a:r>
+            <a:r>
+              <a:rPr lang="en-US" sz="1700" b="0" i="0" u="none" strike="noStrike" baseline="0" dirty="0">
+                <a:solidFill>
+                  <a:srgbClr val="000000"/>
+                </a:solidFill>
+                <a:latin typeface="+mj-lt"/>
+              </a:rPr>
+              <a:t>, Y.P. (2016), Sex-specific and individual preferences for hunting strategies in white sharks. </a:t>
+            </a:r>
+            <a:r>
+              <a:rPr lang="en-US" sz="1700" b="0" i="0" u="none" strike="noStrike" baseline="0" dirty="0" err="1">
+                <a:solidFill>
+                  <a:srgbClr val="000000"/>
+                </a:solidFill>
+                <a:latin typeface="+mj-lt"/>
+              </a:rPr>
+              <a:t>Funct</a:t>
+            </a:r>
+            <a:r>
+              <a:rPr lang="en-US" sz="1700" b="0" i="0" u="none" strike="noStrike" baseline="0" dirty="0">
+                <a:solidFill>
+                  <a:srgbClr val="000000"/>
+                </a:solidFill>
+                <a:latin typeface="+mj-lt"/>
+              </a:rPr>
+              <a:t> </a:t>
+            </a:r>
+            <a:r>
+              <a:rPr lang="en-US" sz="1700" b="0" i="0" u="none" strike="noStrike" baseline="0" dirty="0" err="1">
+                <a:solidFill>
+                  <a:srgbClr val="000000"/>
+                </a:solidFill>
+                <a:latin typeface="+mj-lt"/>
+              </a:rPr>
+              <a:t>Ecol</a:t>
+            </a:r>
+            <a:r>
+              <a:rPr lang="en-US" sz="1700" b="0" i="0" u="none" strike="noStrike" baseline="0" dirty="0">
+                <a:solidFill>
+                  <a:srgbClr val="000000"/>
+                </a:solidFill>
+                <a:latin typeface="+mj-lt"/>
+              </a:rPr>
+              <a:t>, 30: 1397-1407. </a:t>
+            </a:r>
+          </a:p>
+          <a:p>
+            <a:r>
+              <a:rPr lang="en-US" sz="1700" b="0" i="0" u="none" strike="noStrike" baseline="0" dirty="0">
+                <a:solidFill>
+                  <a:srgbClr val="000000"/>
+                </a:solidFill>
+                <a:latin typeface="+mj-lt"/>
+              </a:rPr>
+              <a:t>Zucchini, W., MacDonald, I. L., and </a:t>
+            </a:r>
+            <a:r>
+              <a:rPr lang="en-US" sz="1700" b="0" i="0" u="none" strike="noStrike" baseline="0" dirty="0" err="1">
+                <a:solidFill>
+                  <a:srgbClr val="000000"/>
+                </a:solidFill>
+                <a:latin typeface="+mj-lt"/>
+              </a:rPr>
+              <a:t>Langrock</a:t>
+            </a:r>
+            <a:r>
+              <a:rPr lang="en-US" sz="1700" b="0" i="0" u="none" strike="noStrike" baseline="0" dirty="0">
+                <a:solidFill>
+                  <a:srgbClr val="000000"/>
+                </a:solidFill>
+                <a:latin typeface="+mj-lt"/>
+              </a:rPr>
+              <a:t>, R. (2016). Hidden Markov models for time series: an introduction using R, Second Edition. Chapman and Hall/CRC.</a:t>
+            </a:r>
+          </a:p>
+          <a:p>
+            <a:endParaRPr lang="en-US" dirty="0"/>
+          </a:p>
+        </p:txBody>
+      </p:sp>
+      <p:sp>
+        <p:nvSpPr>
+          <p:cNvPr id="4" name="Title 1">
+            <a:extLst>
+              <a:ext uri="{FF2B5EF4-FFF2-40B4-BE49-F238E27FC236}">
+                <a16:creationId xmlns:a16="http://schemas.microsoft.com/office/drawing/2014/main" id="{1C11FC36-095B-3BF9-DE85-1789FC03B8C2}"/>
+              </a:ext>
+            </a:extLst>
+          </p:cNvPr>
+          <p:cNvSpPr txBox="1">
+            <a:spLocks/>
+          </p:cNvSpPr>
+          <p:nvPr/>
+        </p:nvSpPr>
+        <p:spPr>
+          <a:xfrm>
+            <a:off x="496675" y="322824"/>
+            <a:ext cx="10515600" cy="1325563"/>
+          </a:xfrm>
+          <a:prstGeom prst="rect">
+            <a:avLst/>
+          </a:prstGeom>
+        </p:spPr>
+        <p:txBody>
+          <a:bodyPr vert="horz" lIns="91440" tIns="45720" rIns="91440" bIns="45720" rtlCol="0" anchor="ctr">
+            <a:normAutofit/>
+          </a:bodyPr>
+          <a:lstStyle>
+            <a:lvl1pPr algn="l" defTabSz="914400" rtl="0" eaLnBrk="1" latinLnBrk="0" hangingPunct="1">
+              <a:lnSpc>
+                <a:spcPct val="90000"/>
+              </a:lnSpc>
+              <a:spcBef>
+                <a:spcPct val="0"/>
+              </a:spcBef>
+              <a:buNone/>
+              <a:defRPr sz="4400" kern="1200">
+                <a:solidFill>
+                  <a:schemeClr val="tx1"/>
+                </a:solidFill>
+                <a:latin typeface="+mj-lt"/>
+                <a:ea typeface="+mj-ea"/>
+                <a:cs typeface="+mj-cs"/>
+              </a:defRPr>
+            </a:lvl1pPr>
+          </a:lstStyle>
+          <a:p>
+            <a:r>
+              <a:rPr lang="en-US" sz="3200" b="1" dirty="0">
+                <a:solidFill>
+                  <a:srgbClr val="000000"/>
+                </a:solidFill>
+              </a:rPr>
+              <a:t>References (Cont’d)</a:t>
+            </a:r>
+            <a:br>
+              <a:rPr lang="en-US" sz="3200" b="1" dirty="0">
+                <a:solidFill>
+                  <a:srgbClr val="000000"/>
+                </a:solidFill>
+              </a:rPr>
+            </a:br>
+            <a:endParaRPr lang="en-US" sz="3200" b="1" dirty="0"/>
+          </a:p>
+        </p:txBody>
+      </p:sp>
+    </p:spTree>
+    <p:extLst>
+      <p:ext uri="{BB962C8B-B14F-4D97-AF65-F5344CB8AC3E}">
+        <p14:creationId xmlns:p14="http://schemas.microsoft.com/office/powerpoint/2010/main" val="1549252542"/>
+      </p:ext>
+    </p:extLst>
+  </p:cSld>
+  <p:clrMapOvr>
+    <a:masterClrMapping/>
+  </p:clrMapOvr>
 </p:sld>
 </file>
 
@@ -15413,6 +14887,41 @@
                                   </p:childTnLst>
                                 </p:cTn>
                               </p:par>
+                              <p:par>
+                                <p:cTn id="8" presetID="10" presetClass="entr" presetSubtype="0" fill="hold" grpId="0" nodeType="withEffect">
+                                  <p:stCondLst>
+                                    <p:cond delay="0"/>
+                                  </p:stCondLst>
+                                  <p:childTnLst>
+                                    <p:set>
+                                      <p:cBhvr>
+                                        <p:cTn id="9" dur="1" fill="hold">
+                                          <p:stCondLst>
+                                            <p:cond delay="0"/>
+                                          </p:stCondLst>
+                                        </p:cTn>
+                                        <p:tgtEl>
+                                          <p:spTgt spid="2"/>
+                                        </p:tgtEl>
+                                        <p:attrNameLst>
+                                          <p:attrName>style.visibility</p:attrName>
+                                        </p:attrNameLst>
+                                      </p:cBhvr>
+                                      <p:to>
+                                        <p:strVal val="visible"/>
+                                      </p:to>
+                                    </p:set>
+                                    <p:animEffect transition="in" filter="fade">
+                                      <p:cBhvr>
+                                        <p:cTn id="10" dur="500"/>
+                                        <p:tgtEl>
+                                          <p:spTgt spid="2"/>
+                                        </p:tgtEl>
+                                      </p:cBhvr>
+                                    </p:animEffect>
+                                  </p:childTnLst>
+                                </p:cTn>
+                              </p:par>
                             </p:childTnLst>
                           </p:cTn>
                         </p:par>
@@ -15420,26 +14929,26 @@
                     </p:cTn>
                   </p:par>
                   <p:par>
-                    <p:cTn id="8" fill="hold">
+                    <p:cTn id="11" fill="hold">
                       <p:stCondLst>
                         <p:cond delay="indefinite"/>
                       </p:stCondLst>
                       <p:childTnLst>
                         <p:par>
-                          <p:cTn id="9" fill="hold">
+                          <p:cTn id="12" fill="hold">
                             <p:stCondLst>
                               <p:cond delay="0"/>
                             </p:stCondLst>
                             <p:childTnLst>
                               <p:par>
-                                <p:cTn id="10" presetID="10" presetClass="entr" presetSubtype="0" fill="hold" grpId="0" nodeType="clickEffect">
+                                <p:cTn id="13" presetID="10" presetClass="entr" presetSubtype="0" fill="hold" grpId="0" nodeType="clickEffect">
                                   <p:stCondLst>
                                     <p:cond delay="0"/>
                                   </p:stCondLst>
                                   <p:childTnLst>
                                     <p:set>
                                       <p:cBhvr>
-                                        <p:cTn id="11" dur="1" fill="hold">
+                                        <p:cTn id="14" dur="1" fill="hold">
                                           <p:stCondLst>
                                             <p:cond delay="0"/>
                                           </p:stCondLst>
@@ -15457,9 +14966,44 @@
                                     </p:set>
                                     <p:animEffect transition="in" filter="fade">
                                       <p:cBhvr>
-                                        <p:cTn id="12" dur="500"/>
+                                        <p:cTn id="15" dur="500"/>
                                         <p:tgtEl>
                                           <p:spTgt spid="13"/>
+                                        </p:tgtEl>
+                                      </p:cBhvr>
+                                    </p:animEffect>
+                                  </p:childTnLst>
+                                </p:cTn>
+                              </p:par>
+                              <p:par>
+                                <p:cTn id="16" presetID="10" presetClass="entr" presetSubtype="0" fill="hold" grpId="0" nodeType="withEffect">
+                                  <p:stCondLst>
+                                    <p:cond delay="0"/>
+                                  </p:stCondLst>
+                                  <p:childTnLst>
+                                    <p:set>
+                                      <p:cBhvr>
+                                        <p:cTn id="17" dur="1" fill="hold">
+                                          <p:stCondLst>
+                                            <p:cond delay="0"/>
+                                          </p:stCondLst>
+                                        </p:cTn>
+                                        <p:tgtEl>
+                                          <p:spTgt spid="11"/>
+                                        </p:tgtEl>
+                                        <p:attrNameLst>
+                                          <p:attrName>style.visibility</p:attrName>
+                                        </p:attrNameLst>
+                                      </p:cBhvr>
+                                      <p:to>
+                                        <p:strVal val="visible"/>
+                                      </p:to>
+                                    </p:set>
+                                    <p:animEffect transition="in" filter="fade">
+                                      <p:cBhvr>
+                                        <p:cTn id="18" dur="500"/>
+                                        <p:tgtEl>
+                                          <p:spTgt spid="11"/>
                                         </p:tgtEl>
                                       </p:cBhvr>
                                     </p:animEffect>
@@ -15473,26 +15017,26 @@
                     </p:cTn>
                   </p:par>
                   <p:par>
-                    <p:cTn id="13" fill="hold">
+                    <p:cTn id="19" fill="hold">
                       <p:stCondLst>
                         <p:cond delay="indefinite"/>
                       </p:stCondLst>
                       <p:childTnLst>
                         <p:par>
-                          <p:cTn id="14" fill="hold">
+                          <p:cTn id="20" fill="hold">
                             <p:stCondLst>
                               <p:cond delay="0"/>
                             </p:stCondLst>
                             <p:childTnLst>
                               <p:par>
-                                <p:cTn id="15" presetID="10" presetClass="entr" presetSubtype="0" fill="hold" grpId="0" nodeType="clickEffect">
+                                <p:cTn id="21" presetID="10" presetClass="entr" presetSubtype="0" fill="hold" grpId="0" nodeType="clickEffect">
                                   <p:stCondLst>
                                     <p:cond delay="0"/>
                                   </p:stCondLst>
                                   <p:childTnLst>
                                     <p:set>
                                       <p:cBhvr>
-                                        <p:cTn id="16" dur="1" fill="hold">
+                                        <p:cTn id="22" dur="1" fill="hold">
                                           <p:stCondLst>
                                             <p:cond delay="0"/>
                                           </p:stCondLst>
@@ -15510,7 +15054,7 @@
                                     </p:set>
                                     <p:animEffect transition="in" filter="fade">
                                       <p:cBhvr>
-                                        <p:cTn id="17" dur="500"/>
+                                        <p:cTn id="23" dur="500"/>
                                         <p:tgtEl>
                                           <p:spTgt spid="14"/>
                                         </p:tgtEl>
@@ -15519,139 +15063,15 @@
                                   </p:childTnLst>
                                 </p:cTn>
                               </p:par>
-                            </p:childTnLst>
-                          </p:cTn>
-                        </p:par>
-                      </p:childTnLst>
-                    </p:cTn>
-                  </p:par>
-                  <p:par>
-                    <p:cTn id="18" fill="hold">
-                      <p:stCondLst>
-                        <p:cond delay="indefinite"/>
-                      </p:stCondLst>
-                      <p:childTnLst>
-                        <p:par>
-                          <p:cTn id="19" fill="hold">
-                            <p:stCondLst>
-                              <p:cond delay="0"/>
-                            </p:stCondLst>
-                            <p:childTnLst>
                               <p:par>
-                                <p:cTn id="20" presetID="10" presetClass="entr" presetSubtype="0" fill="hold" grpId="0" nodeType="clickEffect">
+                                <p:cTn id="24" presetID="10" presetClass="entr" presetSubtype="0" fill="hold" grpId="0" nodeType="withEffect">
                                   <p:stCondLst>
                                     <p:cond delay="0"/>
                                   </p:stCondLst>
                                   <p:childTnLst>
                                     <p:set>
                                       <p:cBhvr>
-                                        <p:cTn id="21" dur="1" fill="hold">
-                                          <p:stCondLst>
-                                            <p:cond delay="0"/>
-                                          </p:stCondLst>
-                                        </p:cTn>
-                                        <p:tgtEl>
-                                          <p:spTgt spid="2"/>
-                                        </p:tgtEl>
-                                        <p:attrNameLst>
-                                          <p:attrName>style.visibility</p:attrName>
-                                        </p:attrNameLst>
-                                      </p:cBhvr>
-                                      <p:to>
-                                        <p:strVal val="visible"/>
-                                      </p:to>
-                                    </p:set>
-                                    <p:animEffect transition="in" filter="fade">
-                                      <p:cBhvr>
-                                        <p:cTn id="22" dur="500"/>
-                                        <p:tgtEl>
-                                          <p:spTgt spid="2"/>
-                                        </p:tgtEl>
-                                      </p:cBhvr>
-                                    </p:animEffect>
-                                  </p:childTnLst>
-                                </p:cTn>
-                              </p:par>
-                            </p:childTnLst>
-                          </p:cTn>
-                        </p:par>
-                      </p:childTnLst>
-                    </p:cTn>
-                  </p:par>
-                  <p:par>
-                    <p:cTn id="23" fill="hold">
-                      <p:stCondLst>
-                        <p:cond delay="indefinite"/>
-                      </p:stCondLst>
-                      <p:childTnLst>
-                        <p:par>
-                          <p:cTn id="24" fill="hold">
-                            <p:stCondLst>
-                              <p:cond delay="0"/>
-                            </p:stCondLst>
-                            <p:childTnLst>
-                              <p:par>
-                                <p:cTn id="25" presetID="10" presetClass="entr" presetSubtype="0" fill="hold" grpId="0" nodeType="clickEffect">
-                                  <p:stCondLst>
-                                    <p:cond delay="0"/>
-                                  </p:stCondLst>
-                                  <p:childTnLst>
-                                    <p:set>
-                                      <p:cBhvr>
-                                        <p:cTn id="26" dur="1" fill="hold">
-                                          <p:stCondLst>
-                                            <p:cond delay="0"/>
-                                          </p:stCondLst>
-                                        </p:cTn>
-                                        <p:tgtEl>
-                                          <p:spTgt spid="11"/>
-                                        </p:tgtEl>
-                                        <p:attrNameLst>
-                                          <p:attrName>style.visibility</p:attrName>
-                                        </p:attrNameLst>
-                                      </p:cBhvr>
-                                      <p:to>
-                                        <p:strVal val="visible"/>
-                                      </p:to>
-                                    </p:set>
-                                    <p:animEffect transition="in" filter="fade">
-                                      <p:cBhvr>
-                                        <p:cTn id="27" dur="500"/>
-                                        <p:tgtEl>
-                                          <p:spTgt spid="11"/>
-                                        </p:tgtEl>
-                                      </p:cBhvr>
-                                    </p:animEffect>
-                                  </p:childTnLst>
-                                </p:cTn>
-                              </p:par>
-                            </p:childTnLst>
-                          </p:cTn>
-                        </p:par>
-                      </p:childTnLst>
-                    </p:cTn>
-                  </p:par>
-                  <p:par>
-                    <p:cTn id="28" fill="hold">
-                      <p:stCondLst>
-                        <p:cond delay="indefinite"/>
-                      </p:stCondLst>
-                      <p:childTnLst>
-                        <p:par>
-                          <p:cTn id="29" fill="hold">
-                            <p:stCondLst>
-                              <p:cond delay="0"/>
-                            </p:stCondLst>
-                            <p:childTnLst>
-                              <p:par>
-                                <p:cTn id="30" presetID="10" presetClass="entr" presetSubtype="0" fill="hold" grpId="0" nodeType="clickEffect">
-                                  <p:stCondLst>
-                                    <p:cond delay="0"/>
-                                  </p:stCondLst>
-                                  <p:childTnLst>
-                                    <p:set>
-                                      <p:cBhvr>
-                                        <p:cTn id="31" dur="1" fill="hold">
+                                        <p:cTn id="25" dur="1" fill="hold">
                                           <p:stCondLst>
                                             <p:cond delay="0"/>
                                           </p:stCondLst>
@@ -15669,7 +15089,7 @@
                                     </p:set>
                                     <p:animEffect transition="in" filter="fade">
                                       <p:cBhvr>
-                                        <p:cTn id="32" dur="500"/>
+                                        <p:cTn id="26" dur="500"/>
                                         <p:tgtEl>
                                           <p:spTgt spid="12"/>
                                         </p:tgtEl>
@@ -15914,280 +15334,6 @@
   <p:clrMapOvr>
     <a:masterClrMapping/>
   </p:clrMapOvr>
-  <p:timing>
-    <p:tnLst>
-      <p:par>
-        <p:cTn id="1" dur="indefinite" restart="never" nodeType="tmRoot">
-          <p:childTnLst>
-            <p:seq concurrent="1" nextAc="seek">
-              <p:cTn id="2" dur="indefinite" nodeType="mainSeq">
-                <p:childTnLst>
-                  <p:par>
-                    <p:cTn id="3" fill="hold">
-                      <p:stCondLst>
-                        <p:cond delay="indefinite"/>
-                      </p:stCondLst>
-                      <p:childTnLst>
-                        <p:par>
-                          <p:cTn id="4" fill="hold">
-                            <p:stCondLst>
-                              <p:cond delay="0"/>
-                            </p:stCondLst>
-                            <p:childTnLst>
-                              <p:par>
-                                <p:cTn id="5" presetID="10" presetClass="entr" presetSubtype="0" fill="hold" nodeType="clickEffect">
-                                  <p:stCondLst>
-                                    <p:cond delay="0"/>
-                                  </p:stCondLst>
-                                  <p:childTnLst>
-                                    <p:set>
-                                      <p:cBhvr>
-                                        <p:cTn id="6" dur="1" fill="hold">
-                                          <p:stCondLst>
-                                            <p:cond delay="0"/>
-                                          </p:stCondLst>
-                                        </p:cTn>
-                                        <p:tgtEl>
-                                          <p:spTgt spid="3">
-                                            <p:txEl>
-                                              <p:pRg st="0" end="0"/>
-                                            </p:txEl>
-                                          </p:spTgt>
-                                        </p:tgtEl>
-                                        <p:attrNameLst>
-                                          <p:attrName>style.visibility</p:attrName>
-                                        </p:attrNameLst>
-                                      </p:cBhvr>
-                                      <p:to>
-                                        <p:strVal val="visible"/>
-                                      </p:to>
-                                    </p:set>
-                                    <p:animEffect transition="in" filter="fade">
-                                      <p:cBhvr>
-                                        <p:cTn id="7" dur="500"/>
-                                        <p:tgtEl>
-                                          <p:spTgt spid="3">
-                                            <p:txEl>
-                                              <p:pRg st="0" end="0"/>
-                                            </p:txEl>
-                                          </p:spTgt>
-                                        </p:tgtEl>
-                                      </p:cBhvr>
-                                    </p:animEffect>
-                                  </p:childTnLst>
-                                </p:cTn>
-                              </p:par>
-                            </p:childTnLst>
-                          </p:cTn>
-                        </p:par>
-                      </p:childTnLst>
-                    </p:cTn>
-                  </p:par>
-                  <p:par>
-                    <p:cTn id="8" fill="hold">
-                      <p:stCondLst>
-                        <p:cond delay="indefinite"/>
-                      </p:stCondLst>
-                      <p:childTnLst>
-                        <p:par>
-                          <p:cTn id="9" fill="hold">
-                            <p:stCondLst>
-                              <p:cond delay="0"/>
-                            </p:stCondLst>
-                            <p:childTnLst>
-                              <p:par>
-                                <p:cTn id="10" presetID="10" presetClass="entr" presetSubtype="0" fill="hold" nodeType="clickEffect">
-                                  <p:stCondLst>
-                                    <p:cond delay="0"/>
-                                  </p:stCondLst>
-                                  <p:childTnLst>
-                                    <p:set>
-                                      <p:cBhvr>
-                                        <p:cTn id="11" dur="1" fill="hold">
-                                          <p:stCondLst>
-                                            <p:cond delay="0"/>
-                                          </p:stCondLst>
-                                        </p:cTn>
-                                        <p:tgtEl>
-                                          <p:spTgt spid="3">
-                                            <p:txEl>
-                                              <p:pRg st="2" end="2"/>
-                                            </p:txEl>
-                                          </p:spTgt>
-                                        </p:tgtEl>
-                                        <p:attrNameLst>
-                                          <p:attrName>style.visibility</p:attrName>
-                                        </p:attrNameLst>
-                                      </p:cBhvr>
-                                      <p:to>
-                                        <p:strVal val="visible"/>
-                                      </p:to>
-                                    </p:set>
-                                    <p:animEffect transition="in" filter="fade">
-                                      <p:cBhvr>
-                                        <p:cTn id="12" dur="500"/>
-                                        <p:tgtEl>
-                                          <p:spTgt spid="3">
-                                            <p:txEl>
-                                              <p:pRg st="2" end="2"/>
-                                            </p:txEl>
-                                          </p:spTgt>
-                                        </p:tgtEl>
-                                      </p:cBhvr>
-                                    </p:animEffect>
-                                  </p:childTnLst>
-                                </p:cTn>
-                              </p:par>
-                            </p:childTnLst>
-                          </p:cTn>
-                        </p:par>
-                      </p:childTnLst>
-                    </p:cTn>
-                  </p:par>
-                  <p:par>
-                    <p:cTn id="13" fill="hold">
-                      <p:stCondLst>
-                        <p:cond delay="indefinite"/>
-                      </p:stCondLst>
-                      <p:childTnLst>
-                        <p:par>
-                          <p:cTn id="14" fill="hold">
-                            <p:stCondLst>
-                              <p:cond delay="0"/>
-                            </p:stCondLst>
-                            <p:childTnLst>
-                              <p:par>
-                                <p:cTn id="15" presetID="10" presetClass="entr" presetSubtype="0" fill="hold" nodeType="clickEffect">
-                                  <p:stCondLst>
-                                    <p:cond delay="0"/>
-                                  </p:stCondLst>
-                                  <p:childTnLst>
-                                    <p:set>
-                                      <p:cBhvr>
-                                        <p:cTn id="16" dur="1" fill="hold">
-                                          <p:stCondLst>
-                                            <p:cond delay="0"/>
-                                          </p:stCondLst>
-                                        </p:cTn>
-                                        <p:tgtEl>
-                                          <p:spTgt spid="3">
-                                            <p:txEl>
-                                              <p:pRg st="3" end="3"/>
-                                            </p:txEl>
-                                          </p:spTgt>
-                                        </p:tgtEl>
-                                        <p:attrNameLst>
-                                          <p:attrName>style.visibility</p:attrName>
-                                        </p:attrNameLst>
-                                      </p:cBhvr>
-                                      <p:to>
-                                        <p:strVal val="visible"/>
-                                      </p:to>
-                                    </p:set>
-                                    <p:animEffect transition="in" filter="fade">
-                                      <p:cBhvr>
-                                        <p:cTn id="17" dur="500"/>
-                                        <p:tgtEl>
-                                          <p:spTgt spid="3">
-                                            <p:txEl>
-                                              <p:pRg st="3" end="3"/>
-                                            </p:txEl>
-                                          </p:spTgt>
-                                        </p:tgtEl>
-                                      </p:cBhvr>
-                                    </p:animEffect>
-                                  </p:childTnLst>
-                                </p:cTn>
-                              </p:par>
-                            </p:childTnLst>
-                          </p:cTn>
-                        </p:par>
-                      </p:childTnLst>
-                    </p:cTn>
-                  </p:par>
-                  <p:par>
-                    <p:cTn id="18" fill="hold">
-                      <p:stCondLst>
-                        <p:cond delay="indefinite"/>
-                      </p:stCondLst>
-                      <p:childTnLst>
-                        <p:par>
-                          <p:cTn id="19" fill="hold">
-                            <p:stCondLst>
-                              <p:cond delay="0"/>
-                            </p:stCondLst>
-                            <p:childTnLst>
-                              <p:par>
-                                <p:cTn id="20" presetID="10" presetClass="entr" presetSubtype="0" fill="hold" nodeType="clickEffect">
-                                  <p:stCondLst>
-                                    <p:cond delay="0"/>
-                                  </p:stCondLst>
-                                  <p:childTnLst>
-                                    <p:set>
-                                      <p:cBhvr>
-                                        <p:cTn id="21" dur="1" fill="hold">
-                                          <p:stCondLst>
-                                            <p:cond delay="0"/>
-                                          </p:stCondLst>
-                                        </p:cTn>
-                                        <p:tgtEl>
-                                          <p:spTgt spid="3">
-                                            <p:txEl>
-                                              <p:pRg st="5" end="5"/>
-                                            </p:txEl>
-                                          </p:spTgt>
-                                        </p:tgtEl>
-                                        <p:attrNameLst>
-                                          <p:attrName>style.visibility</p:attrName>
-                                        </p:attrNameLst>
-                                      </p:cBhvr>
-                                      <p:to>
-                                        <p:strVal val="visible"/>
-                                      </p:to>
-                                    </p:set>
-                                    <p:animEffect transition="in" filter="fade">
-                                      <p:cBhvr>
-                                        <p:cTn id="22" dur="500"/>
-                                        <p:tgtEl>
-                                          <p:spTgt spid="3">
-                                            <p:txEl>
-                                              <p:pRg st="5" end="5"/>
-                                            </p:txEl>
-                                          </p:spTgt>
-                                        </p:tgtEl>
-                                      </p:cBhvr>
-                                    </p:animEffect>
-                                  </p:childTnLst>
-                                </p:cTn>
-                              </p:par>
-                            </p:childTnLst>
-                          </p:cTn>
-                        </p:par>
-                      </p:childTnLst>
-                    </p:cTn>
-                  </p:par>
-                </p:childTnLst>
-              </p:cTn>
-              <p:prevCondLst>
-                <p:cond evt="onPrev" delay="0">
-                  <p:tgtEl>
-                    <p:sldTgt/>
-                  </p:tgtEl>
-                </p:cond>
-              </p:prevCondLst>
-              <p:nextCondLst>
-                <p:cond evt="onNext" delay="0">
-                  <p:tgtEl>
-                    <p:sldTgt/>
-                  </p:tgtEl>
-                </p:cond>
-              </p:nextCondLst>
-            </p:seq>
-          </p:childTnLst>
-        </p:cTn>
-      </p:par>
-    </p:tnLst>
-  </p:timing>
 </p:sld>
 </file>
 
@@ -16658,470 +15804,6 @@
   <p:clrMapOvr>
     <a:masterClrMapping/>
   </p:clrMapOvr>
-  <p:timing>
-    <p:tnLst>
-      <p:par>
-        <p:cTn id="1" dur="indefinite" restart="never" nodeType="tmRoot">
-          <p:childTnLst>
-            <p:seq concurrent="1" nextAc="seek">
-              <p:cTn id="2" dur="indefinite" nodeType="mainSeq">
-                <p:childTnLst>
-                  <p:par>
-                    <p:cTn id="3" fill="hold">
-                      <p:stCondLst>
-                        <p:cond delay="indefinite"/>
-                      </p:stCondLst>
-                      <p:childTnLst>
-                        <p:par>
-                          <p:cTn id="4" fill="hold">
-                            <p:stCondLst>
-                              <p:cond delay="0"/>
-                            </p:stCondLst>
-                            <p:childTnLst>
-                              <p:par>
-                                <p:cTn id="5" presetID="10" presetClass="entr" presetSubtype="0" fill="hold" nodeType="clickEffect">
-                                  <p:stCondLst>
-                                    <p:cond delay="0"/>
-                                  </p:stCondLst>
-                                  <p:childTnLst>
-                                    <p:set>
-                                      <p:cBhvr>
-                                        <p:cTn id="6" dur="1" fill="hold">
-                                          <p:stCondLst>
-                                            <p:cond delay="0"/>
-                                          </p:stCondLst>
-                                        </p:cTn>
-                                        <p:tgtEl>
-                                          <p:spTgt spid="7">
-                                            <p:txEl>
-                                              <p:pRg st="0" end="0"/>
-                                            </p:txEl>
-                                          </p:spTgt>
-                                        </p:tgtEl>
-                                        <p:attrNameLst>
-                                          <p:attrName>style.visibility</p:attrName>
-                                        </p:attrNameLst>
-                                      </p:cBhvr>
-                                      <p:to>
-                                        <p:strVal val="visible"/>
-                                      </p:to>
-                                    </p:set>
-                                    <p:animEffect transition="in" filter="fade">
-                                      <p:cBhvr>
-                                        <p:cTn id="7" dur="500"/>
-                                        <p:tgtEl>
-                                          <p:spTgt spid="7">
-                                            <p:txEl>
-                                              <p:pRg st="0" end="0"/>
-                                            </p:txEl>
-                                          </p:spTgt>
-                                        </p:tgtEl>
-                                      </p:cBhvr>
-                                    </p:animEffect>
-                                  </p:childTnLst>
-                                </p:cTn>
-                              </p:par>
-                            </p:childTnLst>
-                          </p:cTn>
-                        </p:par>
-                      </p:childTnLst>
-                    </p:cTn>
-                  </p:par>
-                  <p:par>
-                    <p:cTn id="8" fill="hold">
-                      <p:stCondLst>
-                        <p:cond delay="indefinite"/>
-                      </p:stCondLst>
-                      <p:childTnLst>
-                        <p:par>
-                          <p:cTn id="9" fill="hold">
-                            <p:stCondLst>
-                              <p:cond delay="0"/>
-                            </p:stCondLst>
-                            <p:childTnLst>
-                              <p:par>
-                                <p:cTn id="10" presetID="10" presetClass="entr" presetSubtype="0" fill="hold" nodeType="clickEffect">
-                                  <p:stCondLst>
-                                    <p:cond delay="0"/>
-                                  </p:stCondLst>
-                                  <p:childTnLst>
-                                    <p:set>
-                                      <p:cBhvr>
-                                        <p:cTn id="11" dur="1" fill="hold">
-                                          <p:stCondLst>
-                                            <p:cond delay="0"/>
-                                          </p:stCondLst>
-                                        </p:cTn>
-                                        <p:tgtEl>
-                                          <p:spTgt spid="7">
-                                            <p:txEl>
-                                              <p:pRg st="1" end="1"/>
-                                            </p:txEl>
-                                          </p:spTgt>
-                                        </p:tgtEl>
-                                        <p:attrNameLst>
-                                          <p:attrName>style.visibility</p:attrName>
-                                        </p:attrNameLst>
-                                      </p:cBhvr>
-                                      <p:to>
-                                        <p:strVal val="visible"/>
-                                      </p:to>
-                                    </p:set>
-                                    <p:animEffect transition="in" filter="fade">
-                                      <p:cBhvr>
-                                        <p:cTn id="12" dur="500"/>
-                                        <p:tgtEl>
-                                          <p:spTgt spid="7">
-                                            <p:txEl>
-                                              <p:pRg st="1" end="1"/>
-                                            </p:txEl>
-                                          </p:spTgt>
-                                        </p:tgtEl>
-                                      </p:cBhvr>
-                                    </p:animEffect>
-                                  </p:childTnLst>
-                                </p:cTn>
-                              </p:par>
-                            </p:childTnLst>
-                          </p:cTn>
-                        </p:par>
-                      </p:childTnLst>
-                    </p:cTn>
-                  </p:par>
-                  <p:par>
-                    <p:cTn id="13" fill="hold">
-                      <p:stCondLst>
-                        <p:cond delay="indefinite"/>
-                      </p:stCondLst>
-                      <p:childTnLst>
-                        <p:par>
-                          <p:cTn id="14" fill="hold">
-                            <p:stCondLst>
-                              <p:cond delay="0"/>
-                            </p:stCondLst>
-                            <p:childTnLst>
-                              <p:par>
-                                <p:cTn id="15" presetID="10" presetClass="entr" presetSubtype="0" fill="hold" nodeType="clickEffect">
-                                  <p:stCondLst>
-                                    <p:cond delay="0"/>
-                                  </p:stCondLst>
-                                  <p:childTnLst>
-                                    <p:set>
-                                      <p:cBhvr>
-                                        <p:cTn id="16" dur="1" fill="hold">
-                                          <p:stCondLst>
-                                            <p:cond delay="0"/>
-                                          </p:stCondLst>
-                                        </p:cTn>
-                                        <p:tgtEl>
-                                          <p:spTgt spid="7">
-                                            <p:txEl>
-                                              <p:pRg st="2" end="2"/>
-                                            </p:txEl>
-                                          </p:spTgt>
-                                        </p:tgtEl>
-                                        <p:attrNameLst>
-                                          <p:attrName>style.visibility</p:attrName>
-                                        </p:attrNameLst>
-                                      </p:cBhvr>
-                                      <p:to>
-                                        <p:strVal val="visible"/>
-                                      </p:to>
-                                    </p:set>
-                                    <p:animEffect transition="in" filter="fade">
-                                      <p:cBhvr>
-                                        <p:cTn id="17" dur="500"/>
-                                        <p:tgtEl>
-                                          <p:spTgt spid="7">
-                                            <p:txEl>
-                                              <p:pRg st="2" end="2"/>
-                                            </p:txEl>
-                                          </p:spTgt>
-                                        </p:tgtEl>
-                                      </p:cBhvr>
-                                    </p:animEffect>
-                                  </p:childTnLst>
-                                </p:cTn>
-                              </p:par>
-                              <p:par>
-                                <p:cTn id="18" presetID="10" presetClass="entr" presetSubtype="0" fill="hold" nodeType="withEffect">
-                                  <p:stCondLst>
-                                    <p:cond delay="0"/>
-                                  </p:stCondLst>
-                                  <p:childTnLst>
-                                    <p:set>
-                                      <p:cBhvr>
-                                        <p:cTn id="19" dur="1" fill="hold">
-                                          <p:stCondLst>
-                                            <p:cond delay="0"/>
-                                          </p:stCondLst>
-                                        </p:cTn>
-                                        <p:tgtEl>
-                                          <p:spTgt spid="7">
-                                            <p:txEl>
-                                              <p:pRg st="3" end="3"/>
-                                            </p:txEl>
-                                          </p:spTgt>
-                                        </p:tgtEl>
-                                        <p:attrNameLst>
-                                          <p:attrName>style.visibility</p:attrName>
-                                        </p:attrNameLst>
-                                      </p:cBhvr>
-                                      <p:to>
-                                        <p:strVal val="visible"/>
-                                      </p:to>
-                                    </p:set>
-                                    <p:animEffect transition="in" filter="fade">
-                                      <p:cBhvr>
-                                        <p:cTn id="20" dur="500"/>
-                                        <p:tgtEl>
-                                          <p:spTgt spid="7">
-                                            <p:txEl>
-                                              <p:pRg st="3" end="3"/>
-                                            </p:txEl>
-                                          </p:spTgt>
-                                        </p:tgtEl>
-                                      </p:cBhvr>
-                                    </p:animEffect>
-                                  </p:childTnLst>
-                                </p:cTn>
-                              </p:par>
-                              <p:par>
-                                <p:cTn id="21" presetID="10" presetClass="entr" presetSubtype="0" fill="hold" nodeType="withEffect">
-                                  <p:stCondLst>
-                                    <p:cond delay="0"/>
-                                  </p:stCondLst>
-                                  <p:childTnLst>
-                                    <p:set>
-                                      <p:cBhvr>
-                                        <p:cTn id="22" dur="1" fill="hold">
-                                          <p:stCondLst>
-                                            <p:cond delay="0"/>
-                                          </p:stCondLst>
-                                        </p:cTn>
-                                        <p:tgtEl>
-                                          <p:spTgt spid="7">
-                                            <p:txEl>
-                                              <p:pRg st="4" end="4"/>
-                                            </p:txEl>
-                                          </p:spTgt>
-                                        </p:tgtEl>
-                                        <p:attrNameLst>
-                                          <p:attrName>style.visibility</p:attrName>
-                                        </p:attrNameLst>
-                                      </p:cBhvr>
-                                      <p:to>
-                                        <p:strVal val="visible"/>
-                                      </p:to>
-                                    </p:set>
-                                    <p:animEffect transition="in" filter="fade">
-                                      <p:cBhvr>
-                                        <p:cTn id="23" dur="500"/>
-                                        <p:tgtEl>
-                                          <p:spTgt spid="7">
-                                            <p:txEl>
-                                              <p:pRg st="4" end="4"/>
-                                            </p:txEl>
-                                          </p:spTgt>
-                                        </p:tgtEl>
-                                      </p:cBhvr>
-                                    </p:animEffect>
-                                  </p:childTnLst>
-                                </p:cTn>
-                              </p:par>
-                            </p:childTnLst>
-                          </p:cTn>
-                        </p:par>
-                      </p:childTnLst>
-                    </p:cTn>
-                  </p:par>
-                  <p:par>
-                    <p:cTn id="24" fill="hold">
-                      <p:stCondLst>
-                        <p:cond delay="indefinite"/>
-                      </p:stCondLst>
-                      <p:childTnLst>
-                        <p:par>
-                          <p:cTn id="25" fill="hold">
-                            <p:stCondLst>
-                              <p:cond delay="0"/>
-                            </p:stCondLst>
-                            <p:childTnLst>
-                              <p:par>
-                                <p:cTn id="26" presetID="10" presetClass="entr" presetSubtype="0" fill="hold" nodeType="clickEffect">
-                                  <p:stCondLst>
-                                    <p:cond delay="0"/>
-                                  </p:stCondLst>
-                                  <p:childTnLst>
-                                    <p:set>
-                                      <p:cBhvr>
-                                        <p:cTn id="27" dur="1" fill="hold">
-                                          <p:stCondLst>
-                                            <p:cond delay="0"/>
-                                          </p:stCondLst>
-                                        </p:cTn>
-                                        <p:tgtEl>
-                                          <p:spTgt spid="7">
-                                            <p:txEl>
-                                              <p:pRg st="5" end="5"/>
-                                            </p:txEl>
-                                          </p:spTgt>
-                                        </p:tgtEl>
-                                        <p:attrNameLst>
-                                          <p:attrName>style.visibility</p:attrName>
-                                        </p:attrNameLst>
-                                      </p:cBhvr>
-                                      <p:to>
-                                        <p:strVal val="visible"/>
-                                      </p:to>
-                                    </p:set>
-                                    <p:animEffect transition="in" filter="fade">
-                                      <p:cBhvr>
-                                        <p:cTn id="28" dur="500"/>
-                                        <p:tgtEl>
-                                          <p:spTgt spid="7">
-                                            <p:txEl>
-                                              <p:pRg st="5" end="5"/>
-                                            </p:txEl>
-                                          </p:spTgt>
-                                        </p:tgtEl>
-                                      </p:cBhvr>
-                                    </p:animEffect>
-                                  </p:childTnLst>
-                                </p:cTn>
-                              </p:par>
-                            </p:childTnLst>
-                          </p:cTn>
-                        </p:par>
-                      </p:childTnLst>
-                    </p:cTn>
-                  </p:par>
-                  <p:par>
-                    <p:cTn id="29" fill="hold">
-                      <p:stCondLst>
-                        <p:cond delay="indefinite"/>
-                      </p:stCondLst>
-                      <p:childTnLst>
-                        <p:par>
-                          <p:cTn id="30" fill="hold">
-                            <p:stCondLst>
-                              <p:cond delay="0"/>
-                            </p:stCondLst>
-                            <p:childTnLst>
-                              <p:par>
-                                <p:cTn id="31" presetID="10" presetClass="entr" presetSubtype="0" fill="hold" nodeType="clickEffect">
-                                  <p:stCondLst>
-                                    <p:cond delay="0"/>
-                                  </p:stCondLst>
-                                  <p:childTnLst>
-                                    <p:set>
-                                      <p:cBhvr>
-                                        <p:cTn id="32" dur="1" fill="hold">
-                                          <p:stCondLst>
-                                            <p:cond delay="0"/>
-                                          </p:stCondLst>
-                                        </p:cTn>
-                                        <p:tgtEl>
-                                          <p:spTgt spid="7">
-                                            <p:txEl>
-                                              <p:pRg st="6" end="6"/>
-                                            </p:txEl>
-                                          </p:spTgt>
-                                        </p:tgtEl>
-                                        <p:attrNameLst>
-                                          <p:attrName>style.visibility</p:attrName>
-                                        </p:attrNameLst>
-                                      </p:cBhvr>
-                                      <p:to>
-                                        <p:strVal val="visible"/>
-                                      </p:to>
-                                    </p:set>
-                                    <p:animEffect transition="in" filter="fade">
-                                      <p:cBhvr>
-                                        <p:cTn id="33" dur="500"/>
-                                        <p:tgtEl>
-                                          <p:spTgt spid="7">
-                                            <p:txEl>
-                                              <p:pRg st="6" end="6"/>
-                                            </p:txEl>
-                                          </p:spTgt>
-                                        </p:tgtEl>
-                                      </p:cBhvr>
-                                    </p:animEffect>
-                                  </p:childTnLst>
-                                </p:cTn>
-                              </p:par>
-                              <p:par>
-                                <p:cTn id="34" presetID="10" presetClass="entr" presetSubtype="0" fill="hold" nodeType="withEffect">
-                                  <p:stCondLst>
-                                    <p:cond delay="0"/>
-                                  </p:stCondLst>
-                                  <p:childTnLst>
-                                    <p:set>
-                                      <p:cBhvr>
-                                        <p:cTn id="35" dur="1" fill="hold">
-                                          <p:stCondLst>
-                                            <p:cond delay="0"/>
-                                          </p:stCondLst>
-                                        </p:cTn>
-                                        <p:tgtEl>
-                                          <p:spTgt spid="7">
-                                            <p:txEl>
-                                              <p:pRg st="7" end="7"/>
-                                            </p:txEl>
-                                          </p:spTgt>
-                                        </p:tgtEl>
-                                        <p:attrNameLst>
-                                          <p:attrName>style.visibility</p:attrName>
-                                        </p:attrNameLst>
-                                      </p:cBhvr>
-                                      <p:to>
-                                        <p:strVal val="visible"/>
-                                      </p:to>
-                                    </p:set>
-                                    <p:animEffect transition="in" filter="fade">
-                                      <p:cBhvr>
-                                        <p:cTn id="36" dur="500"/>
-                                        <p:tgtEl>
-                                          <p:spTgt spid="7">
-                                            <p:txEl>
-                                              <p:pRg st="7" end="7"/>
-                                            </p:txEl>
-                                          </p:spTgt>
-                                        </p:tgtEl>
-                                      </p:cBhvr>
-                                    </p:animEffect>
-                                  </p:childTnLst>
-                                </p:cTn>
-                              </p:par>
-                            </p:childTnLst>
-                          </p:cTn>
-                        </p:par>
-                      </p:childTnLst>
-                    </p:cTn>
-                  </p:par>
-                </p:childTnLst>
-              </p:cTn>
-              <p:prevCondLst>
-                <p:cond evt="onPrev" delay="0">
-                  <p:tgtEl>
-                    <p:sldTgt/>
-                  </p:tgtEl>
-                </p:cond>
-              </p:prevCondLst>
-              <p:nextCondLst>
-                <p:cond evt="onNext" delay="0">
-                  <p:tgtEl>
-                    <p:sldTgt/>
-                  </p:tgtEl>
-                </p:cond>
-              </p:nextCondLst>
-            </p:seq>
-          </p:childTnLst>
-        </p:cTn>
-      </p:par>
-    </p:tnLst>
-  </p:timing>
 </p:sld>
 </file>
 
@@ -17518,280 +16200,6 @@
   <p:clrMapOvr>
     <a:masterClrMapping/>
   </p:clrMapOvr>
-  <p:timing>
-    <p:tnLst>
-      <p:par>
-        <p:cTn id="1" dur="indefinite" restart="never" nodeType="tmRoot">
-          <p:childTnLst>
-            <p:seq concurrent="1" nextAc="seek">
-              <p:cTn id="2" dur="indefinite" nodeType="mainSeq">
-                <p:childTnLst>
-                  <p:par>
-                    <p:cTn id="3" fill="hold">
-                      <p:stCondLst>
-                        <p:cond delay="indefinite"/>
-                      </p:stCondLst>
-                      <p:childTnLst>
-                        <p:par>
-                          <p:cTn id="4" fill="hold">
-                            <p:stCondLst>
-                              <p:cond delay="0"/>
-                            </p:stCondLst>
-                            <p:childTnLst>
-                              <p:par>
-                                <p:cTn id="5" presetID="10" presetClass="entr" presetSubtype="0" fill="hold" nodeType="clickEffect">
-                                  <p:stCondLst>
-                                    <p:cond delay="0"/>
-                                  </p:stCondLst>
-                                  <p:childTnLst>
-                                    <p:set>
-                                      <p:cBhvr>
-                                        <p:cTn id="6" dur="1" fill="hold">
-                                          <p:stCondLst>
-                                            <p:cond delay="0"/>
-                                          </p:stCondLst>
-                                        </p:cTn>
-                                        <p:tgtEl>
-                                          <p:spTgt spid="3">
-                                            <p:txEl>
-                                              <p:pRg st="0" end="0"/>
-                                            </p:txEl>
-                                          </p:spTgt>
-                                        </p:tgtEl>
-                                        <p:attrNameLst>
-                                          <p:attrName>style.visibility</p:attrName>
-                                        </p:attrNameLst>
-                                      </p:cBhvr>
-                                      <p:to>
-                                        <p:strVal val="visible"/>
-                                      </p:to>
-                                    </p:set>
-                                    <p:animEffect transition="in" filter="fade">
-                                      <p:cBhvr>
-                                        <p:cTn id="7" dur="500"/>
-                                        <p:tgtEl>
-                                          <p:spTgt spid="3">
-                                            <p:txEl>
-                                              <p:pRg st="0" end="0"/>
-                                            </p:txEl>
-                                          </p:spTgt>
-                                        </p:tgtEl>
-                                      </p:cBhvr>
-                                    </p:animEffect>
-                                  </p:childTnLst>
-                                </p:cTn>
-                              </p:par>
-                            </p:childTnLst>
-                          </p:cTn>
-                        </p:par>
-                      </p:childTnLst>
-                    </p:cTn>
-                  </p:par>
-                  <p:par>
-                    <p:cTn id="8" fill="hold">
-                      <p:stCondLst>
-                        <p:cond delay="indefinite"/>
-                      </p:stCondLst>
-                      <p:childTnLst>
-                        <p:par>
-                          <p:cTn id="9" fill="hold">
-                            <p:stCondLst>
-                              <p:cond delay="0"/>
-                            </p:stCondLst>
-                            <p:childTnLst>
-                              <p:par>
-                                <p:cTn id="10" presetID="10" presetClass="entr" presetSubtype="0" fill="hold" nodeType="clickEffect">
-                                  <p:stCondLst>
-                                    <p:cond delay="0"/>
-                                  </p:stCondLst>
-                                  <p:childTnLst>
-                                    <p:set>
-                                      <p:cBhvr>
-                                        <p:cTn id="11" dur="1" fill="hold">
-                                          <p:stCondLst>
-                                            <p:cond delay="0"/>
-                                          </p:stCondLst>
-                                        </p:cTn>
-                                        <p:tgtEl>
-                                          <p:spTgt spid="3">
-                                            <p:txEl>
-                                              <p:pRg st="1" end="1"/>
-                                            </p:txEl>
-                                          </p:spTgt>
-                                        </p:tgtEl>
-                                        <p:attrNameLst>
-                                          <p:attrName>style.visibility</p:attrName>
-                                        </p:attrNameLst>
-                                      </p:cBhvr>
-                                      <p:to>
-                                        <p:strVal val="visible"/>
-                                      </p:to>
-                                    </p:set>
-                                    <p:animEffect transition="in" filter="fade">
-                                      <p:cBhvr>
-                                        <p:cTn id="12" dur="500"/>
-                                        <p:tgtEl>
-                                          <p:spTgt spid="3">
-                                            <p:txEl>
-                                              <p:pRg st="1" end="1"/>
-                                            </p:txEl>
-                                          </p:spTgt>
-                                        </p:tgtEl>
-                                      </p:cBhvr>
-                                    </p:animEffect>
-                                  </p:childTnLst>
-                                </p:cTn>
-                              </p:par>
-                            </p:childTnLst>
-                          </p:cTn>
-                        </p:par>
-                      </p:childTnLst>
-                    </p:cTn>
-                  </p:par>
-                  <p:par>
-                    <p:cTn id="13" fill="hold">
-                      <p:stCondLst>
-                        <p:cond delay="indefinite"/>
-                      </p:stCondLst>
-                      <p:childTnLst>
-                        <p:par>
-                          <p:cTn id="14" fill="hold">
-                            <p:stCondLst>
-                              <p:cond delay="0"/>
-                            </p:stCondLst>
-                            <p:childTnLst>
-                              <p:par>
-                                <p:cTn id="15" presetID="10" presetClass="entr" presetSubtype="0" fill="hold" nodeType="clickEffect">
-                                  <p:stCondLst>
-                                    <p:cond delay="0"/>
-                                  </p:stCondLst>
-                                  <p:childTnLst>
-                                    <p:set>
-                                      <p:cBhvr>
-                                        <p:cTn id="16" dur="1" fill="hold">
-                                          <p:stCondLst>
-                                            <p:cond delay="0"/>
-                                          </p:stCondLst>
-                                        </p:cTn>
-                                        <p:tgtEl>
-                                          <p:spTgt spid="3">
-                                            <p:txEl>
-                                              <p:pRg st="2" end="2"/>
-                                            </p:txEl>
-                                          </p:spTgt>
-                                        </p:tgtEl>
-                                        <p:attrNameLst>
-                                          <p:attrName>style.visibility</p:attrName>
-                                        </p:attrNameLst>
-                                      </p:cBhvr>
-                                      <p:to>
-                                        <p:strVal val="visible"/>
-                                      </p:to>
-                                    </p:set>
-                                    <p:animEffect transition="in" filter="fade">
-                                      <p:cBhvr>
-                                        <p:cTn id="17" dur="500"/>
-                                        <p:tgtEl>
-                                          <p:spTgt spid="3">
-                                            <p:txEl>
-                                              <p:pRg st="2" end="2"/>
-                                            </p:txEl>
-                                          </p:spTgt>
-                                        </p:tgtEl>
-                                      </p:cBhvr>
-                                    </p:animEffect>
-                                  </p:childTnLst>
-                                </p:cTn>
-                              </p:par>
-                            </p:childTnLst>
-                          </p:cTn>
-                        </p:par>
-                      </p:childTnLst>
-                    </p:cTn>
-                  </p:par>
-                  <p:par>
-                    <p:cTn id="18" fill="hold">
-                      <p:stCondLst>
-                        <p:cond delay="indefinite"/>
-                      </p:stCondLst>
-                      <p:childTnLst>
-                        <p:par>
-                          <p:cTn id="19" fill="hold">
-                            <p:stCondLst>
-                              <p:cond delay="0"/>
-                            </p:stCondLst>
-                            <p:childTnLst>
-                              <p:par>
-                                <p:cTn id="20" presetID="10" presetClass="entr" presetSubtype="0" fill="hold" nodeType="clickEffect">
-                                  <p:stCondLst>
-                                    <p:cond delay="0"/>
-                                  </p:stCondLst>
-                                  <p:childTnLst>
-                                    <p:set>
-                                      <p:cBhvr>
-                                        <p:cTn id="21" dur="1" fill="hold">
-                                          <p:stCondLst>
-                                            <p:cond delay="0"/>
-                                          </p:stCondLst>
-                                        </p:cTn>
-                                        <p:tgtEl>
-                                          <p:spTgt spid="3">
-                                            <p:txEl>
-                                              <p:pRg st="3" end="3"/>
-                                            </p:txEl>
-                                          </p:spTgt>
-                                        </p:tgtEl>
-                                        <p:attrNameLst>
-                                          <p:attrName>style.visibility</p:attrName>
-                                        </p:attrNameLst>
-                                      </p:cBhvr>
-                                      <p:to>
-                                        <p:strVal val="visible"/>
-                                      </p:to>
-                                    </p:set>
-                                    <p:animEffect transition="in" filter="fade">
-                                      <p:cBhvr>
-                                        <p:cTn id="22" dur="500"/>
-                                        <p:tgtEl>
-                                          <p:spTgt spid="3">
-                                            <p:txEl>
-                                              <p:pRg st="3" end="3"/>
-                                            </p:txEl>
-                                          </p:spTgt>
-                                        </p:tgtEl>
-                                      </p:cBhvr>
-                                    </p:animEffect>
-                                  </p:childTnLst>
-                                </p:cTn>
-                              </p:par>
-                            </p:childTnLst>
-                          </p:cTn>
-                        </p:par>
-                      </p:childTnLst>
-                    </p:cTn>
-                  </p:par>
-                </p:childTnLst>
-              </p:cTn>
-              <p:prevCondLst>
-                <p:cond evt="onPrev" delay="0">
-                  <p:tgtEl>
-                    <p:sldTgt/>
-                  </p:tgtEl>
-                </p:cond>
-              </p:prevCondLst>
-              <p:nextCondLst>
-                <p:cond evt="onNext" delay="0">
-                  <p:tgtEl>
-                    <p:sldTgt/>
-                  </p:tgtEl>
-                </p:cond>
-              </p:nextCondLst>
-            </p:seq>
-          </p:childTnLst>
-        </p:cTn>
-      </p:par>
-    </p:tnLst>
-  </p:timing>
 </p:sld>
 </file>
 
@@ -17876,13 +16284,6 @@
             <a:r>
               <a:rPr lang="en-US" sz="1800" b="0" i="0" u="none" strike="noStrike" baseline="0" dirty="0"/>
               <a:t>Variance (SD)</a:t>
-            </a:r>
-          </a:p>
-          <a:p>
-            <a:pPr lvl="1"/>
-            <a:r>
-              <a:rPr lang="en-US" sz="1800" b="0" i="0" u="none" strike="noStrike" baseline="0" dirty="0"/>
-              <a:t>Zero-mass</a:t>
             </a:r>
           </a:p>
           <a:p>
@@ -18016,642 +16417,6 @@
   <p:clrMapOvr>
     <a:masterClrMapping/>
   </p:clrMapOvr>
-  <p:timing>
-    <p:tnLst>
-      <p:par>
-        <p:cTn id="1" dur="indefinite" restart="never" nodeType="tmRoot">
-          <p:childTnLst>
-            <p:seq concurrent="1" nextAc="seek">
-              <p:cTn id="2" dur="indefinite" nodeType="mainSeq">
-                <p:childTnLst>
-                  <p:par>
-                    <p:cTn id="3" fill="hold">
-                      <p:stCondLst>
-                        <p:cond delay="indefinite"/>
-                      </p:stCondLst>
-                      <p:childTnLst>
-                        <p:par>
-                          <p:cTn id="4" fill="hold">
-                            <p:stCondLst>
-                              <p:cond delay="0"/>
-                            </p:stCondLst>
-                            <p:childTnLst>
-                              <p:par>
-                                <p:cTn id="5" presetID="10" presetClass="entr" presetSubtype="0" fill="hold" nodeType="clickEffect">
-                                  <p:stCondLst>
-                                    <p:cond delay="0"/>
-                                  </p:stCondLst>
-                                  <p:childTnLst>
-                                    <p:set>
-                                      <p:cBhvr>
-                                        <p:cTn id="6" dur="1" fill="hold">
-                                          <p:stCondLst>
-                                            <p:cond delay="0"/>
-                                          </p:stCondLst>
-                                        </p:cTn>
-                                        <p:tgtEl>
-                                          <p:spTgt spid="3">
-                                            <p:txEl>
-                                              <p:pRg st="0" end="0"/>
-                                            </p:txEl>
-                                          </p:spTgt>
-                                        </p:tgtEl>
-                                        <p:attrNameLst>
-                                          <p:attrName>style.visibility</p:attrName>
-                                        </p:attrNameLst>
-                                      </p:cBhvr>
-                                      <p:to>
-                                        <p:strVal val="visible"/>
-                                      </p:to>
-                                    </p:set>
-                                    <p:animEffect transition="in" filter="fade">
-                                      <p:cBhvr>
-                                        <p:cTn id="7" dur="500"/>
-                                        <p:tgtEl>
-                                          <p:spTgt spid="3">
-                                            <p:txEl>
-                                              <p:pRg st="0" end="0"/>
-                                            </p:txEl>
-                                          </p:spTgt>
-                                        </p:tgtEl>
-                                      </p:cBhvr>
-                                    </p:animEffect>
-                                  </p:childTnLst>
-                                </p:cTn>
-                              </p:par>
-                            </p:childTnLst>
-                          </p:cTn>
-                        </p:par>
-                      </p:childTnLst>
-                    </p:cTn>
-                  </p:par>
-                  <p:par>
-                    <p:cTn id="8" fill="hold">
-                      <p:stCondLst>
-                        <p:cond delay="indefinite"/>
-                      </p:stCondLst>
-                      <p:childTnLst>
-                        <p:par>
-                          <p:cTn id="9" fill="hold">
-                            <p:stCondLst>
-                              <p:cond delay="0"/>
-                            </p:stCondLst>
-                            <p:childTnLst>
-                              <p:par>
-                                <p:cTn id="10" presetID="10" presetClass="entr" presetSubtype="0" fill="hold" nodeType="clickEffect">
-                                  <p:stCondLst>
-                                    <p:cond delay="0"/>
-                                  </p:stCondLst>
-                                  <p:childTnLst>
-                                    <p:set>
-                                      <p:cBhvr>
-                                        <p:cTn id="11" dur="1" fill="hold">
-                                          <p:stCondLst>
-                                            <p:cond delay="0"/>
-                                          </p:stCondLst>
-                                        </p:cTn>
-                                        <p:tgtEl>
-                                          <p:spTgt spid="3">
-                                            <p:txEl>
-                                              <p:pRg st="1" end="1"/>
-                                            </p:txEl>
-                                          </p:spTgt>
-                                        </p:tgtEl>
-                                        <p:attrNameLst>
-                                          <p:attrName>style.visibility</p:attrName>
-                                        </p:attrNameLst>
-                                      </p:cBhvr>
-                                      <p:to>
-                                        <p:strVal val="visible"/>
-                                      </p:to>
-                                    </p:set>
-                                    <p:animEffect transition="in" filter="fade">
-                                      <p:cBhvr>
-                                        <p:cTn id="12" dur="500"/>
-                                        <p:tgtEl>
-                                          <p:spTgt spid="3">
-                                            <p:txEl>
-                                              <p:pRg st="1" end="1"/>
-                                            </p:txEl>
-                                          </p:spTgt>
-                                        </p:tgtEl>
-                                      </p:cBhvr>
-                                    </p:animEffect>
-                                  </p:childTnLst>
-                                </p:cTn>
-                              </p:par>
-                            </p:childTnLst>
-                          </p:cTn>
-                        </p:par>
-                      </p:childTnLst>
-                    </p:cTn>
-                  </p:par>
-                  <p:par>
-                    <p:cTn id="13" fill="hold">
-                      <p:stCondLst>
-                        <p:cond delay="indefinite"/>
-                      </p:stCondLst>
-                      <p:childTnLst>
-                        <p:par>
-                          <p:cTn id="14" fill="hold">
-                            <p:stCondLst>
-                              <p:cond delay="0"/>
-                            </p:stCondLst>
-                            <p:childTnLst>
-                              <p:par>
-                                <p:cTn id="15" presetID="10" presetClass="entr" presetSubtype="0" fill="hold" nodeType="clickEffect">
-                                  <p:stCondLst>
-                                    <p:cond delay="0"/>
-                                  </p:stCondLst>
-                                  <p:childTnLst>
-                                    <p:set>
-                                      <p:cBhvr>
-                                        <p:cTn id="16" dur="1" fill="hold">
-                                          <p:stCondLst>
-                                            <p:cond delay="0"/>
-                                          </p:stCondLst>
-                                        </p:cTn>
-                                        <p:tgtEl>
-                                          <p:spTgt spid="3">
-                                            <p:txEl>
-                                              <p:pRg st="2" end="2"/>
-                                            </p:txEl>
-                                          </p:spTgt>
-                                        </p:tgtEl>
-                                        <p:attrNameLst>
-                                          <p:attrName>style.visibility</p:attrName>
-                                        </p:attrNameLst>
-                                      </p:cBhvr>
-                                      <p:to>
-                                        <p:strVal val="visible"/>
-                                      </p:to>
-                                    </p:set>
-                                    <p:animEffect transition="in" filter="fade">
-                                      <p:cBhvr>
-                                        <p:cTn id="17" dur="500"/>
-                                        <p:tgtEl>
-                                          <p:spTgt spid="3">
-                                            <p:txEl>
-                                              <p:pRg st="2" end="2"/>
-                                            </p:txEl>
-                                          </p:spTgt>
-                                        </p:tgtEl>
-                                      </p:cBhvr>
-                                    </p:animEffect>
-                                  </p:childTnLst>
-                                </p:cTn>
-                              </p:par>
-                              <p:par>
-                                <p:cTn id="18" presetID="10" presetClass="entr" presetSubtype="0" fill="hold" nodeType="withEffect">
-                                  <p:stCondLst>
-                                    <p:cond delay="0"/>
-                                  </p:stCondLst>
-                                  <p:childTnLst>
-                                    <p:set>
-                                      <p:cBhvr>
-                                        <p:cTn id="19" dur="1" fill="hold">
-                                          <p:stCondLst>
-                                            <p:cond delay="0"/>
-                                          </p:stCondLst>
-                                        </p:cTn>
-                                        <p:tgtEl>
-                                          <p:spTgt spid="3">
-                                            <p:txEl>
-                                              <p:pRg st="3" end="3"/>
-                                            </p:txEl>
-                                          </p:spTgt>
-                                        </p:tgtEl>
-                                        <p:attrNameLst>
-                                          <p:attrName>style.visibility</p:attrName>
-                                        </p:attrNameLst>
-                                      </p:cBhvr>
-                                      <p:to>
-                                        <p:strVal val="visible"/>
-                                      </p:to>
-                                    </p:set>
-                                    <p:animEffect transition="in" filter="fade">
-                                      <p:cBhvr>
-                                        <p:cTn id="20" dur="500"/>
-                                        <p:tgtEl>
-                                          <p:spTgt spid="3">
-                                            <p:txEl>
-                                              <p:pRg st="3" end="3"/>
-                                            </p:txEl>
-                                          </p:spTgt>
-                                        </p:tgtEl>
-                                      </p:cBhvr>
-                                    </p:animEffect>
-                                  </p:childTnLst>
-                                </p:cTn>
-                              </p:par>
-                              <p:par>
-                                <p:cTn id="21" presetID="10" presetClass="entr" presetSubtype="0" fill="hold" nodeType="withEffect">
-                                  <p:stCondLst>
-                                    <p:cond delay="0"/>
-                                  </p:stCondLst>
-                                  <p:childTnLst>
-                                    <p:set>
-                                      <p:cBhvr>
-                                        <p:cTn id="22" dur="1" fill="hold">
-                                          <p:stCondLst>
-                                            <p:cond delay="0"/>
-                                          </p:stCondLst>
-                                        </p:cTn>
-                                        <p:tgtEl>
-                                          <p:spTgt spid="3">
-                                            <p:txEl>
-                                              <p:pRg st="4" end="4"/>
-                                            </p:txEl>
-                                          </p:spTgt>
-                                        </p:tgtEl>
-                                        <p:attrNameLst>
-                                          <p:attrName>style.visibility</p:attrName>
-                                        </p:attrNameLst>
-                                      </p:cBhvr>
-                                      <p:to>
-                                        <p:strVal val="visible"/>
-                                      </p:to>
-                                    </p:set>
-                                    <p:animEffect transition="in" filter="fade">
-                                      <p:cBhvr>
-                                        <p:cTn id="23" dur="500"/>
-                                        <p:tgtEl>
-                                          <p:spTgt spid="3">
-                                            <p:txEl>
-                                              <p:pRg st="4" end="4"/>
-                                            </p:txEl>
-                                          </p:spTgt>
-                                        </p:tgtEl>
-                                      </p:cBhvr>
-                                    </p:animEffect>
-                                  </p:childTnLst>
-                                </p:cTn>
-                              </p:par>
-                              <p:par>
-                                <p:cTn id="24" presetID="10" presetClass="entr" presetSubtype="0" fill="hold" nodeType="withEffect">
-                                  <p:stCondLst>
-                                    <p:cond delay="0"/>
-                                  </p:stCondLst>
-                                  <p:childTnLst>
-                                    <p:set>
-                                      <p:cBhvr>
-                                        <p:cTn id="25" dur="1" fill="hold">
-                                          <p:stCondLst>
-                                            <p:cond delay="0"/>
-                                          </p:stCondLst>
-                                        </p:cTn>
-                                        <p:tgtEl>
-                                          <p:spTgt spid="3">
-                                            <p:txEl>
-                                              <p:pRg st="5" end="5"/>
-                                            </p:txEl>
-                                          </p:spTgt>
-                                        </p:tgtEl>
-                                        <p:attrNameLst>
-                                          <p:attrName>style.visibility</p:attrName>
-                                        </p:attrNameLst>
-                                      </p:cBhvr>
-                                      <p:to>
-                                        <p:strVal val="visible"/>
-                                      </p:to>
-                                    </p:set>
-                                    <p:animEffect transition="in" filter="fade">
-                                      <p:cBhvr>
-                                        <p:cTn id="26" dur="500"/>
-                                        <p:tgtEl>
-                                          <p:spTgt spid="3">
-                                            <p:txEl>
-                                              <p:pRg st="5" end="5"/>
-                                            </p:txEl>
-                                          </p:spTgt>
-                                        </p:tgtEl>
-                                      </p:cBhvr>
-                                    </p:animEffect>
-                                  </p:childTnLst>
-                                </p:cTn>
-                              </p:par>
-                              <p:par>
-                                <p:cTn id="27" presetID="10" presetClass="entr" presetSubtype="0" fill="hold" nodeType="withEffect">
-                                  <p:stCondLst>
-                                    <p:cond delay="0"/>
-                                  </p:stCondLst>
-                                  <p:childTnLst>
-                                    <p:set>
-                                      <p:cBhvr>
-                                        <p:cTn id="28" dur="1" fill="hold">
-                                          <p:stCondLst>
-                                            <p:cond delay="0"/>
-                                          </p:stCondLst>
-                                        </p:cTn>
-                                        <p:tgtEl>
-                                          <p:spTgt spid="3">
-                                            <p:txEl>
-                                              <p:pRg st="6" end="6"/>
-                                            </p:txEl>
-                                          </p:spTgt>
-                                        </p:tgtEl>
-                                        <p:attrNameLst>
-                                          <p:attrName>style.visibility</p:attrName>
-                                        </p:attrNameLst>
-                                      </p:cBhvr>
-                                      <p:to>
-                                        <p:strVal val="visible"/>
-                                      </p:to>
-                                    </p:set>
-                                    <p:animEffect transition="in" filter="fade">
-                                      <p:cBhvr>
-                                        <p:cTn id="29" dur="500"/>
-                                        <p:tgtEl>
-                                          <p:spTgt spid="3">
-                                            <p:txEl>
-                                              <p:pRg st="6" end="6"/>
-                                            </p:txEl>
-                                          </p:spTgt>
-                                        </p:tgtEl>
-                                      </p:cBhvr>
-                                    </p:animEffect>
-                                  </p:childTnLst>
-                                </p:cTn>
-                              </p:par>
-                            </p:childTnLst>
-                          </p:cTn>
-                        </p:par>
-                      </p:childTnLst>
-                    </p:cTn>
-                  </p:par>
-                  <p:par>
-                    <p:cTn id="30" fill="hold">
-                      <p:stCondLst>
-                        <p:cond delay="indefinite"/>
-                      </p:stCondLst>
-                      <p:childTnLst>
-                        <p:par>
-                          <p:cTn id="31" fill="hold">
-                            <p:stCondLst>
-                              <p:cond delay="0"/>
-                            </p:stCondLst>
-                            <p:childTnLst>
-                              <p:par>
-                                <p:cTn id="32" presetID="10" presetClass="entr" presetSubtype="0" fill="hold" nodeType="clickEffect">
-                                  <p:stCondLst>
-                                    <p:cond delay="0"/>
-                                  </p:stCondLst>
-                                  <p:childTnLst>
-                                    <p:set>
-                                      <p:cBhvr>
-                                        <p:cTn id="33" dur="1" fill="hold">
-                                          <p:stCondLst>
-                                            <p:cond delay="0"/>
-                                          </p:stCondLst>
-                                        </p:cTn>
-                                        <p:tgtEl>
-                                          <p:spTgt spid="3">
-                                            <p:txEl>
-                                              <p:pRg st="7" end="7"/>
-                                            </p:txEl>
-                                          </p:spTgt>
-                                        </p:tgtEl>
-                                        <p:attrNameLst>
-                                          <p:attrName>style.visibility</p:attrName>
-                                        </p:attrNameLst>
-                                      </p:cBhvr>
-                                      <p:to>
-                                        <p:strVal val="visible"/>
-                                      </p:to>
-                                    </p:set>
-                                    <p:animEffect transition="in" filter="fade">
-                                      <p:cBhvr>
-                                        <p:cTn id="34" dur="500"/>
-                                        <p:tgtEl>
-                                          <p:spTgt spid="3">
-                                            <p:txEl>
-                                              <p:pRg st="7" end="7"/>
-                                            </p:txEl>
-                                          </p:spTgt>
-                                        </p:tgtEl>
-                                      </p:cBhvr>
-                                    </p:animEffect>
-                                  </p:childTnLst>
-                                </p:cTn>
-                              </p:par>
-                              <p:par>
-                                <p:cTn id="35" presetID="10" presetClass="entr" presetSubtype="0" fill="hold" nodeType="withEffect">
-                                  <p:stCondLst>
-                                    <p:cond delay="0"/>
-                                  </p:stCondLst>
-                                  <p:childTnLst>
-                                    <p:set>
-                                      <p:cBhvr>
-                                        <p:cTn id="36" dur="1" fill="hold">
-                                          <p:stCondLst>
-                                            <p:cond delay="0"/>
-                                          </p:stCondLst>
-                                        </p:cTn>
-                                        <p:tgtEl>
-                                          <p:spTgt spid="3">
-                                            <p:txEl>
-                                              <p:pRg st="8" end="8"/>
-                                            </p:txEl>
-                                          </p:spTgt>
-                                        </p:tgtEl>
-                                        <p:attrNameLst>
-                                          <p:attrName>style.visibility</p:attrName>
-                                        </p:attrNameLst>
-                                      </p:cBhvr>
-                                      <p:to>
-                                        <p:strVal val="visible"/>
-                                      </p:to>
-                                    </p:set>
-                                    <p:animEffect transition="in" filter="fade">
-                                      <p:cBhvr>
-                                        <p:cTn id="37" dur="500"/>
-                                        <p:tgtEl>
-                                          <p:spTgt spid="3">
-                                            <p:txEl>
-                                              <p:pRg st="8" end="8"/>
-                                            </p:txEl>
-                                          </p:spTgt>
-                                        </p:tgtEl>
-                                      </p:cBhvr>
-                                    </p:animEffect>
-                                  </p:childTnLst>
-                                </p:cTn>
-                              </p:par>
-                              <p:par>
-                                <p:cTn id="38" presetID="10" presetClass="entr" presetSubtype="0" fill="hold" nodeType="withEffect">
-                                  <p:stCondLst>
-                                    <p:cond delay="0"/>
-                                  </p:stCondLst>
-                                  <p:childTnLst>
-                                    <p:set>
-                                      <p:cBhvr>
-                                        <p:cTn id="39" dur="1" fill="hold">
-                                          <p:stCondLst>
-                                            <p:cond delay="0"/>
-                                          </p:stCondLst>
-                                        </p:cTn>
-                                        <p:tgtEl>
-                                          <p:spTgt spid="3">
-                                            <p:txEl>
-                                              <p:pRg st="9" end="9"/>
-                                            </p:txEl>
-                                          </p:spTgt>
-                                        </p:tgtEl>
-                                        <p:attrNameLst>
-                                          <p:attrName>style.visibility</p:attrName>
-                                        </p:attrNameLst>
-                                      </p:cBhvr>
-                                      <p:to>
-                                        <p:strVal val="visible"/>
-                                      </p:to>
-                                    </p:set>
-                                    <p:animEffect transition="in" filter="fade">
-                                      <p:cBhvr>
-                                        <p:cTn id="40" dur="500"/>
-                                        <p:tgtEl>
-                                          <p:spTgt spid="3">
-                                            <p:txEl>
-                                              <p:pRg st="9" end="9"/>
-                                            </p:txEl>
-                                          </p:spTgt>
-                                        </p:tgtEl>
-                                      </p:cBhvr>
-                                    </p:animEffect>
-                                  </p:childTnLst>
-                                </p:cTn>
-                              </p:par>
-                              <p:par>
-                                <p:cTn id="41" presetID="10" presetClass="entr" presetSubtype="0" fill="hold" nodeType="withEffect">
-                                  <p:stCondLst>
-                                    <p:cond delay="0"/>
-                                  </p:stCondLst>
-                                  <p:childTnLst>
-                                    <p:set>
-                                      <p:cBhvr>
-                                        <p:cTn id="42" dur="1" fill="hold">
-                                          <p:stCondLst>
-                                            <p:cond delay="0"/>
-                                          </p:stCondLst>
-                                        </p:cTn>
-                                        <p:tgtEl>
-                                          <p:spTgt spid="3">
-                                            <p:txEl>
-                                              <p:pRg st="10" end="10"/>
-                                            </p:txEl>
-                                          </p:spTgt>
-                                        </p:tgtEl>
-                                        <p:attrNameLst>
-                                          <p:attrName>style.visibility</p:attrName>
-                                        </p:attrNameLst>
-                                      </p:cBhvr>
-                                      <p:to>
-                                        <p:strVal val="visible"/>
-                                      </p:to>
-                                    </p:set>
-                                    <p:animEffect transition="in" filter="fade">
-                                      <p:cBhvr>
-                                        <p:cTn id="43" dur="500"/>
-                                        <p:tgtEl>
-                                          <p:spTgt spid="3">
-                                            <p:txEl>
-                                              <p:pRg st="10" end="10"/>
-                                            </p:txEl>
-                                          </p:spTgt>
-                                        </p:tgtEl>
-                                      </p:cBhvr>
-                                    </p:animEffect>
-                                  </p:childTnLst>
-                                </p:cTn>
-                              </p:par>
-                            </p:childTnLst>
-                          </p:cTn>
-                        </p:par>
-                      </p:childTnLst>
-                    </p:cTn>
-                  </p:par>
-                  <p:par>
-                    <p:cTn id="44" fill="hold">
-                      <p:stCondLst>
-                        <p:cond delay="indefinite"/>
-                      </p:stCondLst>
-                      <p:childTnLst>
-                        <p:par>
-                          <p:cTn id="45" fill="hold">
-                            <p:stCondLst>
-                              <p:cond delay="0"/>
-                            </p:stCondLst>
-                            <p:childTnLst>
-                              <p:par>
-                                <p:cTn id="46" presetID="10" presetClass="entr" presetSubtype="0" fill="hold" nodeType="clickEffect">
-                                  <p:stCondLst>
-                                    <p:cond delay="0"/>
-                                  </p:stCondLst>
-                                  <p:childTnLst>
-                                    <p:set>
-                                      <p:cBhvr>
-                                        <p:cTn id="47" dur="1" fill="hold">
-                                          <p:stCondLst>
-                                            <p:cond delay="0"/>
-                                          </p:stCondLst>
-                                        </p:cTn>
-                                        <p:tgtEl>
-                                          <p:spTgt spid="3">
-                                            <p:txEl>
-                                              <p:pRg st="11" end="11"/>
-                                            </p:txEl>
-                                          </p:spTgt>
-                                        </p:tgtEl>
-                                        <p:attrNameLst>
-                                          <p:attrName>style.visibility</p:attrName>
-                                        </p:attrNameLst>
-                                      </p:cBhvr>
-                                      <p:to>
-                                        <p:strVal val="visible"/>
-                                      </p:to>
-                                    </p:set>
-                                    <p:animEffect transition="in" filter="fade">
-                                      <p:cBhvr>
-                                        <p:cTn id="48" dur="500"/>
-                                        <p:tgtEl>
-                                          <p:spTgt spid="3">
-                                            <p:txEl>
-                                              <p:pRg st="11" end="11"/>
-                                            </p:txEl>
-                                          </p:spTgt>
-                                        </p:tgtEl>
-                                      </p:cBhvr>
-                                    </p:animEffect>
-                                  </p:childTnLst>
-                                </p:cTn>
-                              </p:par>
-                            </p:childTnLst>
-                          </p:cTn>
-                        </p:par>
-                      </p:childTnLst>
-                    </p:cTn>
-                  </p:par>
-                </p:childTnLst>
-              </p:cTn>
-              <p:prevCondLst>
-                <p:cond evt="onPrev" delay="0">
-                  <p:tgtEl>
-                    <p:sldTgt/>
-                  </p:tgtEl>
-                </p:cond>
-              </p:prevCondLst>
-              <p:nextCondLst>
-                <p:cond evt="onNext" delay="0">
-                  <p:tgtEl>
-                    <p:sldTgt/>
-                  </p:tgtEl>
-                </p:cond>
-              </p:nextCondLst>
-            </p:seq>
-          </p:childTnLst>
-        </p:cTn>
-      </p:par>
-    </p:tnLst>
-  </p:timing>
 </p:sld>
 </file>
 
@@ -18933,665 +16698,11 @@
   <p:clrMapOvr>
     <a:masterClrMapping/>
   </p:clrMapOvr>
-  <p:timing>
-    <p:tnLst>
-      <p:par>
-        <p:cTn id="1" dur="indefinite" restart="never" nodeType="tmRoot">
-          <p:childTnLst>
-            <p:seq concurrent="1" nextAc="seek">
-              <p:cTn id="2" dur="indefinite" nodeType="mainSeq">
-                <p:childTnLst>
-                  <p:par>
-                    <p:cTn id="3" fill="hold">
-                      <p:stCondLst>
-                        <p:cond delay="indefinite"/>
-                      </p:stCondLst>
-                      <p:childTnLst>
-                        <p:par>
-                          <p:cTn id="4" fill="hold">
-                            <p:stCondLst>
-                              <p:cond delay="0"/>
-                            </p:stCondLst>
-                            <p:childTnLst>
-                              <p:par>
-                                <p:cTn id="5" presetID="10" presetClass="entr" presetSubtype="0" fill="hold" nodeType="clickEffect">
-                                  <p:stCondLst>
-                                    <p:cond delay="0"/>
-                                  </p:stCondLst>
-                                  <p:childTnLst>
-                                    <p:set>
-                                      <p:cBhvr>
-                                        <p:cTn id="6" dur="1" fill="hold">
-                                          <p:stCondLst>
-                                            <p:cond delay="0"/>
-                                          </p:stCondLst>
-                                        </p:cTn>
-                                        <p:tgtEl>
-                                          <p:spTgt spid="3">
-                                            <p:txEl>
-                                              <p:pRg st="0" end="0"/>
-                                            </p:txEl>
-                                          </p:spTgt>
-                                        </p:tgtEl>
-                                        <p:attrNameLst>
-                                          <p:attrName>style.visibility</p:attrName>
-                                        </p:attrNameLst>
-                                      </p:cBhvr>
-                                      <p:to>
-                                        <p:strVal val="visible"/>
-                                      </p:to>
-                                    </p:set>
-                                    <p:animEffect transition="in" filter="fade">
-                                      <p:cBhvr>
-                                        <p:cTn id="7" dur="500"/>
-                                        <p:tgtEl>
-                                          <p:spTgt spid="3">
-                                            <p:txEl>
-                                              <p:pRg st="0" end="0"/>
-                                            </p:txEl>
-                                          </p:spTgt>
-                                        </p:tgtEl>
-                                      </p:cBhvr>
-                                    </p:animEffect>
-                                  </p:childTnLst>
-                                </p:cTn>
-                              </p:par>
-                            </p:childTnLst>
-                          </p:cTn>
-                        </p:par>
-                      </p:childTnLst>
-                    </p:cTn>
-                  </p:par>
-                  <p:par>
-                    <p:cTn id="8" fill="hold">
-                      <p:stCondLst>
-                        <p:cond delay="indefinite"/>
-                      </p:stCondLst>
-                      <p:childTnLst>
-                        <p:par>
-                          <p:cTn id="9" fill="hold">
-                            <p:stCondLst>
-                              <p:cond delay="0"/>
-                            </p:stCondLst>
-                            <p:childTnLst>
-                              <p:par>
-                                <p:cTn id="10" presetID="10" presetClass="entr" presetSubtype="0" fill="hold" nodeType="clickEffect">
-                                  <p:stCondLst>
-                                    <p:cond delay="0"/>
-                                  </p:stCondLst>
-                                  <p:childTnLst>
-                                    <p:set>
-                                      <p:cBhvr>
-                                        <p:cTn id="11" dur="1" fill="hold">
-                                          <p:stCondLst>
-                                            <p:cond delay="0"/>
-                                          </p:stCondLst>
-                                        </p:cTn>
-                                        <p:tgtEl>
-                                          <p:spTgt spid="3">
-                                            <p:txEl>
-                                              <p:pRg st="1" end="1"/>
-                                            </p:txEl>
-                                          </p:spTgt>
-                                        </p:tgtEl>
-                                        <p:attrNameLst>
-                                          <p:attrName>style.visibility</p:attrName>
-                                        </p:attrNameLst>
-                                      </p:cBhvr>
-                                      <p:to>
-                                        <p:strVal val="visible"/>
-                                      </p:to>
-                                    </p:set>
-                                    <p:animEffect transition="in" filter="fade">
-                                      <p:cBhvr>
-                                        <p:cTn id="12" dur="500"/>
-                                        <p:tgtEl>
-                                          <p:spTgt spid="3">
-                                            <p:txEl>
-                                              <p:pRg st="1" end="1"/>
-                                            </p:txEl>
-                                          </p:spTgt>
-                                        </p:tgtEl>
-                                      </p:cBhvr>
-                                    </p:animEffect>
-                                  </p:childTnLst>
-                                </p:cTn>
-                              </p:par>
-                              <p:par>
-                                <p:cTn id="13" presetID="10" presetClass="entr" presetSubtype="0" fill="hold" nodeType="withEffect">
-                                  <p:stCondLst>
-                                    <p:cond delay="0"/>
-                                  </p:stCondLst>
-                                  <p:childTnLst>
-                                    <p:set>
-                                      <p:cBhvr>
-                                        <p:cTn id="14" dur="1" fill="hold">
-                                          <p:stCondLst>
-                                            <p:cond delay="0"/>
-                                          </p:stCondLst>
-                                        </p:cTn>
-                                        <p:tgtEl>
-                                          <p:spTgt spid="3">
-                                            <p:txEl>
-                                              <p:pRg st="2" end="2"/>
-                                            </p:txEl>
-                                          </p:spTgt>
-                                        </p:tgtEl>
-                                        <p:attrNameLst>
-                                          <p:attrName>style.visibility</p:attrName>
-                                        </p:attrNameLst>
-                                      </p:cBhvr>
-                                      <p:to>
-                                        <p:strVal val="visible"/>
-                                      </p:to>
-                                    </p:set>
-                                    <p:animEffect transition="in" filter="fade">
-                                      <p:cBhvr>
-                                        <p:cTn id="15" dur="500"/>
-                                        <p:tgtEl>
-                                          <p:spTgt spid="3">
-                                            <p:txEl>
-                                              <p:pRg st="2" end="2"/>
-                                            </p:txEl>
-                                          </p:spTgt>
-                                        </p:tgtEl>
-                                      </p:cBhvr>
-                                    </p:animEffect>
-                                  </p:childTnLst>
-                                </p:cTn>
-                              </p:par>
-                              <p:par>
-                                <p:cTn id="16" presetID="10" presetClass="entr" presetSubtype="0" fill="hold" nodeType="withEffect">
-                                  <p:stCondLst>
-                                    <p:cond delay="0"/>
-                                  </p:stCondLst>
-                                  <p:childTnLst>
-                                    <p:set>
-                                      <p:cBhvr>
-                                        <p:cTn id="17" dur="1" fill="hold">
-                                          <p:stCondLst>
-                                            <p:cond delay="0"/>
-                                          </p:stCondLst>
-                                        </p:cTn>
-                                        <p:tgtEl>
-                                          <p:spTgt spid="3">
-                                            <p:txEl>
-                                              <p:pRg st="3" end="3"/>
-                                            </p:txEl>
-                                          </p:spTgt>
-                                        </p:tgtEl>
-                                        <p:attrNameLst>
-                                          <p:attrName>style.visibility</p:attrName>
-                                        </p:attrNameLst>
-                                      </p:cBhvr>
-                                      <p:to>
-                                        <p:strVal val="visible"/>
-                                      </p:to>
-                                    </p:set>
-                                    <p:animEffect transition="in" filter="fade">
-                                      <p:cBhvr>
-                                        <p:cTn id="18" dur="500"/>
-                                        <p:tgtEl>
-                                          <p:spTgt spid="3">
-                                            <p:txEl>
-                                              <p:pRg st="3" end="3"/>
-                                            </p:txEl>
-                                          </p:spTgt>
-                                        </p:tgtEl>
-                                      </p:cBhvr>
-                                    </p:animEffect>
-                                  </p:childTnLst>
-                                </p:cTn>
-                              </p:par>
-                              <p:par>
-                                <p:cTn id="19" presetID="10" presetClass="entr" presetSubtype="0" fill="hold" nodeType="withEffect">
-                                  <p:stCondLst>
-                                    <p:cond delay="0"/>
-                                  </p:stCondLst>
-                                  <p:childTnLst>
-                                    <p:set>
-                                      <p:cBhvr>
-                                        <p:cTn id="20" dur="1" fill="hold">
-                                          <p:stCondLst>
-                                            <p:cond delay="0"/>
-                                          </p:stCondLst>
-                                        </p:cTn>
-                                        <p:tgtEl>
-                                          <p:spTgt spid="3">
-                                            <p:txEl>
-                                              <p:pRg st="4" end="4"/>
-                                            </p:txEl>
-                                          </p:spTgt>
-                                        </p:tgtEl>
-                                        <p:attrNameLst>
-                                          <p:attrName>style.visibility</p:attrName>
-                                        </p:attrNameLst>
-                                      </p:cBhvr>
-                                      <p:to>
-                                        <p:strVal val="visible"/>
-                                      </p:to>
-                                    </p:set>
-                                    <p:animEffect transition="in" filter="fade">
-                                      <p:cBhvr>
-                                        <p:cTn id="21" dur="500"/>
-                                        <p:tgtEl>
-                                          <p:spTgt spid="3">
-                                            <p:txEl>
-                                              <p:pRg st="4" end="4"/>
-                                            </p:txEl>
-                                          </p:spTgt>
-                                        </p:tgtEl>
-                                      </p:cBhvr>
-                                    </p:animEffect>
-                                  </p:childTnLst>
-                                </p:cTn>
-                              </p:par>
-                              <p:par>
-                                <p:cTn id="22" presetID="10" presetClass="entr" presetSubtype="0" fill="hold" nodeType="withEffect">
-                                  <p:stCondLst>
-                                    <p:cond delay="0"/>
-                                  </p:stCondLst>
-                                  <p:childTnLst>
-                                    <p:set>
-                                      <p:cBhvr>
-                                        <p:cTn id="23" dur="1" fill="hold">
-                                          <p:stCondLst>
-                                            <p:cond delay="0"/>
-                                          </p:stCondLst>
-                                        </p:cTn>
-                                        <p:tgtEl>
-                                          <p:spTgt spid="3">
-                                            <p:txEl>
-                                              <p:pRg st="5" end="5"/>
-                                            </p:txEl>
-                                          </p:spTgt>
-                                        </p:tgtEl>
-                                        <p:attrNameLst>
-                                          <p:attrName>style.visibility</p:attrName>
-                                        </p:attrNameLst>
-                                      </p:cBhvr>
-                                      <p:to>
-                                        <p:strVal val="visible"/>
-                                      </p:to>
-                                    </p:set>
-                                    <p:animEffect transition="in" filter="fade">
-                                      <p:cBhvr>
-                                        <p:cTn id="24" dur="500"/>
-                                        <p:tgtEl>
-                                          <p:spTgt spid="3">
-                                            <p:txEl>
-                                              <p:pRg st="5" end="5"/>
-                                            </p:txEl>
-                                          </p:spTgt>
-                                        </p:tgtEl>
-                                      </p:cBhvr>
-                                    </p:animEffect>
-                                  </p:childTnLst>
-                                </p:cTn>
-                              </p:par>
-                              <p:par>
-                                <p:cTn id="25" presetID="10" presetClass="entr" presetSubtype="0" fill="hold" nodeType="withEffect">
-                                  <p:stCondLst>
-                                    <p:cond delay="0"/>
-                                  </p:stCondLst>
-                                  <p:childTnLst>
-                                    <p:set>
-                                      <p:cBhvr>
-                                        <p:cTn id="26" dur="1" fill="hold">
-                                          <p:stCondLst>
-                                            <p:cond delay="0"/>
-                                          </p:stCondLst>
-                                        </p:cTn>
-                                        <p:tgtEl>
-                                          <p:spTgt spid="3">
-                                            <p:txEl>
-                                              <p:pRg st="6" end="6"/>
-                                            </p:txEl>
-                                          </p:spTgt>
-                                        </p:tgtEl>
-                                        <p:attrNameLst>
-                                          <p:attrName>style.visibility</p:attrName>
-                                        </p:attrNameLst>
-                                      </p:cBhvr>
-                                      <p:to>
-                                        <p:strVal val="visible"/>
-                                      </p:to>
-                                    </p:set>
-                                    <p:animEffect transition="in" filter="fade">
-                                      <p:cBhvr>
-                                        <p:cTn id="27" dur="500"/>
-                                        <p:tgtEl>
-                                          <p:spTgt spid="3">
-                                            <p:txEl>
-                                              <p:pRg st="6" end="6"/>
-                                            </p:txEl>
-                                          </p:spTgt>
-                                        </p:tgtEl>
-                                      </p:cBhvr>
-                                    </p:animEffect>
-                                  </p:childTnLst>
-                                </p:cTn>
-                              </p:par>
-                            </p:childTnLst>
-                          </p:cTn>
-                        </p:par>
-                      </p:childTnLst>
-                    </p:cTn>
-                  </p:par>
-                  <p:par>
-                    <p:cTn id="28" fill="hold">
-                      <p:stCondLst>
-                        <p:cond delay="indefinite"/>
-                      </p:stCondLst>
-                      <p:childTnLst>
-                        <p:par>
-                          <p:cTn id="29" fill="hold">
-                            <p:stCondLst>
-                              <p:cond delay="0"/>
-                            </p:stCondLst>
-                            <p:childTnLst>
-                              <p:par>
-                                <p:cTn id="30" presetID="10" presetClass="entr" presetSubtype="0" fill="hold" nodeType="clickEffect">
-                                  <p:stCondLst>
-                                    <p:cond delay="0"/>
-                                  </p:stCondLst>
-                                  <p:childTnLst>
-                                    <p:set>
-                                      <p:cBhvr>
-                                        <p:cTn id="31" dur="1" fill="hold">
-                                          <p:stCondLst>
-                                            <p:cond delay="0"/>
-                                          </p:stCondLst>
-                                        </p:cTn>
-                                        <p:tgtEl>
-                                          <p:spTgt spid="3">
-                                            <p:txEl>
-                                              <p:pRg st="7" end="7"/>
-                                            </p:txEl>
-                                          </p:spTgt>
-                                        </p:tgtEl>
-                                        <p:attrNameLst>
-                                          <p:attrName>style.visibility</p:attrName>
-                                        </p:attrNameLst>
-                                      </p:cBhvr>
-                                      <p:to>
-                                        <p:strVal val="visible"/>
-                                      </p:to>
-                                    </p:set>
-                                    <p:animEffect transition="in" filter="fade">
-                                      <p:cBhvr>
-                                        <p:cTn id="32" dur="500"/>
-                                        <p:tgtEl>
-                                          <p:spTgt spid="3">
-                                            <p:txEl>
-                                              <p:pRg st="7" end="7"/>
-                                            </p:txEl>
-                                          </p:spTgt>
-                                        </p:tgtEl>
-                                      </p:cBhvr>
-                                    </p:animEffect>
-                                  </p:childTnLst>
-                                </p:cTn>
-                              </p:par>
-                            </p:childTnLst>
-                          </p:cTn>
-                        </p:par>
-                      </p:childTnLst>
-                    </p:cTn>
-                  </p:par>
-                  <p:par>
-                    <p:cTn id="33" fill="hold">
-                      <p:stCondLst>
-                        <p:cond delay="indefinite"/>
-                      </p:stCondLst>
-                      <p:childTnLst>
-                        <p:par>
-                          <p:cTn id="34" fill="hold">
-                            <p:stCondLst>
-                              <p:cond delay="0"/>
-                            </p:stCondLst>
-                            <p:childTnLst>
-                              <p:par>
-                                <p:cTn id="35" presetID="10" presetClass="entr" presetSubtype="0" fill="hold" nodeType="clickEffect">
-                                  <p:stCondLst>
-                                    <p:cond delay="0"/>
-                                  </p:stCondLst>
-                                  <p:childTnLst>
-                                    <p:set>
-                                      <p:cBhvr>
-                                        <p:cTn id="36" dur="1" fill="hold">
-                                          <p:stCondLst>
-                                            <p:cond delay="0"/>
-                                          </p:stCondLst>
-                                        </p:cTn>
-                                        <p:tgtEl>
-                                          <p:spTgt spid="3">
-                                            <p:txEl>
-                                              <p:pRg st="9" end="9"/>
-                                            </p:txEl>
-                                          </p:spTgt>
-                                        </p:tgtEl>
-                                        <p:attrNameLst>
-                                          <p:attrName>style.visibility</p:attrName>
-                                        </p:attrNameLst>
-                                      </p:cBhvr>
-                                      <p:to>
-                                        <p:strVal val="visible"/>
-                                      </p:to>
-                                    </p:set>
-                                    <p:animEffect transition="in" filter="fade">
-                                      <p:cBhvr>
-                                        <p:cTn id="37" dur="500"/>
-                                        <p:tgtEl>
-                                          <p:spTgt spid="3">
-                                            <p:txEl>
-                                              <p:pRg st="9" end="9"/>
-                                            </p:txEl>
-                                          </p:spTgt>
-                                        </p:tgtEl>
-                                      </p:cBhvr>
-                                    </p:animEffect>
-                                  </p:childTnLst>
-                                </p:cTn>
-                              </p:par>
-                            </p:childTnLst>
-                          </p:cTn>
-                        </p:par>
-                      </p:childTnLst>
-                    </p:cTn>
-                  </p:par>
-                  <p:par>
-                    <p:cTn id="38" fill="hold">
-                      <p:stCondLst>
-                        <p:cond delay="indefinite"/>
-                      </p:stCondLst>
-                      <p:childTnLst>
-                        <p:par>
-                          <p:cTn id="39" fill="hold">
-                            <p:stCondLst>
-                              <p:cond delay="0"/>
-                            </p:stCondLst>
-                            <p:childTnLst>
-                              <p:par>
-                                <p:cTn id="40" presetID="10" presetClass="entr" presetSubtype="0" fill="hold" nodeType="clickEffect">
-                                  <p:stCondLst>
-                                    <p:cond delay="0"/>
-                                  </p:stCondLst>
-                                  <p:childTnLst>
-                                    <p:set>
-                                      <p:cBhvr>
-                                        <p:cTn id="41" dur="1" fill="hold">
-                                          <p:stCondLst>
-                                            <p:cond delay="0"/>
-                                          </p:stCondLst>
-                                        </p:cTn>
-                                        <p:tgtEl>
-                                          <p:spTgt spid="3">
-                                            <p:txEl>
-                                              <p:pRg st="10" end="10"/>
-                                            </p:txEl>
-                                          </p:spTgt>
-                                        </p:tgtEl>
-                                        <p:attrNameLst>
-                                          <p:attrName>style.visibility</p:attrName>
-                                        </p:attrNameLst>
-                                      </p:cBhvr>
-                                      <p:to>
-                                        <p:strVal val="visible"/>
-                                      </p:to>
-                                    </p:set>
-                                    <p:animEffect transition="in" filter="fade">
-                                      <p:cBhvr>
-                                        <p:cTn id="42" dur="500"/>
-                                        <p:tgtEl>
-                                          <p:spTgt spid="3">
-                                            <p:txEl>
-                                              <p:pRg st="10" end="10"/>
-                                            </p:txEl>
-                                          </p:spTgt>
-                                        </p:tgtEl>
-                                      </p:cBhvr>
-                                    </p:animEffect>
-                                  </p:childTnLst>
-                                </p:cTn>
-                              </p:par>
-                              <p:par>
-                                <p:cTn id="43" presetID="10" presetClass="entr" presetSubtype="0" fill="hold" nodeType="withEffect">
-                                  <p:stCondLst>
-                                    <p:cond delay="0"/>
-                                  </p:stCondLst>
-                                  <p:childTnLst>
-                                    <p:set>
-                                      <p:cBhvr>
-                                        <p:cTn id="44" dur="1" fill="hold">
-                                          <p:stCondLst>
-                                            <p:cond delay="0"/>
-                                          </p:stCondLst>
-                                        </p:cTn>
-                                        <p:tgtEl>
-                                          <p:spTgt spid="3">
-                                            <p:txEl>
-                                              <p:pRg st="11" end="11"/>
-                                            </p:txEl>
-                                          </p:spTgt>
-                                        </p:tgtEl>
-                                        <p:attrNameLst>
-                                          <p:attrName>style.visibility</p:attrName>
-                                        </p:attrNameLst>
-                                      </p:cBhvr>
-                                      <p:to>
-                                        <p:strVal val="visible"/>
-                                      </p:to>
-                                    </p:set>
-                                    <p:animEffect transition="in" filter="fade">
-                                      <p:cBhvr>
-                                        <p:cTn id="45" dur="500"/>
-                                        <p:tgtEl>
-                                          <p:spTgt spid="3">
-                                            <p:txEl>
-                                              <p:pRg st="11" end="11"/>
-                                            </p:txEl>
-                                          </p:spTgt>
-                                        </p:tgtEl>
-                                      </p:cBhvr>
-                                    </p:animEffect>
-                                  </p:childTnLst>
-                                </p:cTn>
-                              </p:par>
-                            </p:childTnLst>
-                          </p:cTn>
-                        </p:par>
-                      </p:childTnLst>
-                    </p:cTn>
-                  </p:par>
-                  <p:par>
-                    <p:cTn id="46" fill="hold">
-                      <p:stCondLst>
-                        <p:cond delay="indefinite"/>
-                      </p:stCondLst>
-                      <p:childTnLst>
-                        <p:par>
-                          <p:cTn id="47" fill="hold">
-                            <p:stCondLst>
-                              <p:cond delay="0"/>
-                            </p:stCondLst>
-                            <p:childTnLst>
-                              <p:par>
-                                <p:cTn id="48" presetID="10" presetClass="entr" presetSubtype="0" fill="hold" nodeType="clickEffect">
-                                  <p:stCondLst>
-                                    <p:cond delay="0"/>
-                                  </p:stCondLst>
-                                  <p:childTnLst>
-                                    <p:set>
-                                      <p:cBhvr>
-                                        <p:cTn id="49" dur="1" fill="hold">
-                                          <p:stCondLst>
-                                            <p:cond delay="0"/>
-                                          </p:stCondLst>
-                                        </p:cTn>
-                                        <p:tgtEl>
-                                          <p:spTgt spid="3">
-                                            <p:txEl>
-                                              <p:pRg st="12" end="12"/>
-                                            </p:txEl>
-                                          </p:spTgt>
-                                        </p:tgtEl>
-                                        <p:attrNameLst>
-                                          <p:attrName>style.visibility</p:attrName>
-                                        </p:attrNameLst>
-                                      </p:cBhvr>
-                                      <p:to>
-                                        <p:strVal val="visible"/>
-                                      </p:to>
-                                    </p:set>
-                                    <p:animEffect transition="in" filter="fade">
-                                      <p:cBhvr>
-                                        <p:cTn id="50" dur="500"/>
-                                        <p:tgtEl>
-                                          <p:spTgt spid="3">
-                                            <p:txEl>
-                                              <p:pRg st="12" end="12"/>
-                                            </p:txEl>
-                                          </p:spTgt>
-                                        </p:tgtEl>
-                                      </p:cBhvr>
-                                    </p:animEffect>
-                                  </p:childTnLst>
-                                </p:cTn>
-                              </p:par>
-                            </p:childTnLst>
-                          </p:cTn>
-                        </p:par>
-                      </p:childTnLst>
-                    </p:cTn>
-                  </p:par>
-                </p:childTnLst>
-              </p:cTn>
-              <p:prevCondLst>
-                <p:cond evt="onPrev" delay="0">
-                  <p:tgtEl>
-                    <p:sldTgt/>
-                  </p:tgtEl>
-                </p:cond>
-              </p:prevCondLst>
-              <p:nextCondLst>
-                <p:cond evt="onNext" delay="0">
-                  <p:tgtEl>
-                    <p:sldTgt/>
-                  </p:tgtEl>
-                </p:cond>
-              </p:nextCondLst>
-            </p:seq>
-          </p:childTnLst>
-        </p:cTn>
-      </p:par>
-    </p:tnLst>
-  </p:timing>
 </p:sld>
 </file>
 
 <file path=ppt/slides/slide9.xml><?xml version="1.0" encoding="utf-8"?>
-<p:sld xmlns:a="http://schemas.openxmlformats.org/drawingml/2006/main" xmlns:r="http://schemas.openxmlformats.org/officeDocument/2006/relationships" xmlns:p="http://schemas.openxmlformats.org/presentationml/2006/main">
+<p:sld xmlns:a="http://schemas.openxmlformats.org/drawingml/2006/main" xmlns:r="http://schemas.openxmlformats.org/officeDocument/2006/relationships" xmlns:p="http://schemas.openxmlformats.org/presentationml/2006/main" show="0">
   <p:cSld>
     <p:spTree>
       <p:nvGrpSpPr>
